--- a/Planning docs/Slides/lesson-8-4-teacher-slides.pptx
+++ b/Planning docs/Slides/lesson-8-4-teacher-slides.pptx
@@ -20,9 +20,11 @@
     <p:sldId id="268" r:id="rId14"/>
     <p:sldId id="269" r:id="rId15"/>
     <p:sldId id="270" r:id="rId16"/>
+    <p:sldId id="271" r:id="rId17"/>
+    <p:sldId id="272" r:id="rId18"/>
   </p:sldIdLst>
   <p:notesMasterIdLst>
-    <p:notesMasterId r:id="rId17"/>
+    <p:notesMasterId r:id="rId19"/>
   </p:notesMasterIdLst>
   <p:sldSz cx="9144000" cy="5143500"/>
   <p:notesSz cx="5143500" cy="9144000"/>
@@ -604,7 +606,7 @@
           <a:p>
             <a:r>
               <a:rPr lang="en-US" dirty="0"/>
-              <a:t>Each word appears in the chapters read this week, in the author’s own sentence.</a:t>
+              <a:t>Break the word into base + word part. Ask what the part adds to the meaning.</a:t>
             </a:r>
             <a:endParaRPr lang="en-US" dirty="0"/>
           </a:p>
@@ -692,7 +694,7 @@
           <a:p>
             <a:r>
               <a:rPr lang="en-US" dirty="0"/>
-              <a:t>Answers: mouse, songs, brothers, mice</a:t>
+              <a:t>Each word appears in the chapters read this week, in the author’s own sentence.</a:t>
             </a:r>
             <a:endParaRPr lang="en-US" dirty="0"/>
           </a:p>
@@ -780,7 +782,10 @@
           <a:p>
             <a:r>
               <a:rPr lang="en-US" dirty="0"/>
-              <a:t>Answers: mouse, songs, brothers, mice</a:t>
+              <a:t>Let students talk through the questions before revealing the pattern.
+A singular noun names one thing. A plural noun names more than one. Most plurals add -s or -es, but a few change their whole shape — one mouse becomes many mice.
+brothers and sisters are plural; mouse is singular.
+palm is singular; ears is plural.</a:t>
             </a:r>
             <a:endParaRPr lang="en-US" dirty="0"/>
           </a:p>
@@ -868,7 +873,10 @@
           <a:p>
             <a:r>
               <a:rPr lang="en-US" dirty="0"/>
-              <a:t>Did not double: wanted, looked, shouted, jumped | Doubled the consonant: nodding, wrapped, snapped, stopped</a:t>
+              <a:t>Let students talk through the questions before revealing the pattern.
+A singular noun names one thing. A plural noun names more than one. Most plurals add -s or -es, but a few change their whole shape — one mouse becomes many mice.
+brothers and sisters are plural; mouse is singular.
+palm is singular; ears is plural.</a:t>
             </a:r>
             <a:endParaRPr lang="en-US" dirty="0"/>
           </a:p>
@@ -956,7 +964,7 @@
           <a:p>
             <a:r>
               <a:rPr lang="en-US" dirty="0"/>
-              <a:t>Did not double: wanted, looked, shouted, jumped | Doubled the consonant: nodding, wrapped, snapped, stopped</a:t>
+              <a:t>Answers: mouses, brother., songes., foots</a:t>
             </a:r>
             <a:endParaRPr lang="en-US" dirty="0"/>
           </a:p>
@@ -1044,7 +1052,7 @@
           <a:p>
             <a:r>
               <a:rPr lang="en-US" dirty="0"/>
-              <a:t>Read the chapters, then return to the pause questions.</a:t>
+              <a:t>Answers: mouses, brother., songes., foots</a:t>
             </a:r>
             <a:endParaRPr lang="en-US" dirty="0"/>
           </a:p>
@@ -1068,6 +1076,182 @@
             <a:fld id="{F7021451-1387-4CA6-816F-3879F97B5CBC}" type="slidenum">
               <a:rPr lang="en-US"/>
               <a:t>15</a:t>
+            </a:fld>
+            <a:endParaRPr lang="en-US"/>
+          </a:p>
+        </p:txBody>
+      </p:sp>
+    </p:spTree>
+    <p:extLst>
+      <p:ext uri="{BB962C8B-B14F-4D97-AF65-F5344CB8AC3E}">
+        <p14:creationId xmlns:p14="http://schemas.microsoft.com/office/powerpoint/2010/main" val="1024086991"/>
+      </p:ext>
+    </p:extLst>
+  </p:cSld>
+  <p:clrMapOvr>
+    <a:masterClrMapping/>
+  </p:clrMapOvr>
+</p:notes>
+</file>
+
+<file path=ppt/notesSlides/notesSlide16.xml><?xml version="1.0" encoding="utf-8"?>
+<p:notes xmlns:a="http://schemas.openxmlformats.org/drawingml/2006/main" xmlns:r="http://schemas.openxmlformats.org/officeDocument/2006/relationships" xmlns:p="http://schemas.openxmlformats.org/presentationml/2006/main">
+  <p:cSld>
+    <p:spTree>
+      <p:nvGrpSpPr>
+        <p:cNvPr id="1" name=""/>
+        <p:cNvGrpSpPr/>
+        <p:nvPr/>
+      </p:nvGrpSpPr>
+      <p:grpSpPr>
+        <a:xfrm>
+          <a:off x="0" y="0"/>
+          <a:ext cx="0" cy="0"/>
+          <a:chOff x="0" y="0"/>
+          <a:chExt cx="0" cy="0"/>
+        </a:xfrm>
+      </p:grpSpPr>
+      <p:sp>
+        <p:nvSpPr>
+          <p:cNvPr id="2" name="Slide Image Placeholder 1"/>
+          <p:cNvSpPr>
+            <a:spLocks noGrp="1" noRot="1" noChangeAspect="1"/>
+          </p:cNvSpPr>
+          <p:nvPr>
+            <p:ph type="sldImg"/>
+          </p:nvPr>
+        </p:nvSpPr>
+        <p:spPr/>
+      </p:sp>
+      <p:sp>
+        <p:nvSpPr>
+          <p:cNvPr id="3" name="Notes Placeholder 2"/>
+          <p:cNvSpPr>
+            <a:spLocks noGrp="1"/>
+          </p:cNvSpPr>
+          <p:nvPr>
+            <p:ph type="body" idx="1"/>
+          </p:nvPr>
+        </p:nvSpPr>
+        <p:spPr/>
+        <p:txBody>
+          <a:bodyPr/>
+          <a:lstStyle/>
+          <a:p>
+            <a:r>
+              <a:rPr lang="en-US" dirty="0"/>
+              <a:t>Rule: When a base word ends in a silent e and the ending starts with a vowel, drop the e: hope + -ing = hoping. If the ending starts with a consonant, keep it: hope + -ful = hopeful.</a:t>
+            </a:r>
+            <a:endParaRPr lang="en-US" dirty="0"/>
+          </a:p>
+        </p:txBody>
+      </p:sp>
+      <p:sp>
+        <p:nvSpPr>
+          <p:cNvPr id="4" name="Slide Number Placeholder 3"/>
+          <p:cNvSpPr>
+            <a:spLocks noGrp="1"/>
+          </p:cNvSpPr>
+          <p:nvPr>
+            <p:ph type="sldNum" sz="quarter" idx="10"/>
+          </p:nvPr>
+        </p:nvSpPr>
+        <p:spPr/>
+        <p:txBody>
+          <a:bodyPr/>
+          <a:lstStyle/>
+          <a:p>
+            <a:fld id="{F7021451-1387-4CA6-816F-3879F97B5CBC}" type="slidenum">
+              <a:rPr lang="en-US"/>
+              <a:t>16</a:t>
+            </a:fld>
+            <a:endParaRPr lang="en-US"/>
+          </a:p>
+        </p:txBody>
+      </p:sp>
+    </p:spTree>
+    <p:extLst>
+      <p:ext uri="{BB962C8B-B14F-4D97-AF65-F5344CB8AC3E}">
+        <p14:creationId xmlns:p14="http://schemas.microsoft.com/office/powerpoint/2010/main" val="1024086991"/>
+      </p:ext>
+    </p:extLst>
+  </p:cSld>
+  <p:clrMapOvr>
+    <a:masterClrMapping/>
+  </p:clrMapOvr>
+</p:notes>
+</file>
+
+<file path=ppt/notesSlides/notesSlide17.xml><?xml version="1.0" encoding="utf-8"?>
+<p:notes xmlns:a="http://schemas.openxmlformats.org/drawingml/2006/main" xmlns:r="http://schemas.openxmlformats.org/officeDocument/2006/relationships" xmlns:p="http://schemas.openxmlformats.org/presentationml/2006/main">
+  <p:cSld>
+    <p:spTree>
+      <p:nvGrpSpPr>
+        <p:cNvPr id="1" name=""/>
+        <p:cNvGrpSpPr/>
+        <p:nvPr/>
+      </p:nvGrpSpPr>
+      <p:grpSpPr>
+        <a:xfrm>
+          <a:off x="0" y="0"/>
+          <a:ext cx="0" cy="0"/>
+          <a:chOff x="0" y="0"/>
+          <a:chExt cx="0" cy="0"/>
+        </a:xfrm>
+      </p:grpSpPr>
+      <p:sp>
+        <p:nvSpPr>
+          <p:cNvPr id="2" name="Slide Image Placeholder 1"/>
+          <p:cNvSpPr>
+            <a:spLocks noGrp="1" noRot="1" noChangeAspect="1"/>
+          </p:cNvSpPr>
+          <p:nvPr>
+            <p:ph type="sldImg"/>
+          </p:nvPr>
+        </p:nvSpPr>
+        <p:spPr/>
+      </p:sp>
+      <p:sp>
+        <p:nvSpPr>
+          <p:cNvPr id="3" name="Notes Placeholder 2"/>
+          <p:cNvSpPr>
+            <a:spLocks noGrp="1"/>
+          </p:cNvSpPr>
+          <p:nvPr>
+            <p:ph type="body" idx="1"/>
+          </p:nvPr>
+        </p:nvSpPr>
+        <p:spPr/>
+        <p:txBody>
+          <a:bodyPr/>
+          <a:lstStyle/>
+          <a:p>
+            <a:r>
+              <a:rPr lang="en-US" dirty="0"/>
+              <a:t>Read the chapters, then return to the pause questions.</a:t>
+            </a:r>
+            <a:endParaRPr lang="en-US" dirty="0"/>
+          </a:p>
+        </p:txBody>
+      </p:sp>
+      <p:sp>
+        <p:nvSpPr>
+          <p:cNvPr id="4" name="Slide Number Placeholder 3"/>
+          <p:cNvSpPr>
+            <a:spLocks noGrp="1"/>
+          </p:cNvSpPr>
+          <p:nvPr>
+            <p:ph type="sldNum" sz="quarter" idx="10"/>
+          </p:nvPr>
+        </p:nvSpPr>
+        <p:spPr/>
+        <p:txBody>
+          <a:bodyPr/>
+          <a:lstStyle/>
+          <a:p>
+            <a:fld id="{F7021451-1387-4CA6-816F-3879F97B5CBC}" type="slidenum">
+              <a:rPr lang="en-US"/>
+              <a:t>17</a:t>
             </a:fld>
             <a:endParaRPr lang="en-US"/>
           </a:p>
@@ -1484,7 +1668,7 @@
           <a:p>
             <a:r>
               <a:rPr lang="en-US" dirty="0"/>
-              <a:t>Reading lens: Good readers look back at what they have read and think about the big picture . Today we review all of Chapters 1–7. Think about how the author built Despereaux’s character — what a character looks like, what others say about them, and what they do — piece by piece.</a:t>
+              <a:t>Reading lens: Good readers look back at what they have read and think about the big picture. Today we review all of Chapters 1–7. Think about how the author built Despereaux’s character — what a character looks like, what others say about them, and what they do — piece by piece.</a:t>
             </a:r>
             <a:endParaRPr lang="en-US" dirty="0"/>
           </a:p>
@@ -1572,8 +1756,7 @@
           <a:p>
             <a:r>
               <a:rPr lang="en-US" dirty="0"/>
-              <a:t>Corrected:  1. Lester said he will call a meeting of the Mouse Council to decide what to do about Despereaux.
-Look for: Did you catch the proper nouns (Lester, Mouse Council, Despereaux, Antoinette), quotation marks, and the comma before the quote “I’ve”?</a:t>
+              <a:t>Tap through each highlighted word in the lesson and name what it does right before moving to the fix-it.</a:t>
             </a:r>
             <a:endParaRPr lang="en-US" dirty="0"/>
           </a:p>
@@ -1661,8 +1844,8 @@
           <a:p>
             <a:r>
               <a:rPr lang="en-US" dirty="0"/>
-              <a:t>Corrected:  1. Lester said he will call a meeting of the Mouse Council to decide what to do about Despereaux.
-Look for: Did you catch the proper nouns (Lester, Mouse Council, Despereaux, Antoinette), quotation marks, and the comma before the quote “I’ve”?</a:t>
+              <a:t>Corrected: Lester said he will call a meeting of the Mouse Council to decide what to do about Despereaux. 
+Look for: </a:t>
             </a:r>
             <a:endParaRPr lang="en-US" dirty="0"/>
           </a:p>
@@ -1750,7 +1933,8 @@
           <a:p>
             <a:r>
               <a:rPr lang="en-US" dirty="0"/>
-              <a:t>Break the word into base + word part. Ask what the part adds to the meaning.</a:t>
+              <a:t>Corrected: Lester said he will call a meeting of the Mouse Council to decide what to do about Despereaux. 
+Look for: </a:t>
             </a:r>
             <a:endParaRPr lang="en-US" dirty="0"/>
           </a:p>
@@ -2323,7 +2507,7 @@
             <a:avLst/>
           </a:prstGeom>
           <a:solidFill>
-            <a:srgbClr val="55C8E8"/>
+            <a:srgbClr val="8B6FC0"/>
           </a:solidFill>
           <a:ln/>
         </p:spPr>
@@ -2361,7 +2545,7 @@
                 <a:ea typeface="Calibri" pitchFamily="34" charset="-122"/>
                 <a:cs typeface="Calibri" pitchFamily="34" charset="-120"/>
               </a:rPr>
-              <a:t>🔤  Vocabulary</a:t>
+              <a:t>🌱  Morphology</a:t>
             </a:r>
             <a:endParaRPr lang="en-US" sz="2200" dirty="0"/>
           </a:p>
@@ -2394,13 +2578,13 @@
             <a:r>
               <a:rPr lang="en-US" sz="1100" b="1" spc="100" kern="0" dirty="0">
                 <a:solidFill>
-                  <a:srgbClr val="55C8E8"/>
-                </a:solidFill>
-                <a:latin typeface="Calibri" pitchFamily="34" charset="0"/>
-                <a:ea typeface="Calibri" pitchFamily="34" charset="-122"/>
-                <a:cs typeface="Calibri" pitchFamily="34" charset="-120"/>
-              </a:rPr>
-              <a:t>VOCABULARY</a:t>
+                  <a:srgbClr val="8B6FC0"/>
+                </a:solidFill>
+                <a:latin typeface="Calibri" pitchFamily="34" charset="0"/>
+                <a:ea typeface="Calibri" pitchFamily="34" charset="-122"/>
+                <a:cs typeface="Calibri" pitchFamily="34" charset="-120"/>
+              </a:rPr>
+              <a:t>-LESS</a:t>
             </a:r>
             <a:endParaRPr lang="en-US" sz="1100" dirty="0"/>
           </a:p>
@@ -2415,15 +2599,15 @@
         <p:spPr>
           <a:xfrm>
             <a:off x="365760" y="1097280"/>
-            <a:ext cx="8412480" cy="658368"/>
+            <a:ext cx="8412480" cy="621792"/>
           </a:xfrm>
           <a:prstGeom prst="roundRect">
             <a:avLst>
-              <a:gd name="adj" fmla="val 13889"/>
+              <a:gd name="adj" fmla="val 14706"/>
             </a:avLst>
           </a:prstGeom>
           <a:solidFill>
-            <a:srgbClr val="E5F7FC"/>
+            <a:srgbClr val="F0E8FF"/>
           </a:solidFill>
           <a:ln/>
           <a:effectLst>
@@ -2443,8 +2627,8 @@
         </p:nvSpPr>
         <p:spPr>
           <a:xfrm>
-            <a:off x="594360" y="1225296"/>
-            <a:ext cx="7863840" cy="420624"/>
+            <a:off x="594360" y="1216152"/>
+            <a:ext cx="7863840" cy="384048"/>
           </a:xfrm>
           <a:prstGeom prst="rect">
             <a:avLst/>
@@ -2460,31 +2644,17 @@
               <a:buNone/>
             </a:pPr>
             <a:r>
-              <a:rPr lang="en-US" sz="1700" b="1" dirty="0">
-                <a:solidFill>
-                  <a:srgbClr val="0E1C42"/>
-                </a:solidFill>
-                <a:latin typeface="Calibri" pitchFamily="34" charset="0"/>
-                <a:ea typeface="Calibri" pitchFamily="34" charset="-122"/>
-                <a:cs typeface="Calibri" pitchFamily="34" charset="-120"/>
-              </a:rPr>
-              <a:t>scurried  </a:t>
-            </a:r>
-            <a:pPr indent="0" marL="0">
-              <a:buNone/>
-            </a:pPr>
-            <a:r>
-              <a:rPr lang="en-US" sz="1400" dirty="0">
-                <a:solidFill>
-                  <a:srgbClr val="1E293B"/>
-                </a:solidFill>
-                <a:latin typeface="Calibri" pitchFamily="34" charset="0"/>
-                <a:ea typeface="Calibri" pitchFamily="34" charset="-122"/>
-                <a:cs typeface="Calibri" pitchFamily="34" charset="-120"/>
-              </a:rPr>
-              <a:t>Ran with quick, short, hurried steps.</a:t>
-            </a:r>
-            <a:endParaRPr lang="en-US" sz="1700" dirty="0"/>
+              <a:rPr lang="en-US" sz="1500" dirty="0">
+                <a:solidFill>
+                  <a:srgbClr val="1E293B"/>
+                </a:solidFill>
+                <a:latin typeface="Calibri" pitchFamily="34" charset="0"/>
+                <a:ea typeface="Calibri" pitchFamily="34" charset="-122"/>
+                <a:cs typeface="Calibri" pitchFamily="34" charset="-120"/>
+              </a:rPr>
+              <a:t>🌱  -less means without.</a:t>
+            </a:r>
+            <a:endParaRPr lang="en-US" sz="1500" dirty="0"/>
           </a:p>
         </p:txBody>
       </p:sp>
@@ -2496,16 +2666,16 @@
         </p:nvSpPr>
         <p:spPr>
           <a:xfrm>
-            <a:off x="365760" y="1828800"/>
-            <a:ext cx="8412480" cy="658368"/>
+            <a:off x="365760" y="1792224"/>
+            <a:ext cx="8412480" cy="621792"/>
           </a:xfrm>
           <a:prstGeom prst="roundRect">
             <a:avLst>
-              <a:gd name="adj" fmla="val 13889"/>
+              <a:gd name="adj" fmla="val 14706"/>
             </a:avLst>
           </a:prstGeom>
           <a:solidFill>
-            <a:srgbClr val="FFFFFF"/>
+            <a:srgbClr val="F8F4FF"/>
           </a:solidFill>
           <a:ln/>
           <a:effectLst>
@@ -2525,8 +2695,8 @@
         </p:nvSpPr>
         <p:spPr>
           <a:xfrm>
-            <a:off x="594360" y="1956816"/>
-            <a:ext cx="7863840" cy="420624"/>
+            <a:off x="594360" y="1911096"/>
+            <a:ext cx="7863840" cy="384048"/>
           </a:xfrm>
           <a:prstGeom prst="rect">
             <a:avLst/>
@@ -2542,31 +2712,17 @@
               <a:buNone/>
             </a:pPr>
             <a:r>
-              <a:rPr lang="en-US" sz="1700" b="1" dirty="0">
-                <a:solidFill>
-                  <a:srgbClr val="0E1C42"/>
-                </a:solidFill>
-                <a:latin typeface="Calibri" pitchFamily="34" charset="0"/>
-                <a:ea typeface="Calibri" pitchFamily="34" charset="-122"/>
-                <a:cs typeface="Calibri" pitchFamily="34" charset="-120"/>
-              </a:rPr>
-              <a:t>disappointment  </a:t>
-            </a:r>
-            <a:pPr indent="0" marL="0">
-              <a:buNone/>
-            </a:pPr>
-            <a:r>
-              <a:rPr lang="en-US" sz="1400" dirty="0">
-                <a:solidFill>
-                  <a:srgbClr val="1E293B"/>
-                </a:solidFill>
-                <a:latin typeface="Calibri" pitchFamily="34" charset="0"/>
-                <a:ea typeface="Calibri" pitchFamily="34" charset="-122"/>
-                <a:cs typeface="Calibri" pitchFamily="34" charset="-120"/>
-              </a:rPr>
-              <a:t>A person or thing that lets you down; not what you hoped for.</a:t>
-            </a:r>
-            <a:endParaRPr lang="en-US" sz="1700" dirty="0"/>
+              <a:rPr lang="en-US" sz="1500" dirty="0">
+                <a:solidFill>
+                  <a:srgbClr val="1E293B"/>
+                </a:solidFill>
+                <a:latin typeface="Calibri" pitchFamily="34" charset="0"/>
+                <a:ea typeface="Calibri" pitchFamily="34" charset="-122"/>
+                <a:cs typeface="Calibri" pitchFamily="34" charset="-120"/>
+              </a:rPr>
+              <a:t>🌱  hopeless = without hope · fearless = without fear · endless = without an end</a:t>
+            </a:r>
+            <a:endParaRPr lang="en-US" sz="1500" dirty="0"/>
           </a:p>
         </p:txBody>
       </p:sp>
@@ -2578,16 +2734,16 @@
         </p:nvSpPr>
         <p:spPr>
           <a:xfrm>
-            <a:off x="365760" y="2560320"/>
-            <a:ext cx="8412480" cy="658368"/>
+            <a:off x="365760" y="2487168"/>
+            <a:ext cx="8412480" cy="621792"/>
           </a:xfrm>
           <a:prstGeom prst="roundRect">
             <a:avLst>
-              <a:gd name="adj" fmla="val 13889"/>
+              <a:gd name="adj" fmla="val 14706"/>
             </a:avLst>
           </a:prstGeom>
           <a:solidFill>
-            <a:srgbClr val="E5F7FC"/>
+            <a:srgbClr val="F0E8FF"/>
           </a:solidFill>
           <a:ln/>
           <a:effectLst>
@@ -2607,8 +2763,8 @@
         </p:nvSpPr>
         <p:spPr>
           <a:xfrm>
-            <a:off x="594360" y="2688336"/>
-            <a:ext cx="7863840" cy="420624"/>
+            <a:off x="594360" y="2606040"/>
+            <a:ext cx="7863840" cy="384048"/>
           </a:xfrm>
           <a:prstGeom prst="rect">
             <a:avLst/>
@@ -2624,113 +2780,17 @@
               <a:buNone/>
             </a:pPr>
             <a:r>
-              <a:rPr lang="en-US" sz="1700" b="1" dirty="0">
-                <a:solidFill>
-                  <a:srgbClr val="0E1C42"/>
-                </a:solidFill>
-                <a:latin typeface="Calibri" pitchFamily="34" charset="0"/>
-                <a:ea typeface="Calibri" pitchFamily="34" charset="-122"/>
-                <a:cs typeface="Calibri" pitchFamily="34" charset="-120"/>
-              </a:rPr>
-              <a:t>oversize  </a:t>
-            </a:r>
-            <a:pPr indent="0" marL="0">
-              <a:buNone/>
-            </a:pPr>
-            <a:r>
-              <a:rPr lang="en-US" sz="1400" dirty="0">
-                <a:solidFill>
-                  <a:srgbClr val="1E293B"/>
-                </a:solidFill>
-                <a:latin typeface="Calibri" pitchFamily="34" charset="0"/>
-                <a:ea typeface="Calibri" pitchFamily="34" charset="-122"/>
-                <a:cs typeface="Calibri" pitchFamily="34" charset="-120"/>
-              </a:rPr>
-              <a:t>Bigger than the usual size.</a:t>
-            </a:r>
-            <a:endParaRPr lang="en-US" sz="1700" dirty="0"/>
-          </a:p>
-        </p:txBody>
-      </p:sp>
-      <p:sp>
-        <p:nvSpPr>
-          <p:cNvPr id="11" name="Shape 9"/>
-          <p:cNvSpPr/>
-          <p:nvPr/>
-        </p:nvSpPr>
-        <p:spPr>
-          <a:xfrm>
-            <a:off x="365760" y="3291840"/>
-            <a:ext cx="8412480" cy="658368"/>
-          </a:xfrm>
-          <a:prstGeom prst="roundRect">
-            <a:avLst>
-              <a:gd name="adj" fmla="val 13889"/>
-            </a:avLst>
-          </a:prstGeom>
-          <a:solidFill>
-            <a:srgbClr val="FFFFFF"/>
-          </a:solidFill>
-          <a:ln/>
-          <a:effectLst>
-            <a:outerShdw sx="100000" sy="100000" kx="0" ky="0" algn="bl" rotWithShape="0" blurRad="101600" dist="38100" dir="2700000">
-              <a:srgbClr val="000000">
-                <a:alpha val="12000"/>
-              </a:srgbClr>
-            </a:outerShdw>
-          </a:effectLst>
-        </p:spPr>
-      </p:sp>
-      <p:sp>
-        <p:nvSpPr>
-          <p:cNvPr id="12" name="Text 10"/>
-          <p:cNvSpPr/>
-          <p:nvPr/>
-        </p:nvSpPr>
-        <p:spPr>
-          <a:xfrm>
-            <a:off x="594360" y="3419856"/>
-            <a:ext cx="7863840" cy="420624"/>
-          </a:xfrm>
-          <a:prstGeom prst="rect">
-            <a:avLst/>
-          </a:prstGeom>
-          <a:noFill/>
-          <a:ln/>
-        </p:spPr>
-        <p:txBody>
-          <a:bodyPr wrap="square" lIns="0" tIns="0" rIns="0" bIns="0" rtlCol="0" anchor="ctr"/>
-          <a:lstStyle/>
-          <a:p>
-            <a:pPr indent="0" marL="0">
-              <a:buNone/>
-            </a:pPr>
-            <a:r>
-              <a:rPr lang="en-US" sz="1700" b="1" dirty="0">
-                <a:solidFill>
-                  <a:srgbClr val="0E1C42"/>
-                </a:solidFill>
-                <a:latin typeface="Calibri" pitchFamily="34" charset="0"/>
-                <a:ea typeface="Calibri" pitchFamily="34" charset="-122"/>
-                <a:cs typeface="Calibri" pitchFamily="34" charset="-120"/>
-              </a:rPr>
-              <a:t>handkerchief  </a:t>
-            </a:r>
-            <a:pPr indent="0" marL="0">
-              <a:buNone/>
-            </a:pPr>
-            <a:r>
-              <a:rPr lang="en-US" sz="1400" dirty="0">
-                <a:solidFill>
-                  <a:srgbClr val="1E293B"/>
-                </a:solidFill>
-                <a:latin typeface="Calibri" pitchFamily="34" charset="0"/>
-                <a:ea typeface="Calibri" pitchFamily="34" charset="-122"/>
-                <a:cs typeface="Calibri" pitchFamily="34" charset="-120"/>
-              </a:rPr>
-              <a:t>A small square of cloth you carry to wipe your nose or eyes.</a:t>
-            </a:r>
-            <a:endParaRPr lang="en-US" sz="1700" dirty="0"/>
+              <a:rPr lang="en-US" sz="1500" dirty="0">
+                <a:solidFill>
+                  <a:srgbClr val="1E293B"/>
+                </a:solidFill>
+                <a:latin typeface="Calibri" pitchFamily="34" charset="0"/>
+                <a:ea typeface="Calibri" pitchFamily="34" charset="-122"/>
+                <a:cs typeface="Calibri" pitchFamily="34" charset="-120"/>
+              </a:rPr>
+              <a:t>🌱  Dice Roll Challenge! Roll a word, then say out loud what it means and how the word part changed it. Tap to check yourself.</a:t>
+            </a:r>
+            <a:endParaRPr lang="en-US" sz="1500" dirty="0"/>
           </a:p>
         </p:txBody>
       </p:sp>
@@ -2748,7 +2808,7 @@
     <p:bg>
       <p:bgPr>
         <a:solidFill>
-          <a:srgbClr val="F8FAFC"/>
+          <a:srgbClr val="FFFFFF"/>
         </a:solidFill>
       </p:bgPr>
     </p:bg>
@@ -2781,7 +2841,7 @@
             <a:avLst/>
           </a:prstGeom>
           <a:solidFill>
-            <a:srgbClr val="C7922C"/>
+            <a:srgbClr val="55C8E8"/>
           </a:solidFill>
           <a:ln/>
         </p:spPr>
@@ -2819,7 +2879,7 @@
                 <a:ea typeface="Calibri" pitchFamily="34" charset="-122"/>
                 <a:cs typeface="Calibri" pitchFamily="34" charset="-120"/>
               </a:rPr>
-              <a:t>✏️  Grammar</a:t>
+              <a:t>🔤  Vocabulary</a:t>
             </a:r>
             <a:endParaRPr lang="en-US" sz="2200" dirty="0"/>
           </a:p>
@@ -2833,7 +2893,7 @@
         </p:nvSpPr>
         <p:spPr>
           <a:xfrm>
-            <a:off x="365760" y="777240"/>
+            <a:off x="365760" y="804672"/>
             <a:ext cx="8229600" cy="237744"/>
           </a:xfrm>
           <a:prstGeom prst="rect">
@@ -2852,13 +2912,13 @@
             <a:r>
               <a:rPr lang="en-US" sz="1100" b="1" spc="100" kern="0" dirty="0">
                 <a:solidFill>
-                  <a:srgbClr val="C7922C"/>
-                </a:solidFill>
-                <a:latin typeface="Calibri" pitchFamily="34" charset="0"/>
-                <a:ea typeface="Calibri" pitchFamily="34" charset="-122"/>
-                <a:cs typeface="Calibri" pitchFamily="34" charset="-120"/>
-              </a:rPr>
-              <a:t>SINGULAR AND PLURAL NOUNS</a:t>
+                  <a:srgbClr val="55C8E8"/>
+                </a:solidFill>
+                <a:latin typeface="Calibri" pitchFamily="34" charset="0"/>
+                <a:ea typeface="Calibri" pitchFamily="34" charset="-122"/>
+                <a:cs typeface="Calibri" pitchFamily="34" charset="-120"/>
+              </a:rPr>
+              <a:t>VOCABULARY</a:t>
             </a:r>
             <a:endParaRPr lang="en-US" sz="1100" dirty="0"/>
           </a:p>
@@ -2872,7 +2932,7 @@
         </p:nvSpPr>
         <p:spPr>
           <a:xfrm>
-            <a:off x="365760" y="1078992"/>
+            <a:off x="365760" y="1097280"/>
             <a:ext cx="8412480" cy="658368"/>
           </a:xfrm>
           <a:prstGeom prst="roundRect">
@@ -2881,7 +2941,7 @@
             </a:avLst>
           </a:prstGeom>
           <a:solidFill>
-            <a:srgbClr val="FEF6E8"/>
+            <a:srgbClr val="E5F7FC"/>
           </a:solidFill>
           <a:ln/>
           <a:effectLst>
@@ -2902,7 +2962,7 @@
         <p:spPr>
           <a:xfrm>
             <a:off x="594360" y="1225296"/>
-            <a:ext cx="7863840" cy="402336"/>
+            <a:ext cx="7863840" cy="420624"/>
           </a:xfrm>
           <a:prstGeom prst="rect">
             <a:avLst/>
@@ -2918,17 +2978,31 @@
               <a:buNone/>
             </a:pPr>
             <a:r>
-              <a:rPr lang="en-US" sz="1600" dirty="0">
-                <a:solidFill>
-                  <a:srgbClr val="1E293B"/>
-                </a:solidFill>
-                <a:latin typeface="Calibri" pitchFamily="34" charset="0"/>
-                <a:ea typeface="Calibri" pitchFamily="34" charset="-122"/>
-                <a:cs typeface="Calibri" pitchFamily="34" charset="-120"/>
-              </a:rPr>
-              <a:t>A mouse sat at the foot of the king.</a:t>
-            </a:r>
-            <a:endParaRPr lang="en-US" sz="1600" dirty="0"/>
+              <a:rPr lang="en-US" sz="1700" b="1" dirty="0">
+                <a:solidFill>
+                  <a:srgbClr val="0E1C42"/>
+                </a:solidFill>
+                <a:latin typeface="Calibri" pitchFamily="34" charset="0"/>
+                <a:ea typeface="Calibri" pitchFamily="34" charset="-122"/>
+                <a:cs typeface="Calibri" pitchFamily="34" charset="-120"/>
+              </a:rPr>
+              <a:t>scurried  </a:t>
+            </a:r>
+            <a:pPr indent="0" marL="0">
+              <a:buNone/>
+            </a:pPr>
+            <a:r>
+              <a:rPr lang="en-US" sz="1400" dirty="0">
+                <a:solidFill>
+                  <a:srgbClr val="1E293B"/>
+                </a:solidFill>
+                <a:latin typeface="Calibri" pitchFamily="34" charset="0"/>
+                <a:ea typeface="Calibri" pitchFamily="34" charset="-122"/>
+                <a:cs typeface="Calibri" pitchFamily="34" charset="-120"/>
+              </a:rPr>
+              <a:t>Ran with quick, short, hurried steps.</a:t>
+            </a:r>
+            <a:endParaRPr lang="en-US" sz="1700" dirty="0"/>
           </a:p>
         </p:txBody>
       </p:sp>
@@ -2940,7 +3014,7 @@
         </p:nvSpPr>
         <p:spPr>
           <a:xfrm>
-            <a:off x="365760" y="1810512"/>
+            <a:off x="365760" y="1828800"/>
             <a:ext cx="8412480" cy="658368"/>
           </a:xfrm>
           <a:prstGeom prst="roundRect">
@@ -2970,7 +3044,7 @@
         <p:spPr>
           <a:xfrm>
             <a:off x="594360" y="1956816"/>
-            <a:ext cx="7863840" cy="402336"/>
+            <a:ext cx="7863840" cy="420624"/>
           </a:xfrm>
           <a:prstGeom prst="rect">
             <a:avLst/>
@@ -2986,17 +3060,31 @@
               <a:buNone/>
             </a:pPr>
             <a:r>
-              <a:rPr lang="en-US" sz="1600" dirty="0">
-                <a:solidFill>
-                  <a:srgbClr val="1E293B"/>
-                </a:solidFill>
-                <a:latin typeface="Calibri" pitchFamily="34" charset="0"/>
-                <a:ea typeface="Calibri" pitchFamily="34" charset="-122"/>
-                <a:cs typeface="Calibri" pitchFamily="34" charset="-120"/>
-              </a:rPr>
-              <a:t>The king played songs on his guitar.</a:t>
-            </a:r>
-            <a:endParaRPr lang="en-US" sz="1600" dirty="0"/>
+              <a:rPr lang="en-US" sz="1700" b="1" dirty="0">
+                <a:solidFill>
+                  <a:srgbClr val="0E1C42"/>
+                </a:solidFill>
+                <a:latin typeface="Calibri" pitchFamily="34" charset="0"/>
+                <a:ea typeface="Calibri" pitchFamily="34" charset="-122"/>
+                <a:cs typeface="Calibri" pitchFamily="34" charset="-120"/>
+              </a:rPr>
+              <a:t>disappointment  </a:t>
+            </a:r>
+            <a:pPr indent="0" marL="0">
+              <a:buNone/>
+            </a:pPr>
+            <a:r>
+              <a:rPr lang="en-US" sz="1400" dirty="0">
+                <a:solidFill>
+                  <a:srgbClr val="1E293B"/>
+                </a:solidFill>
+                <a:latin typeface="Calibri" pitchFamily="34" charset="0"/>
+                <a:ea typeface="Calibri" pitchFamily="34" charset="-122"/>
+                <a:cs typeface="Calibri" pitchFamily="34" charset="-120"/>
+              </a:rPr>
+              <a:t>A person or thing that lets you down; not what you hoped for.</a:t>
+            </a:r>
+            <a:endParaRPr lang="en-US" sz="1700" dirty="0"/>
           </a:p>
         </p:txBody>
       </p:sp>
@@ -3008,7 +3096,7 @@
         </p:nvSpPr>
         <p:spPr>
           <a:xfrm>
-            <a:off x="365760" y="2542032"/>
+            <a:off x="365760" y="2560320"/>
             <a:ext cx="8412480" cy="658368"/>
           </a:xfrm>
           <a:prstGeom prst="roundRect">
@@ -3017,7 +3105,7 @@
             </a:avLst>
           </a:prstGeom>
           <a:solidFill>
-            <a:srgbClr val="FEF6E8"/>
+            <a:srgbClr val="E5F7FC"/>
           </a:solidFill>
           <a:ln/>
           <a:effectLst>
@@ -3038,7 +3126,7 @@
         <p:spPr>
           <a:xfrm>
             <a:off x="594360" y="2688336"/>
-            <a:ext cx="7863840" cy="402336"/>
+            <a:ext cx="7863840" cy="420624"/>
           </a:xfrm>
           <a:prstGeom prst="rect">
             <a:avLst/>
@@ -3054,17 +3142,31 @@
               <a:buNone/>
             </a:pPr>
             <a:r>
-              <a:rPr lang="en-US" sz="1600" dirty="0">
-                <a:solidFill>
-                  <a:srgbClr val="1E293B"/>
-                </a:solidFill>
-                <a:latin typeface="Calibri" pitchFamily="34" charset="0"/>
-                <a:ea typeface="Calibri" pitchFamily="34" charset="-122"/>
-                <a:cs typeface="Calibri" pitchFamily="34" charset="-120"/>
-              </a:rPr>
-              <a:t>Despereaux had two brothers and one sister.</a:t>
-            </a:r>
-            <a:endParaRPr lang="en-US" sz="1600" dirty="0"/>
+              <a:rPr lang="en-US" sz="1700" b="1" dirty="0">
+                <a:solidFill>
+                  <a:srgbClr val="0E1C42"/>
+                </a:solidFill>
+                <a:latin typeface="Calibri" pitchFamily="34" charset="0"/>
+                <a:ea typeface="Calibri" pitchFamily="34" charset="-122"/>
+                <a:cs typeface="Calibri" pitchFamily="34" charset="-120"/>
+              </a:rPr>
+              <a:t>oversize  </a:t>
+            </a:r>
+            <a:pPr indent="0" marL="0">
+              <a:buNone/>
+            </a:pPr>
+            <a:r>
+              <a:rPr lang="en-US" sz="1400" dirty="0">
+                <a:solidFill>
+                  <a:srgbClr val="1E293B"/>
+                </a:solidFill>
+                <a:latin typeface="Calibri" pitchFamily="34" charset="0"/>
+                <a:ea typeface="Calibri" pitchFamily="34" charset="-122"/>
+                <a:cs typeface="Calibri" pitchFamily="34" charset="-120"/>
+              </a:rPr>
+              <a:t>Bigger than the usual size.</a:t>
+            </a:r>
+            <a:endParaRPr lang="en-US" sz="1700" dirty="0"/>
           </a:p>
         </p:txBody>
       </p:sp>
@@ -3076,7 +3178,7 @@
         </p:nvSpPr>
         <p:spPr>
           <a:xfrm>
-            <a:off x="365760" y="3273552"/>
+            <a:off x="365760" y="3291840"/>
             <a:ext cx="8412480" cy="658368"/>
           </a:xfrm>
           <a:prstGeom prst="roundRect">
@@ -3106,7 +3208,7 @@
         <p:spPr>
           <a:xfrm>
             <a:off x="594360" y="3419856"/>
-            <a:ext cx="7863840" cy="402336"/>
+            <a:ext cx="7863840" cy="420624"/>
           </a:xfrm>
           <a:prstGeom prst="rect">
             <a:avLst/>
@@ -3122,56 +3224,31 @@
               <a:buNone/>
             </a:pPr>
             <a:r>
-              <a:rPr lang="en-US" sz="1600" dirty="0">
-                <a:solidFill>
-                  <a:srgbClr val="1E293B"/>
-                </a:solidFill>
-                <a:latin typeface="Calibri" pitchFamily="34" charset="0"/>
-                <a:ea typeface="Calibri" pitchFamily="34" charset="-122"/>
-                <a:cs typeface="Calibri" pitchFamily="34" charset="-120"/>
-              </a:rPr>
-              <a:t>The mice of the castle feared the dungeon.</a:t>
-            </a:r>
-            <a:endParaRPr lang="en-US" sz="1600" dirty="0"/>
-          </a:p>
-        </p:txBody>
-      </p:sp>
-      <p:sp>
-        <p:nvSpPr>
-          <p:cNvPr id="13" name="Text 11"/>
-          <p:cNvSpPr/>
-          <p:nvPr/>
-        </p:nvSpPr>
-        <p:spPr>
-          <a:xfrm>
-            <a:off x="365760" y="4050792"/>
-            <a:ext cx="8412480" cy="365760"/>
-          </a:xfrm>
-          <a:prstGeom prst="rect">
-            <a:avLst/>
-          </a:prstGeom>
-          <a:noFill/>
-          <a:ln/>
-        </p:spPr>
-        <p:txBody>
-          <a:bodyPr wrap="square" lIns="0" tIns="0" rIns="0" bIns="0" rtlCol="0" anchor="ctr"/>
-          <a:lstStyle/>
-          <a:p>
-            <a:pPr indent="0" marL="0">
-              <a:buNone/>
-            </a:pPr>
-            <a:r>
-              <a:rPr lang="en-US" sz="1500" i="1" dirty="0">
-                <a:solidFill>
-                  <a:srgbClr val="64748B"/>
-                </a:solidFill>
-                <a:latin typeface="Calibri" pitchFamily="34" charset="0"/>
-                <a:ea typeface="Calibri" pitchFamily="34" charset="-122"/>
-                <a:cs typeface="Calibri" pitchFamily="34" charset="-120"/>
-              </a:rPr>
-              <a:t>Your turn. Find the spotter word that is plural. Tap a word to check — green means you got it.</a:t>
-            </a:r>
-            <a:endParaRPr lang="en-US" sz="1500" dirty="0"/>
+              <a:rPr lang="en-US" sz="1700" b="1" dirty="0">
+                <a:solidFill>
+                  <a:srgbClr val="0E1C42"/>
+                </a:solidFill>
+                <a:latin typeface="Calibri" pitchFamily="34" charset="0"/>
+                <a:ea typeface="Calibri" pitchFamily="34" charset="-122"/>
+                <a:cs typeface="Calibri" pitchFamily="34" charset="-120"/>
+              </a:rPr>
+              <a:t>handkerchief  </a:t>
+            </a:r>
+            <a:pPr indent="0" marL="0">
+              <a:buNone/>
+            </a:pPr>
+            <a:r>
+              <a:rPr lang="en-US" sz="1400" dirty="0">
+                <a:solidFill>
+                  <a:srgbClr val="1E293B"/>
+                </a:solidFill>
+                <a:latin typeface="Calibri" pitchFamily="34" charset="0"/>
+                <a:ea typeface="Calibri" pitchFamily="34" charset="-122"/>
+                <a:cs typeface="Calibri" pitchFamily="34" charset="-120"/>
+              </a:rPr>
+              <a:t>A small square of cloth you carry to wipe your nose or eyes.</a:t>
+            </a:r>
+            <a:endParaRPr lang="en-US" sz="1700" dirty="0"/>
           </a:p>
         </p:txBody>
       </p:sp>
@@ -3260,7 +3337,7 @@
                 <a:ea typeface="Calibri" pitchFamily="34" charset="-122"/>
                 <a:cs typeface="Calibri" pitchFamily="34" charset="-120"/>
               </a:rPr>
-              <a:t>✏️  Grammar</a:t>
+              <a:t>✏️  Grammar — What do you notice?</a:t>
             </a:r>
             <a:endParaRPr lang="en-US" sz="2200" dirty="0"/>
           </a:p>
@@ -3274,7 +3351,7 @@
         </p:nvSpPr>
         <p:spPr>
           <a:xfrm>
-            <a:off x="365760" y="777240"/>
+            <a:off x="365760" y="749808"/>
             <a:ext cx="8229600" cy="237744"/>
           </a:xfrm>
           <a:prstGeom prst="rect">
@@ -3307,13 +3384,52 @@
       </p:sp>
       <p:sp>
         <p:nvSpPr>
-          <p:cNvPr id="5" name="Shape 3"/>
-          <p:cNvSpPr/>
-          <p:nvPr/>
-        </p:nvSpPr>
-        <p:spPr>
-          <a:xfrm>
-            <a:off x="365760" y="1078992"/>
+          <p:cNvPr id="5" name="Text 3"/>
+          <p:cNvSpPr/>
+          <p:nvPr/>
+        </p:nvSpPr>
+        <p:spPr>
+          <a:xfrm>
+            <a:off x="365760" y="987552"/>
+            <a:ext cx="8412480" cy="411480"/>
+          </a:xfrm>
+          <a:prstGeom prst="rect">
+            <a:avLst/>
+          </a:prstGeom>
+          <a:noFill/>
+          <a:ln/>
+        </p:spPr>
+        <p:txBody>
+          <a:bodyPr wrap="square" lIns="0" tIns="0" rIns="0" bIns="0" rtlCol="0" anchor="ctr"/>
+          <a:lstStyle/>
+          <a:p>
+            <a:pPr indent="0" marL="0">
+              <a:buNone/>
+            </a:pPr>
+            <a:r>
+              <a:rPr lang="en-US" sz="1500" i="1" dirty="0">
+                <a:solidFill>
+                  <a:srgbClr val="64748B"/>
+                </a:solidFill>
+                <a:latin typeface="Calibri" pitchFamily="34" charset="0"/>
+                <a:ea typeface="Calibri" pitchFamily="34" charset="-122"/>
+                <a:cs typeface="Calibri" pitchFamily="34" charset="-120"/>
+              </a:rPr>
+              <a:t>Look at the endings of the nouns below.</a:t>
+            </a:r>
+            <a:endParaRPr lang="en-US" sz="1500" dirty="0"/>
+          </a:p>
+        </p:txBody>
+      </p:sp>
+      <p:sp>
+        <p:nvSpPr>
+          <p:cNvPr id="6" name="Shape 4"/>
+          <p:cNvSpPr/>
+          <p:nvPr/>
+        </p:nvSpPr>
+        <p:spPr>
+          <a:xfrm>
+            <a:off x="365760" y="1463040"/>
             <a:ext cx="8412480" cy="658368"/>
           </a:xfrm>
           <a:prstGeom prst="roundRect">
@@ -3324,7 +3440,12 @@
           <a:solidFill>
             <a:srgbClr val="FEF6E8"/>
           </a:solidFill>
-          <a:ln/>
+          <a:ln w="19050">
+            <a:solidFill>
+              <a:srgbClr val="C7922C"/>
+            </a:solidFill>
+            <a:prstDash val="solid"/>
+          </a:ln>
           <a:effectLst>
             <a:outerShdw sx="100000" sy="100000" kx="0" ky="0" algn="bl" rotWithShape="0" blurRad="101600" dist="38100" dir="2700000">
               <a:srgbClr val="000000">
@@ -3336,14 +3457,14 @@
       </p:sp>
       <p:sp>
         <p:nvSpPr>
-          <p:cNvPr id="6" name="Text 4"/>
-          <p:cNvSpPr/>
-          <p:nvPr/>
-        </p:nvSpPr>
-        <p:spPr>
-          <a:xfrm>
-            <a:off x="594360" y="1225296"/>
-            <a:ext cx="7863840" cy="402336"/>
+          <p:cNvPr id="7" name="Text 5"/>
+          <p:cNvSpPr/>
+          <p:nvPr/>
+        </p:nvSpPr>
+        <p:spPr>
+          <a:xfrm>
+            <a:off x="594360" y="1591056"/>
+            <a:ext cx="7955280" cy="402336"/>
           </a:xfrm>
           <a:prstGeom prst="rect">
             <a:avLst/>
@@ -3358,58 +3479,338 @@
             <a:pPr indent="0" marL="0">
               <a:buNone/>
             </a:pPr>
-            <a:r>
-              <a:rPr lang="en-US" sz="1600" dirty="0">
-                <a:solidFill>
-                  <a:srgbClr val="1E293B"/>
-                </a:solidFill>
-                <a:latin typeface="Calibri" pitchFamily="34" charset="0"/>
-                <a:ea typeface="Calibri" pitchFamily="34" charset="-122"/>
-                <a:cs typeface="Calibri" pitchFamily="34" charset="-120"/>
-              </a:rPr>
-              <a:t>A </a:t>
-            </a:r>
-            <a:pPr indent="0" marL="0">
-              <a:buNone/>
-            </a:pPr>
-            <a:r>
-              <a:rPr lang="en-US" sz="1600" b="1" dirty="0">
-                <a:solidFill>
-                  <a:srgbClr val="34B76F"/>
-                </a:solidFill>
-                <a:latin typeface="Calibri" pitchFamily="34" charset="0"/>
-                <a:ea typeface="Calibri" pitchFamily="34" charset="-122"/>
-                <a:cs typeface="Calibri" pitchFamily="34" charset="-120"/>
-              </a:rPr>
-              <a:t>mouse</a:t>
-            </a:r>
-            <a:pPr indent="0" marL="0">
-              <a:buNone/>
-            </a:pPr>
-            <a:r>
-              <a:rPr lang="en-US" sz="1600" dirty="0">
-                <a:solidFill>
-                  <a:srgbClr val="1E293B"/>
-                </a:solidFill>
-                <a:latin typeface="Calibri" pitchFamily="34" charset="0"/>
-                <a:ea typeface="Calibri" pitchFamily="34" charset="-122"/>
-                <a:cs typeface="Calibri" pitchFamily="34" charset="-120"/>
-              </a:rPr>
-              <a:t> sat at the foot of the king.</a:t>
-            </a:r>
-            <a:endParaRPr lang="en-US" sz="1600" dirty="0"/>
-          </a:p>
-        </p:txBody>
-      </p:sp>
-      <p:sp>
-        <p:nvSpPr>
-          <p:cNvPr id="7" name="Shape 5"/>
-          <p:cNvSpPr/>
-          <p:nvPr/>
-        </p:nvSpPr>
-        <p:spPr>
-          <a:xfrm>
-            <a:off x="365760" y="1810512"/>
+            <a:endParaRPr lang="en-US" sz="1700" dirty="0"/>
+          </a:p>
+        </p:txBody>
+      </p:sp>
+      <p:sp>
+        <p:nvSpPr>
+          <p:cNvPr id="8" name="Text 6"/>
+          <p:cNvSpPr/>
+          <p:nvPr/>
+        </p:nvSpPr>
+        <p:spPr>
+          <a:xfrm>
+            <a:off x="594360" y="1591056"/>
+            <a:ext cx="7955280" cy="402336"/>
+          </a:xfrm>
+          <a:prstGeom prst="rect">
+            <a:avLst/>
+          </a:prstGeom>
+          <a:noFill/>
+          <a:ln/>
+        </p:spPr>
+        <p:txBody>
+          <a:bodyPr wrap="square" lIns="0" tIns="0" rIns="0" bIns="0" rtlCol="0" anchor="ctr"/>
+          <a:lstStyle/>
+          <a:p>
+            <a:pPr indent="0" marL="0">
+              <a:buNone/>
+            </a:pPr>
+            <a:r>
+              <a:rPr lang="en-US" sz="1700" dirty="0">
+                <a:solidFill>
+                  <a:srgbClr val="1E293B"/>
+                </a:solidFill>
+                <a:latin typeface="Calibri" pitchFamily="34" charset="0"/>
+                <a:ea typeface="Calibri" pitchFamily="34" charset="-122"/>
+                <a:cs typeface="Calibri" pitchFamily="34" charset="-120"/>
+              </a:rPr>
+              <a:t>Despereaux’s</a:t>
+            </a:r>
+            <a:pPr indent="0" marL="0">
+              <a:buNone/>
+            </a:pPr>
+            <a:r>
+              <a:rPr lang="en-US" sz="1700" dirty="0">
+                <a:solidFill>
+                  <a:srgbClr val="1E293B"/>
+                </a:solidFill>
+                <a:latin typeface="Calibri" pitchFamily="34" charset="0"/>
+                <a:ea typeface="Calibri" pitchFamily="34" charset="-122"/>
+                <a:cs typeface="Calibri" pitchFamily="34" charset="-120"/>
+              </a:rPr>
+              <a:t> </a:t>
+            </a:r>
+            <a:pPr indent="0" marL="0">
+              <a:buNone/>
+            </a:pPr>
+            <a:r>
+              <a:rPr lang="en-US" sz="1700" dirty="0">
+                <a:solidFill>
+                  <a:srgbClr val="1E293B"/>
+                </a:solidFill>
+                <a:latin typeface="Calibri" pitchFamily="34" charset="0"/>
+                <a:ea typeface="Calibri" pitchFamily="34" charset="-122"/>
+                <a:cs typeface="Calibri" pitchFamily="34" charset="-120"/>
+              </a:rPr>
+              <a:t>brothers</a:t>
+            </a:r>
+            <a:pPr indent="0" marL="0">
+              <a:buNone/>
+            </a:pPr>
+            <a:r>
+              <a:rPr lang="en-US" sz="1700" dirty="0">
+                <a:solidFill>
+                  <a:srgbClr val="1E293B"/>
+                </a:solidFill>
+                <a:latin typeface="Calibri" pitchFamily="34" charset="0"/>
+                <a:ea typeface="Calibri" pitchFamily="34" charset="-122"/>
+                <a:cs typeface="Calibri" pitchFamily="34" charset="-120"/>
+              </a:rPr>
+              <a:t> </a:t>
+            </a:r>
+            <a:pPr indent="0" marL="0">
+              <a:buNone/>
+            </a:pPr>
+            <a:r>
+              <a:rPr lang="en-US" sz="1700" dirty="0">
+                <a:solidFill>
+                  <a:srgbClr val="1E293B"/>
+                </a:solidFill>
+                <a:latin typeface="Calibri" pitchFamily="34" charset="0"/>
+                <a:ea typeface="Calibri" pitchFamily="34" charset="-122"/>
+                <a:cs typeface="Calibri" pitchFamily="34" charset="-120"/>
+              </a:rPr>
+              <a:t>and</a:t>
+            </a:r>
+            <a:pPr indent="0" marL="0">
+              <a:buNone/>
+            </a:pPr>
+            <a:r>
+              <a:rPr lang="en-US" sz="1700" dirty="0">
+                <a:solidFill>
+                  <a:srgbClr val="1E293B"/>
+                </a:solidFill>
+                <a:latin typeface="Calibri" pitchFamily="34" charset="0"/>
+                <a:ea typeface="Calibri" pitchFamily="34" charset="-122"/>
+                <a:cs typeface="Calibri" pitchFamily="34" charset="-120"/>
+              </a:rPr>
+              <a:t> </a:t>
+            </a:r>
+            <a:pPr indent="0" marL="0">
+              <a:buNone/>
+            </a:pPr>
+            <a:r>
+              <a:rPr lang="en-US" sz="1700" dirty="0">
+                <a:solidFill>
+                  <a:srgbClr val="1E293B"/>
+                </a:solidFill>
+                <a:latin typeface="Calibri" pitchFamily="34" charset="0"/>
+                <a:ea typeface="Calibri" pitchFamily="34" charset="-122"/>
+                <a:cs typeface="Calibri" pitchFamily="34" charset="-120"/>
+              </a:rPr>
+              <a:t>sisters</a:t>
+            </a:r>
+            <a:pPr indent="0" marL="0">
+              <a:buNone/>
+            </a:pPr>
+            <a:r>
+              <a:rPr lang="en-US" sz="1700" dirty="0">
+                <a:solidFill>
+                  <a:srgbClr val="1E293B"/>
+                </a:solidFill>
+                <a:latin typeface="Calibri" pitchFamily="34" charset="0"/>
+                <a:ea typeface="Calibri" pitchFamily="34" charset="-122"/>
+                <a:cs typeface="Calibri" pitchFamily="34" charset="-120"/>
+              </a:rPr>
+              <a:t> </a:t>
+            </a:r>
+            <a:pPr indent="0" marL="0">
+              <a:buNone/>
+            </a:pPr>
+            <a:r>
+              <a:rPr lang="en-US" sz="1700" dirty="0">
+                <a:solidFill>
+                  <a:srgbClr val="1E293B"/>
+                </a:solidFill>
+                <a:latin typeface="Calibri" pitchFamily="34" charset="0"/>
+                <a:ea typeface="Calibri" pitchFamily="34" charset="-122"/>
+                <a:cs typeface="Calibri" pitchFamily="34" charset="-120"/>
+              </a:rPr>
+              <a:t>stepped</a:t>
+            </a:r>
+            <a:pPr indent="0" marL="0">
+              <a:buNone/>
+            </a:pPr>
+            <a:r>
+              <a:rPr lang="en-US" sz="1700" dirty="0">
+                <a:solidFill>
+                  <a:srgbClr val="1E293B"/>
+                </a:solidFill>
+                <a:latin typeface="Calibri" pitchFamily="34" charset="0"/>
+                <a:ea typeface="Calibri" pitchFamily="34" charset="-122"/>
+                <a:cs typeface="Calibri" pitchFamily="34" charset="-120"/>
+              </a:rPr>
+              <a:t> </a:t>
+            </a:r>
+            <a:pPr indent="0" marL="0">
+              <a:buNone/>
+            </a:pPr>
+            <a:r>
+              <a:rPr lang="en-US" sz="1700" dirty="0">
+                <a:solidFill>
+                  <a:srgbClr val="1E293B"/>
+                </a:solidFill>
+                <a:latin typeface="Calibri" pitchFamily="34" charset="0"/>
+                <a:ea typeface="Calibri" pitchFamily="34" charset="-122"/>
+                <a:cs typeface="Calibri" pitchFamily="34" charset="-120"/>
+              </a:rPr>
+              <a:t>back,</a:t>
+            </a:r>
+            <a:pPr indent="0" marL="0">
+              <a:buNone/>
+            </a:pPr>
+            <a:r>
+              <a:rPr lang="en-US" sz="1700" dirty="0">
+                <a:solidFill>
+                  <a:srgbClr val="1E293B"/>
+                </a:solidFill>
+                <a:latin typeface="Calibri" pitchFamily="34" charset="0"/>
+                <a:ea typeface="Calibri" pitchFamily="34" charset="-122"/>
+                <a:cs typeface="Calibri" pitchFamily="34" charset="-120"/>
+              </a:rPr>
+              <a:t> </a:t>
+            </a:r>
+            <a:pPr indent="0" marL="0">
+              <a:buNone/>
+            </a:pPr>
+            <a:r>
+              <a:rPr lang="en-US" sz="1700" dirty="0">
+                <a:solidFill>
+                  <a:srgbClr val="1E293B"/>
+                </a:solidFill>
+                <a:latin typeface="Calibri" pitchFamily="34" charset="0"/>
+                <a:ea typeface="Calibri" pitchFamily="34" charset="-122"/>
+                <a:cs typeface="Calibri" pitchFamily="34" charset="-120"/>
+              </a:rPr>
+              <a:t>away</a:t>
+            </a:r>
+            <a:pPr indent="0" marL="0">
+              <a:buNone/>
+            </a:pPr>
+            <a:r>
+              <a:rPr lang="en-US" sz="1700" dirty="0">
+                <a:solidFill>
+                  <a:srgbClr val="1E293B"/>
+                </a:solidFill>
+                <a:latin typeface="Calibri" pitchFamily="34" charset="0"/>
+                <a:ea typeface="Calibri" pitchFamily="34" charset="-122"/>
+                <a:cs typeface="Calibri" pitchFamily="34" charset="-120"/>
+              </a:rPr>
+              <a:t> </a:t>
+            </a:r>
+            <a:pPr indent="0" marL="0">
+              <a:buNone/>
+            </a:pPr>
+            <a:r>
+              <a:rPr lang="en-US" sz="1700" dirty="0">
+                <a:solidFill>
+                  <a:srgbClr val="1E293B"/>
+                </a:solidFill>
+                <a:latin typeface="Calibri" pitchFamily="34" charset="0"/>
+                <a:ea typeface="Calibri" pitchFamily="34" charset="-122"/>
+                <a:cs typeface="Calibri" pitchFamily="34" charset="-120"/>
+              </a:rPr>
+              <a:t>from</a:t>
+            </a:r>
+            <a:pPr indent="0" marL="0">
+              <a:buNone/>
+            </a:pPr>
+            <a:r>
+              <a:rPr lang="en-US" sz="1700" dirty="0">
+                <a:solidFill>
+                  <a:srgbClr val="1E293B"/>
+                </a:solidFill>
+                <a:latin typeface="Calibri" pitchFamily="34" charset="0"/>
+                <a:ea typeface="Calibri" pitchFamily="34" charset="-122"/>
+                <a:cs typeface="Calibri" pitchFamily="34" charset="-120"/>
+              </a:rPr>
+              <a:t> </a:t>
+            </a:r>
+            <a:pPr indent="0" marL="0">
+              <a:buNone/>
+            </a:pPr>
+            <a:r>
+              <a:rPr lang="en-US" sz="1700" dirty="0">
+                <a:solidFill>
+                  <a:srgbClr val="1E293B"/>
+                </a:solidFill>
+                <a:latin typeface="Calibri" pitchFamily="34" charset="0"/>
+                <a:ea typeface="Calibri" pitchFamily="34" charset="-122"/>
+                <a:cs typeface="Calibri" pitchFamily="34" charset="-120"/>
+              </a:rPr>
+              <a:t>the</a:t>
+            </a:r>
+            <a:pPr indent="0" marL="0">
+              <a:buNone/>
+            </a:pPr>
+            <a:r>
+              <a:rPr lang="en-US" sz="1700" dirty="0">
+                <a:solidFill>
+                  <a:srgbClr val="1E293B"/>
+                </a:solidFill>
+                <a:latin typeface="Calibri" pitchFamily="34" charset="0"/>
+                <a:ea typeface="Calibri" pitchFamily="34" charset="-122"/>
+                <a:cs typeface="Calibri" pitchFamily="34" charset="-120"/>
+              </a:rPr>
+              <a:t> </a:t>
+            </a:r>
+            <a:pPr indent="0" marL="0">
+              <a:buNone/>
+            </a:pPr>
+            <a:r>
+              <a:rPr lang="en-US" sz="1700" dirty="0">
+                <a:solidFill>
+                  <a:srgbClr val="1E293B"/>
+                </a:solidFill>
+                <a:latin typeface="Calibri" pitchFamily="34" charset="0"/>
+                <a:ea typeface="Calibri" pitchFamily="34" charset="-122"/>
+                <a:cs typeface="Calibri" pitchFamily="34" charset="-120"/>
+              </a:rPr>
+              <a:t>new</a:t>
+            </a:r>
+            <a:pPr indent="0" marL="0">
+              <a:buNone/>
+            </a:pPr>
+            <a:r>
+              <a:rPr lang="en-US" sz="1700" dirty="0">
+                <a:solidFill>
+                  <a:srgbClr val="1E293B"/>
+                </a:solidFill>
+                <a:latin typeface="Calibri" pitchFamily="34" charset="0"/>
+                <a:ea typeface="Calibri" pitchFamily="34" charset="-122"/>
+                <a:cs typeface="Calibri" pitchFamily="34" charset="-120"/>
+              </a:rPr>
+              <a:t> </a:t>
+            </a:r>
+            <a:pPr indent="0" marL="0">
+              <a:buNone/>
+            </a:pPr>
+            <a:r>
+              <a:rPr lang="en-US" sz="1700" dirty="0">
+                <a:solidFill>
+                  <a:srgbClr val="1E293B"/>
+                </a:solidFill>
+                <a:latin typeface="Calibri" pitchFamily="34" charset="0"/>
+                <a:ea typeface="Calibri" pitchFamily="34" charset="-122"/>
+                <a:cs typeface="Calibri" pitchFamily="34" charset="-120"/>
+              </a:rPr>
+              <a:t>mouse.</a:t>
+            </a:r>
+            <a:endParaRPr lang="en-US" sz="1700" dirty="0"/>
+          </a:p>
+        </p:txBody>
+      </p:sp>
+      <p:sp>
+        <p:nvSpPr>
+          <p:cNvPr id="9" name="Shape 7"/>
+          <p:cNvSpPr/>
+          <p:nvPr/>
+        </p:nvSpPr>
+        <p:spPr>
+          <a:xfrm>
+            <a:off x="365760" y="2212848"/>
             <a:ext cx="8412480" cy="658368"/>
           </a:xfrm>
           <a:prstGeom prst="roundRect">
@@ -3420,7 +3821,12 @@
           <a:solidFill>
             <a:srgbClr val="FFFFFF"/>
           </a:solidFill>
-          <a:ln/>
+          <a:ln w="19050">
+            <a:solidFill>
+              <a:srgbClr val="C7922C"/>
+            </a:solidFill>
+            <a:prstDash val="solid"/>
+          </a:ln>
           <a:effectLst>
             <a:outerShdw sx="100000" sy="100000" kx="0" ky="0" algn="bl" rotWithShape="0" blurRad="101600" dist="38100" dir="2700000">
               <a:srgbClr val="000000">
@@ -3432,14 +3838,14 @@
       </p:sp>
       <p:sp>
         <p:nvSpPr>
-          <p:cNvPr id="8" name="Text 6"/>
-          <p:cNvSpPr/>
-          <p:nvPr/>
-        </p:nvSpPr>
-        <p:spPr>
-          <a:xfrm>
-            <a:off x="594360" y="1956816"/>
-            <a:ext cx="7863840" cy="402336"/>
+          <p:cNvPr id="10" name="Text 8"/>
+          <p:cNvSpPr/>
+          <p:nvPr/>
+        </p:nvSpPr>
+        <p:spPr>
+          <a:xfrm>
+            <a:off x="594360" y="2340864"/>
+            <a:ext cx="7955280" cy="402336"/>
           </a:xfrm>
           <a:prstGeom prst="rect">
             <a:avLst/>
@@ -3454,88 +3860,20 @@
             <a:pPr indent="0" marL="0">
               <a:buNone/>
             </a:pPr>
-            <a:r>
-              <a:rPr lang="en-US" sz="1600" dirty="0">
-                <a:solidFill>
-                  <a:srgbClr val="1E293B"/>
-                </a:solidFill>
-                <a:latin typeface="Calibri" pitchFamily="34" charset="0"/>
-                <a:ea typeface="Calibri" pitchFamily="34" charset="-122"/>
-                <a:cs typeface="Calibri" pitchFamily="34" charset="-120"/>
-              </a:rPr>
-              <a:t>The king played </a:t>
-            </a:r>
-            <a:pPr indent="0" marL="0">
-              <a:buNone/>
-            </a:pPr>
-            <a:r>
-              <a:rPr lang="en-US" sz="1600" b="1" dirty="0">
-                <a:solidFill>
-                  <a:srgbClr val="34B76F"/>
-                </a:solidFill>
-                <a:latin typeface="Calibri" pitchFamily="34" charset="0"/>
-                <a:ea typeface="Calibri" pitchFamily="34" charset="-122"/>
-                <a:cs typeface="Calibri" pitchFamily="34" charset="-120"/>
-              </a:rPr>
-              <a:t>songs</a:t>
-            </a:r>
-            <a:pPr indent="0" marL="0">
-              <a:buNone/>
-            </a:pPr>
-            <a:r>
-              <a:rPr lang="en-US" sz="1600" dirty="0">
-                <a:solidFill>
-                  <a:srgbClr val="1E293B"/>
-                </a:solidFill>
-                <a:latin typeface="Calibri" pitchFamily="34" charset="0"/>
-                <a:ea typeface="Calibri" pitchFamily="34" charset="-122"/>
-                <a:cs typeface="Calibri" pitchFamily="34" charset="-120"/>
-              </a:rPr>
-              <a:t> on his guitar.</a:t>
-            </a:r>
-            <a:endParaRPr lang="en-US" sz="1600" dirty="0"/>
-          </a:p>
-        </p:txBody>
-      </p:sp>
-      <p:sp>
-        <p:nvSpPr>
-          <p:cNvPr id="9" name="Shape 7"/>
-          <p:cNvSpPr/>
-          <p:nvPr/>
-        </p:nvSpPr>
-        <p:spPr>
-          <a:xfrm>
-            <a:off x="365760" y="2542032"/>
-            <a:ext cx="8412480" cy="658368"/>
-          </a:xfrm>
-          <a:prstGeom prst="roundRect">
-            <a:avLst>
-              <a:gd name="adj" fmla="val 13889"/>
-            </a:avLst>
-          </a:prstGeom>
-          <a:solidFill>
-            <a:srgbClr val="FEF6E8"/>
-          </a:solidFill>
-          <a:ln/>
-          <a:effectLst>
-            <a:outerShdw sx="100000" sy="100000" kx="0" ky="0" algn="bl" rotWithShape="0" blurRad="101600" dist="38100" dir="2700000">
-              <a:srgbClr val="000000">
-                <a:alpha val="12000"/>
-              </a:srgbClr>
-            </a:outerShdw>
-          </a:effectLst>
-        </p:spPr>
-      </p:sp>
-      <p:sp>
-        <p:nvSpPr>
-          <p:cNvPr id="10" name="Text 8"/>
-          <p:cNvSpPr/>
-          <p:nvPr/>
-        </p:nvSpPr>
-        <p:spPr>
-          <a:xfrm>
-            <a:off x="594360" y="2688336"/>
-            <a:ext cx="7863840" cy="402336"/>
+            <a:endParaRPr lang="en-US" sz="1700" dirty="0"/>
+          </a:p>
+        </p:txBody>
+      </p:sp>
+      <p:sp>
+        <p:nvSpPr>
+          <p:cNvPr id="11" name="Text 9"/>
+          <p:cNvSpPr/>
+          <p:nvPr/>
+        </p:nvSpPr>
+        <p:spPr>
+          <a:xfrm>
+            <a:off x="594360" y="2340864"/>
+            <a:ext cx="7955280" cy="402336"/>
           </a:xfrm>
           <a:prstGeom prst="rect">
             <a:avLst/>
@@ -3551,76 +3889,299 @@
               <a:buNone/>
             </a:pPr>
             <a:r>
-              <a:rPr lang="en-US" sz="1600" dirty="0">
-                <a:solidFill>
-                  <a:srgbClr val="1E293B"/>
-                </a:solidFill>
-                <a:latin typeface="Calibri" pitchFamily="34" charset="0"/>
-                <a:ea typeface="Calibri" pitchFamily="34" charset="-122"/>
-                <a:cs typeface="Calibri" pitchFamily="34" charset="-120"/>
-              </a:rPr>
-              <a:t>Despereaux had two </a:t>
-            </a:r>
-            <a:pPr indent="0" marL="0">
-              <a:buNone/>
-            </a:pPr>
-            <a:r>
-              <a:rPr lang="en-US" sz="1600" b="1" dirty="0">
-                <a:solidFill>
-                  <a:srgbClr val="34B76F"/>
-                </a:solidFill>
-                <a:latin typeface="Calibri" pitchFamily="34" charset="0"/>
-                <a:ea typeface="Calibri" pitchFamily="34" charset="-122"/>
-                <a:cs typeface="Calibri" pitchFamily="34" charset="-120"/>
-              </a:rPr>
-              <a:t>brothers</a:t>
-            </a:r>
-            <a:pPr indent="0" marL="0">
-              <a:buNone/>
-            </a:pPr>
-            <a:r>
-              <a:rPr lang="en-US" sz="1600" dirty="0">
-                <a:solidFill>
-                  <a:srgbClr val="1E293B"/>
-                </a:solidFill>
-                <a:latin typeface="Calibri" pitchFamily="34" charset="0"/>
-                <a:ea typeface="Calibri" pitchFamily="34" charset="-122"/>
-                <a:cs typeface="Calibri" pitchFamily="34" charset="-120"/>
-              </a:rPr>
-              <a:t> and one sister.</a:t>
-            </a:r>
-            <a:endParaRPr lang="en-US" sz="1600" dirty="0"/>
-          </a:p>
-        </p:txBody>
-      </p:sp>
-      <p:sp>
-        <p:nvSpPr>
-          <p:cNvPr id="11" name="Shape 9"/>
-          <p:cNvSpPr/>
-          <p:nvPr/>
-        </p:nvSpPr>
-        <p:spPr>
-          <a:xfrm>
-            <a:off x="365760" y="3273552"/>
-            <a:ext cx="8412480" cy="658368"/>
-          </a:xfrm>
-          <a:prstGeom prst="roundRect">
-            <a:avLst>
-              <a:gd name="adj" fmla="val 13889"/>
-            </a:avLst>
-          </a:prstGeom>
-          <a:solidFill>
-            <a:srgbClr val="FFFFFF"/>
-          </a:solidFill>
-          <a:ln/>
-          <a:effectLst>
-            <a:outerShdw sx="100000" sy="100000" kx="0" ky="0" algn="bl" rotWithShape="0" blurRad="101600" dist="38100" dir="2700000">
-              <a:srgbClr val="000000">
-                <a:alpha val="12000"/>
-              </a:srgbClr>
-            </a:outerShdw>
-          </a:effectLst>
-        </p:spPr>
+              <a:rPr lang="en-US" sz="1700" dirty="0">
+                <a:solidFill>
+                  <a:srgbClr val="1E293B"/>
+                </a:solidFill>
+                <a:latin typeface="Calibri" pitchFamily="34" charset="0"/>
+                <a:ea typeface="Calibri" pitchFamily="34" charset="-122"/>
+                <a:cs typeface="Calibri" pitchFamily="34" charset="-120"/>
+              </a:rPr>
+              <a:t>She</a:t>
+            </a:r>
+            <a:pPr indent="0" marL="0">
+              <a:buNone/>
+            </a:pPr>
+            <a:r>
+              <a:rPr lang="en-US" sz="1700" dirty="0">
+                <a:solidFill>
+                  <a:srgbClr val="1E293B"/>
+                </a:solidFill>
+                <a:latin typeface="Calibri" pitchFamily="34" charset="0"/>
+                <a:ea typeface="Calibri" pitchFamily="34" charset="-122"/>
+                <a:cs typeface="Calibri" pitchFamily="34" charset="-120"/>
+              </a:rPr>
+              <a:t> </a:t>
+            </a:r>
+            <a:pPr indent="0" marL="0">
+              <a:buNone/>
+            </a:pPr>
+            <a:r>
+              <a:rPr lang="en-US" sz="1700" dirty="0">
+                <a:solidFill>
+                  <a:srgbClr val="1E293B"/>
+                </a:solidFill>
+                <a:latin typeface="Calibri" pitchFamily="34" charset="0"/>
+                <a:ea typeface="Calibri" pitchFamily="34" charset="-122"/>
+                <a:cs typeface="Calibri" pitchFamily="34" charset="-120"/>
+              </a:rPr>
+              <a:t>cupped</a:t>
+            </a:r>
+            <a:pPr indent="0" marL="0">
+              <a:buNone/>
+            </a:pPr>
+            <a:r>
+              <a:rPr lang="en-US" sz="1700" dirty="0">
+                <a:solidFill>
+                  <a:srgbClr val="1E293B"/>
+                </a:solidFill>
+                <a:latin typeface="Calibri" pitchFamily="34" charset="0"/>
+                <a:ea typeface="Calibri" pitchFamily="34" charset="-122"/>
+                <a:cs typeface="Calibri" pitchFamily="34" charset="-120"/>
+              </a:rPr>
+              <a:t> </a:t>
+            </a:r>
+            <a:pPr indent="0" marL="0">
+              <a:buNone/>
+            </a:pPr>
+            <a:r>
+              <a:rPr lang="en-US" sz="1700" dirty="0">
+                <a:solidFill>
+                  <a:srgbClr val="1E293B"/>
+                </a:solidFill>
+                <a:latin typeface="Calibri" pitchFamily="34" charset="0"/>
+                <a:ea typeface="Calibri" pitchFamily="34" charset="-122"/>
+                <a:cs typeface="Calibri" pitchFamily="34" charset="-120"/>
+              </a:rPr>
+              <a:t>him</a:t>
+            </a:r>
+            <a:pPr indent="0" marL="0">
+              <a:buNone/>
+            </a:pPr>
+            <a:r>
+              <a:rPr lang="en-US" sz="1700" dirty="0">
+                <a:solidFill>
+                  <a:srgbClr val="1E293B"/>
+                </a:solidFill>
+                <a:latin typeface="Calibri" pitchFamily="34" charset="0"/>
+                <a:ea typeface="Calibri" pitchFamily="34" charset="-122"/>
+                <a:cs typeface="Calibri" pitchFamily="34" charset="-120"/>
+              </a:rPr>
+              <a:t> </a:t>
+            </a:r>
+            <a:pPr indent="0" marL="0">
+              <a:buNone/>
+            </a:pPr>
+            <a:r>
+              <a:rPr lang="en-US" sz="1700" dirty="0">
+                <a:solidFill>
+                  <a:srgbClr val="1E293B"/>
+                </a:solidFill>
+                <a:latin typeface="Calibri" pitchFamily="34" charset="0"/>
+                <a:ea typeface="Calibri" pitchFamily="34" charset="-122"/>
+                <a:cs typeface="Calibri" pitchFamily="34" charset="-120"/>
+              </a:rPr>
+              <a:t>in</a:t>
+            </a:r>
+            <a:pPr indent="0" marL="0">
+              <a:buNone/>
+            </a:pPr>
+            <a:r>
+              <a:rPr lang="en-US" sz="1700" dirty="0">
+                <a:solidFill>
+                  <a:srgbClr val="1E293B"/>
+                </a:solidFill>
+                <a:latin typeface="Calibri" pitchFamily="34" charset="0"/>
+                <a:ea typeface="Calibri" pitchFamily="34" charset="-122"/>
+                <a:cs typeface="Calibri" pitchFamily="34" charset="-120"/>
+              </a:rPr>
+              <a:t> </a:t>
+            </a:r>
+            <a:pPr indent="0" marL="0">
+              <a:buNone/>
+            </a:pPr>
+            <a:r>
+              <a:rPr lang="en-US" sz="1700" dirty="0">
+                <a:solidFill>
+                  <a:srgbClr val="1E293B"/>
+                </a:solidFill>
+                <a:latin typeface="Calibri" pitchFamily="34" charset="0"/>
+                <a:ea typeface="Calibri" pitchFamily="34" charset="-122"/>
+                <a:cs typeface="Calibri" pitchFamily="34" charset="-120"/>
+              </a:rPr>
+              <a:t>her</a:t>
+            </a:r>
+            <a:pPr indent="0" marL="0">
+              <a:buNone/>
+            </a:pPr>
+            <a:r>
+              <a:rPr lang="en-US" sz="1700" dirty="0">
+                <a:solidFill>
+                  <a:srgbClr val="1E293B"/>
+                </a:solidFill>
+                <a:latin typeface="Calibri" pitchFamily="34" charset="0"/>
+                <a:ea typeface="Calibri" pitchFamily="34" charset="-122"/>
+                <a:cs typeface="Calibri" pitchFamily="34" charset="-120"/>
+              </a:rPr>
+              <a:t> </a:t>
+            </a:r>
+            <a:pPr indent="0" marL="0">
+              <a:buNone/>
+            </a:pPr>
+            <a:r>
+              <a:rPr lang="en-US" sz="1700" dirty="0">
+                <a:solidFill>
+                  <a:srgbClr val="1E293B"/>
+                </a:solidFill>
+                <a:latin typeface="Calibri" pitchFamily="34" charset="0"/>
+                <a:ea typeface="Calibri" pitchFamily="34" charset="-122"/>
+                <a:cs typeface="Calibri" pitchFamily="34" charset="-120"/>
+              </a:rPr>
+              <a:t>palm</a:t>
+            </a:r>
+            <a:pPr indent="0" marL="0">
+              <a:buNone/>
+            </a:pPr>
+            <a:r>
+              <a:rPr lang="en-US" sz="1700" dirty="0">
+                <a:solidFill>
+                  <a:srgbClr val="1E293B"/>
+                </a:solidFill>
+                <a:latin typeface="Calibri" pitchFamily="34" charset="0"/>
+                <a:ea typeface="Calibri" pitchFamily="34" charset="-122"/>
+                <a:cs typeface="Calibri" pitchFamily="34" charset="-120"/>
+              </a:rPr>
+              <a:t> </a:t>
+            </a:r>
+            <a:pPr indent="0" marL="0">
+              <a:buNone/>
+            </a:pPr>
+            <a:r>
+              <a:rPr lang="en-US" sz="1700" dirty="0">
+                <a:solidFill>
+                  <a:srgbClr val="1E293B"/>
+                </a:solidFill>
+                <a:latin typeface="Calibri" pitchFamily="34" charset="0"/>
+                <a:ea typeface="Calibri" pitchFamily="34" charset="-122"/>
+                <a:cs typeface="Calibri" pitchFamily="34" charset="-120"/>
+              </a:rPr>
+              <a:t>and</a:t>
+            </a:r>
+            <a:pPr indent="0" marL="0">
+              <a:buNone/>
+            </a:pPr>
+            <a:r>
+              <a:rPr lang="en-US" sz="1700" dirty="0">
+                <a:solidFill>
+                  <a:srgbClr val="1E293B"/>
+                </a:solidFill>
+                <a:latin typeface="Calibri" pitchFamily="34" charset="0"/>
+                <a:ea typeface="Calibri" pitchFamily="34" charset="-122"/>
+                <a:cs typeface="Calibri" pitchFamily="34" charset="-120"/>
+              </a:rPr>
+              <a:t> </a:t>
+            </a:r>
+            <a:pPr indent="0" marL="0">
+              <a:buNone/>
+            </a:pPr>
+            <a:r>
+              <a:rPr lang="en-US" sz="1700" dirty="0">
+                <a:solidFill>
+                  <a:srgbClr val="1E293B"/>
+                </a:solidFill>
+                <a:latin typeface="Calibri" pitchFamily="34" charset="0"/>
+                <a:ea typeface="Calibri" pitchFamily="34" charset="-122"/>
+                <a:cs typeface="Calibri" pitchFamily="34" charset="-120"/>
+              </a:rPr>
+              <a:t>scratched</a:t>
+            </a:r>
+            <a:pPr indent="0" marL="0">
+              <a:buNone/>
+            </a:pPr>
+            <a:r>
+              <a:rPr lang="en-US" sz="1700" dirty="0">
+                <a:solidFill>
+                  <a:srgbClr val="1E293B"/>
+                </a:solidFill>
+                <a:latin typeface="Calibri" pitchFamily="34" charset="0"/>
+                <a:ea typeface="Calibri" pitchFamily="34" charset="-122"/>
+                <a:cs typeface="Calibri" pitchFamily="34" charset="-120"/>
+              </a:rPr>
+              <a:t> </a:t>
+            </a:r>
+            <a:pPr indent="0" marL="0">
+              <a:buNone/>
+            </a:pPr>
+            <a:r>
+              <a:rPr lang="en-US" sz="1700" dirty="0">
+                <a:solidFill>
+                  <a:srgbClr val="1E293B"/>
+                </a:solidFill>
+                <a:latin typeface="Calibri" pitchFamily="34" charset="0"/>
+                <a:ea typeface="Calibri" pitchFamily="34" charset="-122"/>
+                <a:cs typeface="Calibri" pitchFamily="34" charset="-120"/>
+              </a:rPr>
+              <a:t>his</a:t>
+            </a:r>
+            <a:pPr indent="0" marL="0">
+              <a:buNone/>
+            </a:pPr>
+            <a:r>
+              <a:rPr lang="en-US" sz="1700" dirty="0">
+                <a:solidFill>
+                  <a:srgbClr val="1E293B"/>
+                </a:solidFill>
+                <a:latin typeface="Calibri" pitchFamily="34" charset="0"/>
+                <a:ea typeface="Calibri" pitchFamily="34" charset="-122"/>
+                <a:cs typeface="Calibri" pitchFamily="34" charset="-120"/>
+              </a:rPr>
+              <a:t> </a:t>
+            </a:r>
+            <a:pPr indent="0" marL="0">
+              <a:buNone/>
+            </a:pPr>
+            <a:r>
+              <a:rPr lang="en-US" sz="1700" dirty="0">
+                <a:solidFill>
+                  <a:srgbClr val="1E293B"/>
+                </a:solidFill>
+                <a:latin typeface="Calibri" pitchFamily="34" charset="0"/>
+                <a:ea typeface="Calibri" pitchFamily="34" charset="-122"/>
+                <a:cs typeface="Calibri" pitchFamily="34" charset="-120"/>
+              </a:rPr>
+              <a:t>oversize</a:t>
+            </a:r>
+            <a:pPr indent="0" marL="0">
+              <a:buNone/>
+            </a:pPr>
+            <a:r>
+              <a:rPr lang="en-US" sz="1700" dirty="0">
+                <a:solidFill>
+                  <a:srgbClr val="1E293B"/>
+                </a:solidFill>
+                <a:latin typeface="Calibri" pitchFamily="34" charset="0"/>
+                <a:ea typeface="Calibri" pitchFamily="34" charset="-122"/>
+                <a:cs typeface="Calibri" pitchFamily="34" charset="-120"/>
+              </a:rPr>
+              <a:t> </a:t>
+            </a:r>
+            <a:pPr indent="0" marL="0">
+              <a:buNone/>
+            </a:pPr>
+            <a:r>
+              <a:rPr lang="en-US" sz="1700" dirty="0">
+                <a:solidFill>
+                  <a:srgbClr val="1E293B"/>
+                </a:solidFill>
+                <a:latin typeface="Calibri" pitchFamily="34" charset="0"/>
+                <a:ea typeface="Calibri" pitchFamily="34" charset="-122"/>
+                <a:cs typeface="Calibri" pitchFamily="34" charset="-120"/>
+              </a:rPr>
+              <a:t>ears.</a:t>
+            </a:r>
+            <a:endParaRPr lang="en-US" sz="1700" dirty="0"/>
+          </a:p>
+        </p:txBody>
       </p:sp>
       <p:sp>
         <p:nvSpPr>
@@ -3630,8 +4191,8 @@
         </p:nvSpPr>
         <p:spPr>
           <a:xfrm>
-            <a:off x="594360" y="3419856"/>
-            <a:ext cx="7863840" cy="402336"/>
+            <a:off x="365760" y="3008376"/>
+            <a:ext cx="8229600" cy="237744"/>
           </a:xfrm>
           <a:prstGeom prst="rect">
             <a:avLst/>
@@ -3647,45 +4208,17 @@
               <a:buNone/>
             </a:pPr>
             <a:r>
-              <a:rPr lang="en-US" sz="1600" dirty="0">
-                <a:solidFill>
-                  <a:srgbClr val="1E293B"/>
-                </a:solidFill>
-                <a:latin typeface="Calibri" pitchFamily="34" charset="0"/>
-                <a:ea typeface="Calibri" pitchFamily="34" charset="-122"/>
-                <a:cs typeface="Calibri" pitchFamily="34" charset="-120"/>
-              </a:rPr>
-              <a:t>The </a:t>
-            </a:r>
-            <a:pPr indent="0" marL="0">
-              <a:buNone/>
-            </a:pPr>
-            <a:r>
-              <a:rPr lang="en-US" sz="1600" b="1" dirty="0">
-                <a:solidFill>
-                  <a:srgbClr val="34B76F"/>
-                </a:solidFill>
-                <a:latin typeface="Calibri" pitchFamily="34" charset="0"/>
-                <a:ea typeface="Calibri" pitchFamily="34" charset="-122"/>
-                <a:cs typeface="Calibri" pitchFamily="34" charset="-120"/>
-              </a:rPr>
-              <a:t>mice</a:t>
-            </a:r>
-            <a:pPr indent="0" marL="0">
-              <a:buNone/>
-            </a:pPr>
-            <a:r>
-              <a:rPr lang="en-US" sz="1600" dirty="0">
-                <a:solidFill>
-                  <a:srgbClr val="1E293B"/>
-                </a:solidFill>
-                <a:latin typeface="Calibri" pitchFamily="34" charset="0"/>
-                <a:ea typeface="Calibri" pitchFamily="34" charset="-122"/>
-                <a:cs typeface="Calibri" pitchFamily="34" charset="-120"/>
-              </a:rPr>
-              <a:t> of the castle feared the dungeon.</a:t>
-            </a:r>
-            <a:endParaRPr lang="en-US" sz="1600" dirty="0"/>
+              <a:rPr lang="en-US" sz="1100" b="1" spc="100" kern="0" dirty="0">
+                <a:solidFill>
+                  <a:srgbClr val="C7922C"/>
+                </a:solidFill>
+                <a:latin typeface="Calibri" pitchFamily="34" charset="0"/>
+                <a:ea typeface="Calibri" pitchFamily="34" charset="-122"/>
+                <a:cs typeface="Calibri" pitchFamily="34" charset="-120"/>
+              </a:rPr>
+              <a:t>THINK IT THROUGH</a:t>
+            </a:r>
+            <a:endParaRPr lang="en-US" sz="1100" dirty="0"/>
           </a:p>
         </p:txBody>
       </p:sp>
@@ -3697,34 +4230,68 @@
         </p:nvSpPr>
         <p:spPr>
           <a:xfrm>
-            <a:off x="365760" y="4050792"/>
-            <a:ext cx="8412480" cy="365760"/>
-          </a:xfrm>
-          <a:prstGeom prst="rect">
-            <a:avLst/>
-          </a:prstGeom>
-          <a:noFill/>
-          <a:ln/>
-        </p:spPr>
-        <p:txBody>
-          <a:bodyPr wrap="square" lIns="0" tIns="0" rIns="0" bIns="0" rtlCol="0" anchor="ctr"/>
-          <a:lstStyle/>
-          <a:p>
-            <a:pPr indent="0" marL="0">
-              <a:buNone/>
-            </a:pPr>
-            <a:r>
-              <a:rPr lang="en-US" sz="1500" b="1" dirty="0">
-                <a:solidFill>
-                  <a:srgbClr val="34B76F"/>
-                </a:solidFill>
-                <a:latin typeface="Calibri" pitchFamily="34" charset="0"/>
-                <a:ea typeface="Calibri" pitchFamily="34" charset="-122"/>
-                <a:cs typeface="Calibri" pitchFamily="34" charset="-120"/>
-              </a:rPr>
-              <a:t>✅  Answers revealed</a:t>
-            </a:r>
-            <a:endParaRPr lang="en-US" sz="1500" dirty="0"/>
+            <a:off x="365760" y="3255264"/>
+            <a:ext cx="8412480" cy="1563624"/>
+          </a:xfrm>
+          <a:prstGeom prst="rect">
+            <a:avLst/>
+          </a:prstGeom>
+          <a:noFill/>
+          <a:ln/>
+        </p:spPr>
+        <p:txBody>
+          <a:bodyPr wrap="square" lIns="0" tIns="0" rIns="0" bIns="0" rtlCol="0" anchor="t"/>
+          <a:lstStyle/>
+          <a:p>
+            <a:pPr indent="0" marL="0">
+              <a:buNone/>
+            </a:pPr>
+            <a:r>
+              <a:rPr lang="en-US" sz="1400" dirty="0">
+                <a:solidFill>
+                  <a:srgbClr val="1E293B"/>
+                </a:solidFill>
+                <a:latin typeface="Calibri" pitchFamily="34" charset="0"/>
+                <a:ea typeface="Calibri" pitchFamily="34" charset="-122"/>
+                <a:cs typeface="Calibri" pitchFamily="34" charset="-120"/>
+              </a:rPr>
+              <a:t>1.  Which nouns mean one, and which mean more than one?</a:t>
+            </a:r>
+            <a:endParaRPr lang="en-US" sz="1400" dirty="0"/>
+          </a:p>
+          <a:p>
+            <a:pPr indent="0" marL="0">
+              <a:buNone/>
+            </a:pPr>
+            <a:r>
+              <a:rPr lang="en-US" sz="1400" dirty="0">
+                <a:solidFill>
+                  <a:srgbClr val="1E293B"/>
+                </a:solidFill>
+                <a:latin typeface="Calibri" pitchFamily="34" charset="0"/>
+                <a:ea typeface="Calibri" pitchFamily="34" charset="-122"/>
+                <a:cs typeface="Calibri" pitchFamily="34" charset="-120"/>
+              </a:rPr>
+              <a:t>2.  What is added to the word to make it mean more than one?</a:t>
+            </a:r>
+            <a:endParaRPr lang="en-US" sz="1400" dirty="0"/>
+          </a:p>
+          <a:p>
+            <a:pPr indent="0" marL="0">
+              <a:buNone/>
+            </a:pPr>
+            <a:r>
+              <a:rPr lang="en-US" sz="1400" dirty="0">
+                <a:solidFill>
+                  <a:srgbClr val="1E293B"/>
+                </a:solidFill>
+                <a:latin typeface="Calibri" pitchFamily="34" charset="0"/>
+                <a:ea typeface="Calibri" pitchFamily="34" charset="-122"/>
+                <a:cs typeface="Calibri" pitchFamily="34" charset="-120"/>
+              </a:rPr>
+              <a:t>3.  Is it added the same way every time? Look carefully — one of them is different.</a:t>
+            </a:r>
+            <a:endParaRPr lang="en-US" sz="1400" dirty="0"/>
           </a:p>
         </p:txBody>
       </p:sp>
@@ -3775,7 +4342,7 @@
             <a:avLst/>
           </a:prstGeom>
           <a:solidFill>
-            <a:srgbClr val="0E1C42"/>
+            <a:srgbClr val="C7922C"/>
           </a:solidFill>
           <a:ln/>
         </p:spPr>
@@ -3813,7 +4380,7 @@
                 <a:ea typeface="Calibri" pitchFamily="34" charset="-122"/>
                 <a:cs typeface="Calibri" pitchFamily="34" charset="-120"/>
               </a:rPr>
-              <a:t>🔠  Spelling</a:t>
+              <a:t>✏️  Grammar — What do you notice?</a:t>
             </a:r>
             <a:endParaRPr lang="en-US" sz="2200" dirty="0"/>
           </a:p>
@@ -3827,7 +4394,7 @@
         </p:nvSpPr>
         <p:spPr>
           <a:xfrm>
-            <a:off x="365760" y="777240"/>
+            <a:off x="365760" y="749808"/>
             <a:ext cx="8229600" cy="237744"/>
           </a:xfrm>
           <a:prstGeom prst="rect">
@@ -3846,13 +4413,13 @@
             <a:r>
               <a:rPr lang="en-US" sz="1100" b="1" spc="100" kern="0" dirty="0">
                 <a:solidFill>
-                  <a:srgbClr val="0E1C42"/>
-                </a:solidFill>
-                <a:latin typeface="Calibri" pitchFamily="34" charset="0"/>
-                <a:ea typeface="Calibri" pitchFamily="34" charset="-122"/>
-                <a:cs typeface="Calibri" pitchFamily="34" charset="-120"/>
-              </a:rPr>
-              <a:t>DOUBLING THE FINAL CONSONANT</a:t>
+                  <a:srgbClr val="C7922C"/>
+                </a:solidFill>
+                <a:latin typeface="Calibri" pitchFamily="34" charset="0"/>
+                <a:ea typeface="Calibri" pitchFamily="34" charset="-122"/>
+                <a:cs typeface="Calibri" pitchFamily="34" charset="-120"/>
+              </a:rPr>
+              <a:t>SINGULAR AND PLURAL NOUNS</a:t>
             </a:r>
             <a:endParaRPr lang="en-US" sz="1100" dirty="0"/>
           </a:p>
@@ -3866,8 +4433,8 @@
         </p:nvSpPr>
         <p:spPr>
           <a:xfrm>
-            <a:off x="365760" y="1078992"/>
-            <a:ext cx="8229600" cy="237744"/>
+            <a:off x="365760" y="987552"/>
+            <a:ext cx="8412480" cy="411480"/>
           </a:xfrm>
           <a:prstGeom prst="rect">
             <a:avLst/>
@@ -3883,7 +4450,7 @@
               <a:buNone/>
             </a:pPr>
             <a:r>
-              <a:rPr lang="en-US" sz="1100" b="1" spc="100" kern="0" dirty="0">
+              <a:rPr lang="en-US" sz="1500" i="1" dirty="0">
                 <a:solidFill>
                   <a:srgbClr val="64748B"/>
                 </a:solidFill>
@@ -3891,9 +4458,9 @@
                 <a:ea typeface="Calibri" pitchFamily="34" charset="-122"/>
                 <a:cs typeface="Calibri" pitchFamily="34" charset="-120"/>
               </a:rPr>
-              <a:t>WORD BANK</a:t>
-            </a:r>
-            <a:endParaRPr lang="en-US" sz="1100" dirty="0"/>
+              <a:t>Look at the endings of the nouns below.</a:t>
+            </a:r>
+            <a:endParaRPr lang="en-US" sz="1500" dirty="0"/>
           </a:p>
         </p:txBody>
       </p:sp>
@@ -3905,20 +4472,20 @@
         </p:nvSpPr>
         <p:spPr>
           <a:xfrm>
-            <a:off x="365760" y="1353312"/>
-            <a:ext cx="8412480" cy="1005840"/>
+            <a:off x="365760" y="1463040"/>
+            <a:ext cx="8412480" cy="658368"/>
           </a:xfrm>
           <a:prstGeom prst="roundRect">
             <a:avLst>
-              <a:gd name="adj" fmla="val 9091"/>
+              <a:gd name="adj" fmla="val 13889"/>
             </a:avLst>
           </a:prstGeom>
           <a:solidFill>
-            <a:srgbClr val="FFFFFF"/>
+            <a:srgbClr val="FEF6E8"/>
           </a:solidFill>
           <a:ln w="19050">
             <a:solidFill>
-              <a:srgbClr val="0E1C42"/>
+              <a:srgbClr val="C7922C"/>
             </a:solidFill>
             <a:prstDash val="solid"/>
           </a:ln>
@@ -3939,8 +4506,8 @@
         </p:nvSpPr>
         <p:spPr>
           <a:xfrm>
-            <a:off x="594360" y="1481328"/>
-            <a:ext cx="7955280" cy="749808"/>
+            <a:off x="594360" y="1591056"/>
+            <a:ext cx="7955280" cy="402336"/>
           </a:xfrm>
           <a:prstGeom prst="rect">
             <a:avLst/>
@@ -3955,16 +4522,324 @@
             <a:pPr indent="0" marL="0">
               <a:buNone/>
             </a:pPr>
+            <a:endParaRPr lang="en-US" sz="1700" dirty="0"/>
+          </a:p>
+        </p:txBody>
+      </p:sp>
+      <p:sp>
+        <p:nvSpPr>
+          <p:cNvPr id="8" name="Text 6"/>
+          <p:cNvSpPr/>
+          <p:nvPr/>
+        </p:nvSpPr>
+        <p:spPr>
+          <a:xfrm>
+            <a:off x="594360" y="1591056"/>
+            <a:ext cx="7955280" cy="402336"/>
+          </a:xfrm>
+          <a:prstGeom prst="rect">
+            <a:avLst/>
+          </a:prstGeom>
+          <a:noFill/>
+          <a:ln/>
+        </p:spPr>
+        <p:txBody>
+          <a:bodyPr wrap="square" lIns="0" tIns="0" rIns="0" bIns="0" rtlCol="0" anchor="ctr"/>
+          <a:lstStyle/>
+          <a:p>
+            <a:pPr indent="0" marL="0">
+              <a:buNone/>
+            </a:pPr>
             <a:r>
               <a:rPr lang="en-US" sz="1700" dirty="0">
                 <a:solidFill>
-                  <a:srgbClr val="0E1C42"/>
-                </a:solidFill>
-                <a:latin typeface="Calibri" pitchFamily="34" charset="0"/>
-                <a:ea typeface="Calibri" pitchFamily="34" charset="-122"/>
-                <a:cs typeface="Calibri" pitchFamily="34" charset="-120"/>
-              </a:rPr>
-              <a:t>wanted   ·   looked   ·   shouted   ·   jumped   ·   nodding   ·   wrapped   ·   snapped   ·   stopped</a:t>
+                  <a:srgbClr val="1E293B"/>
+                </a:solidFill>
+                <a:latin typeface="Calibri" pitchFamily="34" charset="0"/>
+                <a:ea typeface="Calibri" pitchFamily="34" charset="-122"/>
+                <a:cs typeface="Calibri" pitchFamily="34" charset="-120"/>
+              </a:rPr>
+              <a:t>Despereaux’s</a:t>
+            </a:r>
+            <a:pPr indent="0" marL="0">
+              <a:buNone/>
+            </a:pPr>
+            <a:r>
+              <a:rPr lang="en-US" sz="1700" dirty="0">
+                <a:solidFill>
+                  <a:srgbClr val="1E293B"/>
+                </a:solidFill>
+                <a:latin typeface="Calibri" pitchFamily="34" charset="0"/>
+                <a:ea typeface="Calibri" pitchFamily="34" charset="-122"/>
+                <a:cs typeface="Calibri" pitchFamily="34" charset="-120"/>
+              </a:rPr>
+              <a:t> </a:t>
+            </a:r>
+            <a:pPr indent="0" marL="0">
+              <a:buNone/>
+            </a:pPr>
+            <a:r>
+              <a:rPr lang="en-US" sz="1700" dirty="0">
+                <a:solidFill>
+                  <a:srgbClr val="1E293B"/>
+                </a:solidFill>
+                <a:latin typeface="Calibri" pitchFamily="34" charset="0"/>
+                <a:ea typeface="Calibri" pitchFamily="34" charset="-122"/>
+                <a:cs typeface="Calibri" pitchFamily="34" charset="-120"/>
+              </a:rPr>
+              <a:t>brothers</a:t>
+            </a:r>
+            <a:pPr indent="0" marL="0">
+              <a:buNone/>
+            </a:pPr>
+            <a:r>
+              <a:rPr lang="en-US" sz="1700" dirty="0">
+                <a:solidFill>
+                  <a:srgbClr val="1E293B"/>
+                </a:solidFill>
+                <a:latin typeface="Calibri" pitchFamily="34" charset="0"/>
+                <a:ea typeface="Calibri" pitchFamily="34" charset="-122"/>
+                <a:cs typeface="Calibri" pitchFamily="34" charset="-120"/>
+              </a:rPr>
+              <a:t> </a:t>
+            </a:r>
+            <a:pPr indent="0" marL="0">
+              <a:buNone/>
+            </a:pPr>
+            <a:r>
+              <a:rPr lang="en-US" sz="1700" dirty="0">
+                <a:solidFill>
+                  <a:srgbClr val="1E293B"/>
+                </a:solidFill>
+                <a:latin typeface="Calibri" pitchFamily="34" charset="0"/>
+                <a:ea typeface="Calibri" pitchFamily="34" charset="-122"/>
+                <a:cs typeface="Calibri" pitchFamily="34" charset="-120"/>
+              </a:rPr>
+              <a:t>and</a:t>
+            </a:r>
+            <a:pPr indent="0" marL="0">
+              <a:buNone/>
+            </a:pPr>
+            <a:r>
+              <a:rPr lang="en-US" sz="1700" dirty="0">
+                <a:solidFill>
+                  <a:srgbClr val="1E293B"/>
+                </a:solidFill>
+                <a:latin typeface="Calibri" pitchFamily="34" charset="0"/>
+                <a:ea typeface="Calibri" pitchFamily="34" charset="-122"/>
+                <a:cs typeface="Calibri" pitchFamily="34" charset="-120"/>
+              </a:rPr>
+              <a:t> </a:t>
+            </a:r>
+            <a:pPr indent="0" marL="0">
+              <a:buNone/>
+            </a:pPr>
+            <a:r>
+              <a:rPr lang="en-US" sz="1700" dirty="0">
+                <a:solidFill>
+                  <a:srgbClr val="1E293B"/>
+                </a:solidFill>
+                <a:latin typeface="Calibri" pitchFamily="34" charset="0"/>
+                <a:ea typeface="Calibri" pitchFamily="34" charset="-122"/>
+                <a:cs typeface="Calibri" pitchFamily="34" charset="-120"/>
+              </a:rPr>
+              <a:t>sisters</a:t>
+            </a:r>
+            <a:pPr indent="0" marL="0">
+              <a:buNone/>
+            </a:pPr>
+            <a:r>
+              <a:rPr lang="en-US" sz="1700" dirty="0">
+                <a:solidFill>
+                  <a:srgbClr val="1E293B"/>
+                </a:solidFill>
+                <a:latin typeface="Calibri" pitchFamily="34" charset="0"/>
+                <a:ea typeface="Calibri" pitchFamily="34" charset="-122"/>
+                <a:cs typeface="Calibri" pitchFamily="34" charset="-120"/>
+              </a:rPr>
+              <a:t> </a:t>
+            </a:r>
+            <a:pPr indent="0" marL="0">
+              <a:buNone/>
+            </a:pPr>
+            <a:r>
+              <a:rPr lang="en-US" sz="1700" dirty="0">
+                <a:solidFill>
+                  <a:srgbClr val="1E293B"/>
+                </a:solidFill>
+                <a:latin typeface="Calibri" pitchFamily="34" charset="0"/>
+                <a:ea typeface="Calibri" pitchFamily="34" charset="-122"/>
+                <a:cs typeface="Calibri" pitchFamily="34" charset="-120"/>
+              </a:rPr>
+              <a:t>stepped</a:t>
+            </a:r>
+            <a:pPr indent="0" marL="0">
+              <a:buNone/>
+            </a:pPr>
+            <a:r>
+              <a:rPr lang="en-US" sz="1700" dirty="0">
+                <a:solidFill>
+                  <a:srgbClr val="1E293B"/>
+                </a:solidFill>
+                <a:latin typeface="Calibri" pitchFamily="34" charset="0"/>
+                <a:ea typeface="Calibri" pitchFamily="34" charset="-122"/>
+                <a:cs typeface="Calibri" pitchFamily="34" charset="-120"/>
+              </a:rPr>
+              <a:t> </a:t>
+            </a:r>
+            <a:pPr indent="0" marL="0">
+              <a:buNone/>
+            </a:pPr>
+            <a:r>
+              <a:rPr lang="en-US" sz="1700" dirty="0">
+                <a:solidFill>
+                  <a:srgbClr val="1E293B"/>
+                </a:solidFill>
+                <a:latin typeface="Calibri" pitchFamily="34" charset="0"/>
+                <a:ea typeface="Calibri" pitchFamily="34" charset="-122"/>
+                <a:cs typeface="Calibri" pitchFamily="34" charset="-120"/>
+              </a:rPr>
+              <a:t>back,</a:t>
+            </a:r>
+            <a:pPr indent="0" marL="0">
+              <a:buNone/>
+            </a:pPr>
+            <a:r>
+              <a:rPr lang="en-US" sz="1700" dirty="0">
+                <a:solidFill>
+                  <a:srgbClr val="1E293B"/>
+                </a:solidFill>
+                <a:latin typeface="Calibri" pitchFamily="34" charset="0"/>
+                <a:ea typeface="Calibri" pitchFamily="34" charset="-122"/>
+                <a:cs typeface="Calibri" pitchFamily="34" charset="-120"/>
+              </a:rPr>
+              <a:t> </a:t>
+            </a:r>
+            <a:pPr indent="0" marL="0">
+              <a:buNone/>
+            </a:pPr>
+            <a:r>
+              <a:rPr lang="en-US" sz="1700" dirty="0">
+                <a:solidFill>
+                  <a:srgbClr val="1E293B"/>
+                </a:solidFill>
+                <a:latin typeface="Calibri" pitchFamily="34" charset="0"/>
+                <a:ea typeface="Calibri" pitchFamily="34" charset="-122"/>
+                <a:cs typeface="Calibri" pitchFamily="34" charset="-120"/>
+              </a:rPr>
+              <a:t>away</a:t>
+            </a:r>
+            <a:pPr indent="0" marL="0">
+              <a:buNone/>
+            </a:pPr>
+            <a:r>
+              <a:rPr lang="en-US" sz="1700" dirty="0">
+                <a:solidFill>
+                  <a:srgbClr val="1E293B"/>
+                </a:solidFill>
+                <a:latin typeface="Calibri" pitchFamily="34" charset="0"/>
+                <a:ea typeface="Calibri" pitchFamily="34" charset="-122"/>
+                <a:cs typeface="Calibri" pitchFamily="34" charset="-120"/>
+              </a:rPr>
+              <a:t> </a:t>
+            </a:r>
+            <a:pPr indent="0" marL="0">
+              <a:buNone/>
+            </a:pPr>
+            <a:r>
+              <a:rPr lang="en-US" sz="1700" dirty="0">
+                <a:solidFill>
+                  <a:srgbClr val="1E293B"/>
+                </a:solidFill>
+                <a:latin typeface="Calibri" pitchFamily="34" charset="0"/>
+                <a:ea typeface="Calibri" pitchFamily="34" charset="-122"/>
+                <a:cs typeface="Calibri" pitchFamily="34" charset="-120"/>
+              </a:rPr>
+              <a:t>from</a:t>
+            </a:r>
+            <a:pPr indent="0" marL="0">
+              <a:buNone/>
+            </a:pPr>
+            <a:r>
+              <a:rPr lang="en-US" sz="1700" dirty="0">
+                <a:solidFill>
+                  <a:srgbClr val="1E293B"/>
+                </a:solidFill>
+                <a:latin typeface="Calibri" pitchFamily="34" charset="0"/>
+                <a:ea typeface="Calibri" pitchFamily="34" charset="-122"/>
+                <a:cs typeface="Calibri" pitchFamily="34" charset="-120"/>
+              </a:rPr>
+              <a:t> </a:t>
+            </a:r>
+            <a:pPr indent="0" marL="0">
+              <a:buNone/>
+            </a:pPr>
+            <a:r>
+              <a:rPr lang="en-US" sz="1700" dirty="0">
+                <a:solidFill>
+                  <a:srgbClr val="1E293B"/>
+                </a:solidFill>
+                <a:latin typeface="Calibri" pitchFamily="34" charset="0"/>
+                <a:ea typeface="Calibri" pitchFamily="34" charset="-122"/>
+                <a:cs typeface="Calibri" pitchFamily="34" charset="-120"/>
+              </a:rPr>
+              <a:t>the</a:t>
+            </a:r>
+            <a:pPr indent="0" marL="0">
+              <a:buNone/>
+            </a:pPr>
+            <a:r>
+              <a:rPr lang="en-US" sz="1700" dirty="0">
+                <a:solidFill>
+                  <a:srgbClr val="1E293B"/>
+                </a:solidFill>
+                <a:latin typeface="Calibri" pitchFamily="34" charset="0"/>
+                <a:ea typeface="Calibri" pitchFamily="34" charset="-122"/>
+                <a:cs typeface="Calibri" pitchFamily="34" charset="-120"/>
+              </a:rPr>
+              <a:t> </a:t>
+            </a:r>
+            <a:pPr indent="0" marL="0">
+              <a:buNone/>
+            </a:pPr>
+            <a:r>
+              <a:rPr lang="en-US" sz="1700" dirty="0">
+                <a:solidFill>
+                  <a:srgbClr val="1E293B"/>
+                </a:solidFill>
+                <a:latin typeface="Calibri" pitchFamily="34" charset="0"/>
+                <a:ea typeface="Calibri" pitchFamily="34" charset="-122"/>
+                <a:cs typeface="Calibri" pitchFamily="34" charset="-120"/>
+              </a:rPr>
+              <a:t>new</a:t>
+            </a:r>
+            <a:pPr indent="0" marL="0">
+              <a:buNone/>
+            </a:pPr>
+            <a:r>
+              <a:rPr lang="en-US" sz="1700" dirty="0">
+                <a:solidFill>
+                  <a:srgbClr val="1E293B"/>
+                </a:solidFill>
+                <a:latin typeface="Calibri" pitchFamily="34" charset="0"/>
+                <a:ea typeface="Calibri" pitchFamily="34" charset="-122"/>
+                <a:cs typeface="Calibri" pitchFamily="34" charset="-120"/>
+              </a:rPr>
+              <a:t> </a:t>
+            </a:r>
+            <a:pPr indent="0" marL="0">
+              <a:buNone/>
+            </a:pPr>
+            <a:r>
+              <a:rPr lang="en-US" sz="1700" dirty="0">
+                <a:solidFill>
+                  <a:srgbClr val="1E293B"/>
+                </a:solidFill>
+                <a:latin typeface="Calibri" pitchFamily="34" charset="0"/>
+                <a:ea typeface="Calibri" pitchFamily="34" charset="-122"/>
+                <a:cs typeface="Calibri" pitchFamily="34" charset="-120"/>
+              </a:rPr>
+              <a:t>mouse.</a:t>
             </a:r>
             <a:endParaRPr lang="en-US" sz="1700" dirty="0"/>
           </a:p>
@@ -3972,14 +4847,48 @@
       </p:sp>
       <p:sp>
         <p:nvSpPr>
-          <p:cNvPr id="8" name="Text 6"/>
-          <p:cNvSpPr/>
-          <p:nvPr/>
-        </p:nvSpPr>
-        <p:spPr>
-          <a:xfrm>
-            <a:off x="365760" y="2514600"/>
-            <a:ext cx="8412480" cy="457200"/>
+          <p:cNvPr id="9" name="Shape 7"/>
+          <p:cNvSpPr/>
+          <p:nvPr/>
+        </p:nvSpPr>
+        <p:spPr>
+          <a:xfrm>
+            <a:off x="365760" y="2212848"/>
+            <a:ext cx="8412480" cy="658368"/>
+          </a:xfrm>
+          <a:prstGeom prst="roundRect">
+            <a:avLst>
+              <a:gd name="adj" fmla="val 13889"/>
+            </a:avLst>
+          </a:prstGeom>
+          <a:solidFill>
+            <a:srgbClr val="FFFFFF"/>
+          </a:solidFill>
+          <a:ln w="19050">
+            <a:solidFill>
+              <a:srgbClr val="C7922C"/>
+            </a:solidFill>
+            <a:prstDash val="solid"/>
+          </a:ln>
+          <a:effectLst>
+            <a:outerShdw sx="100000" sy="100000" kx="0" ky="0" algn="bl" rotWithShape="0" blurRad="101600" dist="38100" dir="2700000">
+              <a:srgbClr val="000000">
+                <a:alpha val="12000"/>
+              </a:srgbClr>
+            </a:outerShdw>
+          </a:effectLst>
+        </p:spPr>
+      </p:sp>
+      <p:sp>
+        <p:nvSpPr>
+          <p:cNvPr id="10" name="Text 8"/>
+          <p:cNvSpPr/>
+          <p:nvPr/>
+        </p:nvSpPr>
+        <p:spPr>
+          <a:xfrm>
+            <a:off x="594360" y="2340864"/>
+            <a:ext cx="7955280" cy="402336"/>
           </a:xfrm>
           <a:prstGeom prst="rect">
             <a:avLst/>
@@ -3994,18 +4903,469 @@
             <a:pPr indent="0" marL="0">
               <a:buNone/>
             </a:pPr>
-            <a:r>
-              <a:rPr lang="en-US" sz="1500" i="1" dirty="0">
-                <a:solidFill>
-                  <a:srgbClr val="64748B"/>
-                </a:solidFill>
-                <a:latin typeface="Calibri" pitchFamily="34" charset="0"/>
-                <a:ea typeface="Calibri" pitchFamily="34" charset="-122"/>
-                <a:cs typeface="Calibri" pitchFamily="34" charset="-120"/>
-              </a:rPr>
-              <a:t>Which column does each word belong in?  Columns: Did not double  |  Doubled the consonant</a:t>
-            </a:r>
-            <a:endParaRPr lang="en-US" sz="1500" dirty="0"/>
+            <a:endParaRPr lang="en-US" sz="1700" dirty="0"/>
+          </a:p>
+        </p:txBody>
+      </p:sp>
+      <p:sp>
+        <p:nvSpPr>
+          <p:cNvPr id="11" name="Text 9"/>
+          <p:cNvSpPr/>
+          <p:nvPr/>
+        </p:nvSpPr>
+        <p:spPr>
+          <a:xfrm>
+            <a:off x="594360" y="2340864"/>
+            <a:ext cx="7955280" cy="402336"/>
+          </a:xfrm>
+          <a:prstGeom prst="rect">
+            <a:avLst/>
+          </a:prstGeom>
+          <a:noFill/>
+          <a:ln/>
+        </p:spPr>
+        <p:txBody>
+          <a:bodyPr wrap="square" lIns="0" tIns="0" rIns="0" bIns="0" rtlCol="0" anchor="ctr"/>
+          <a:lstStyle/>
+          <a:p>
+            <a:pPr indent="0" marL="0">
+              <a:buNone/>
+            </a:pPr>
+            <a:r>
+              <a:rPr lang="en-US" sz="1700" dirty="0">
+                <a:solidFill>
+                  <a:srgbClr val="1E293B"/>
+                </a:solidFill>
+                <a:latin typeface="Calibri" pitchFamily="34" charset="0"/>
+                <a:ea typeface="Calibri" pitchFamily="34" charset="-122"/>
+                <a:cs typeface="Calibri" pitchFamily="34" charset="-120"/>
+              </a:rPr>
+              <a:t>She</a:t>
+            </a:r>
+            <a:pPr indent="0" marL="0">
+              <a:buNone/>
+            </a:pPr>
+            <a:r>
+              <a:rPr lang="en-US" sz="1700" dirty="0">
+                <a:solidFill>
+                  <a:srgbClr val="1E293B"/>
+                </a:solidFill>
+                <a:latin typeface="Calibri" pitchFamily="34" charset="0"/>
+                <a:ea typeface="Calibri" pitchFamily="34" charset="-122"/>
+                <a:cs typeface="Calibri" pitchFamily="34" charset="-120"/>
+              </a:rPr>
+              <a:t> </a:t>
+            </a:r>
+            <a:pPr indent="0" marL="0">
+              <a:buNone/>
+            </a:pPr>
+            <a:r>
+              <a:rPr lang="en-US" sz="1700" dirty="0">
+                <a:solidFill>
+                  <a:srgbClr val="1E293B"/>
+                </a:solidFill>
+                <a:latin typeface="Calibri" pitchFamily="34" charset="0"/>
+                <a:ea typeface="Calibri" pitchFamily="34" charset="-122"/>
+                <a:cs typeface="Calibri" pitchFamily="34" charset="-120"/>
+              </a:rPr>
+              <a:t>cupped</a:t>
+            </a:r>
+            <a:pPr indent="0" marL="0">
+              <a:buNone/>
+            </a:pPr>
+            <a:r>
+              <a:rPr lang="en-US" sz="1700" dirty="0">
+                <a:solidFill>
+                  <a:srgbClr val="1E293B"/>
+                </a:solidFill>
+                <a:latin typeface="Calibri" pitchFamily="34" charset="0"/>
+                <a:ea typeface="Calibri" pitchFamily="34" charset="-122"/>
+                <a:cs typeface="Calibri" pitchFamily="34" charset="-120"/>
+              </a:rPr>
+              <a:t> </a:t>
+            </a:r>
+            <a:pPr indent="0" marL="0">
+              <a:buNone/>
+            </a:pPr>
+            <a:r>
+              <a:rPr lang="en-US" sz="1700" dirty="0">
+                <a:solidFill>
+                  <a:srgbClr val="1E293B"/>
+                </a:solidFill>
+                <a:latin typeface="Calibri" pitchFamily="34" charset="0"/>
+                <a:ea typeface="Calibri" pitchFamily="34" charset="-122"/>
+                <a:cs typeface="Calibri" pitchFamily="34" charset="-120"/>
+              </a:rPr>
+              <a:t>him</a:t>
+            </a:r>
+            <a:pPr indent="0" marL="0">
+              <a:buNone/>
+            </a:pPr>
+            <a:r>
+              <a:rPr lang="en-US" sz="1700" dirty="0">
+                <a:solidFill>
+                  <a:srgbClr val="1E293B"/>
+                </a:solidFill>
+                <a:latin typeface="Calibri" pitchFamily="34" charset="0"/>
+                <a:ea typeface="Calibri" pitchFamily="34" charset="-122"/>
+                <a:cs typeface="Calibri" pitchFamily="34" charset="-120"/>
+              </a:rPr>
+              <a:t> </a:t>
+            </a:r>
+            <a:pPr indent="0" marL="0">
+              <a:buNone/>
+            </a:pPr>
+            <a:r>
+              <a:rPr lang="en-US" sz="1700" dirty="0">
+                <a:solidFill>
+                  <a:srgbClr val="1E293B"/>
+                </a:solidFill>
+                <a:latin typeface="Calibri" pitchFamily="34" charset="0"/>
+                <a:ea typeface="Calibri" pitchFamily="34" charset="-122"/>
+                <a:cs typeface="Calibri" pitchFamily="34" charset="-120"/>
+              </a:rPr>
+              <a:t>in</a:t>
+            </a:r>
+            <a:pPr indent="0" marL="0">
+              <a:buNone/>
+            </a:pPr>
+            <a:r>
+              <a:rPr lang="en-US" sz="1700" dirty="0">
+                <a:solidFill>
+                  <a:srgbClr val="1E293B"/>
+                </a:solidFill>
+                <a:latin typeface="Calibri" pitchFamily="34" charset="0"/>
+                <a:ea typeface="Calibri" pitchFamily="34" charset="-122"/>
+                <a:cs typeface="Calibri" pitchFamily="34" charset="-120"/>
+              </a:rPr>
+              <a:t> </a:t>
+            </a:r>
+            <a:pPr indent="0" marL="0">
+              <a:buNone/>
+            </a:pPr>
+            <a:r>
+              <a:rPr lang="en-US" sz="1700" dirty="0">
+                <a:solidFill>
+                  <a:srgbClr val="1E293B"/>
+                </a:solidFill>
+                <a:latin typeface="Calibri" pitchFamily="34" charset="0"/>
+                <a:ea typeface="Calibri" pitchFamily="34" charset="-122"/>
+                <a:cs typeface="Calibri" pitchFamily="34" charset="-120"/>
+              </a:rPr>
+              <a:t>her</a:t>
+            </a:r>
+            <a:pPr indent="0" marL="0">
+              <a:buNone/>
+            </a:pPr>
+            <a:r>
+              <a:rPr lang="en-US" sz="1700" dirty="0">
+                <a:solidFill>
+                  <a:srgbClr val="1E293B"/>
+                </a:solidFill>
+                <a:latin typeface="Calibri" pitchFamily="34" charset="0"/>
+                <a:ea typeface="Calibri" pitchFamily="34" charset="-122"/>
+                <a:cs typeface="Calibri" pitchFamily="34" charset="-120"/>
+              </a:rPr>
+              <a:t> </a:t>
+            </a:r>
+            <a:pPr indent="0" marL="0">
+              <a:buNone/>
+            </a:pPr>
+            <a:r>
+              <a:rPr lang="en-US" sz="1700" dirty="0">
+                <a:solidFill>
+                  <a:srgbClr val="1E293B"/>
+                </a:solidFill>
+                <a:latin typeface="Calibri" pitchFamily="34" charset="0"/>
+                <a:ea typeface="Calibri" pitchFamily="34" charset="-122"/>
+                <a:cs typeface="Calibri" pitchFamily="34" charset="-120"/>
+              </a:rPr>
+              <a:t>palm</a:t>
+            </a:r>
+            <a:pPr indent="0" marL="0">
+              <a:buNone/>
+            </a:pPr>
+            <a:r>
+              <a:rPr lang="en-US" sz="1700" dirty="0">
+                <a:solidFill>
+                  <a:srgbClr val="1E293B"/>
+                </a:solidFill>
+                <a:latin typeface="Calibri" pitchFamily="34" charset="0"/>
+                <a:ea typeface="Calibri" pitchFamily="34" charset="-122"/>
+                <a:cs typeface="Calibri" pitchFamily="34" charset="-120"/>
+              </a:rPr>
+              <a:t> </a:t>
+            </a:r>
+            <a:pPr indent="0" marL="0">
+              <a:buNone/>
+            </a:pPr>
+            <a:r>
+              <a:rPr lang="en-US" sz="1700" dirty="0">
+                <a:solidFill>
+                  <a:srgbClr val="1E293B"/>
+                </a:solidFill>
+                <a:latin typeface="Calibri" pitchFamily="34" charset="0"/>
+                <a:ea typeface="Calibri" pitchFamily="34" charset="-122"/>
+                <a:cs typeface="Calibri" pitchFamily="34" charset="-120"/>
+              </a:rPr>
+              <a:t>and</a:t>
+            </a:r>
+            <a:pPr indent="0" marL="0">
+              <a:buNone/>
+            </a:pPr>
+            <a:r>
+              <a:rPr lang="en-US" sz="1700" dirty="0">
+                <a:solidFill>
+                  <a:srgbClr val="1E293B"/>
+                </a:solidFill>
+                <a:latin typeface="Calibri" pitchFamily="34" charset="0"/>
+                <a:ea typeface="Calibri" pitchFamily="34" charset="-122"/>
+                <a:cs typeface="Calibri" pitchFamily="34" charset="-120"/>
+              </a:rPr>
+              <a:t> </a:t>
+            </a:r>
+            <a:pPr indent="0" marL="0">
+              <a:buNone/>
+            </a:pPr>
+            <a:r>
+              <a:rPr lang="en-US" sz="1700" dirty="0">
+                <a:solidFill>
+                  <a:srgbClr val="1E293B"/>
+                </a:solidFill>
+                <a:latin typeface="Calibri" pitchFamily="34" charset="0"/>
+                <a:ea typeface="Calibri" pitchFamily="34" charset="-122"/>
+                <a:cs typeface="Calibri" pitchFamily="34" charset="-120"/>
+              </a:rPr>
+              <a:t>scratched</a:t>
+            </a:r>
+            <a:pPr indent="0" marL="0">
+              <a:buNone/>
+            </a:pPr>
+            <a:r>
+              <a:rPr lang="en-US" sz="1700" dirty="0">
+                <a:solidFill>
+                  <a:srgbClr val="1E293B"/>
+                </a:solidFill>
+                <a:latin typeface="Calibri" pitchFamily="34" charset="0"/>
+                <a:ea typeface="Calibri" pitchFamily="34" charset="-122"/>
+                <a:cs typeface="Calibri" pitchFamily="34" charset="-120"/>
+              </a:rPr>
+              <a:t> </a:t>
+            </a:r>
+            <a:pPr indent="0" marL="0">
+              <a:buNone/>
+            </a:pPr>
+            <a:r>
+              <a:rPr lang="en-US" sz="1700" dirty="0">
+                <a:solidFill>
+                  <a:srgbClr val="1E293B"/>
+                </a:solidFill>
+                <a:latin typeface="Calibri" pitchFamily="34" charset="0"/>
+                <a:ea typeface="Calibri" pitchFamily="34" charset="-122"/>
+                <a:cs typeface="Calibri" pitchFamily="34" charset="-120"/>
+              </a:rPr>
+              <a:t>his</a:t>
+            </a:r>
+            <a:pPr indent="0" marL="0">
+              <a:buNone/>
+            </a:pPr>
+            <a:r>
+              <a:rPr lang="en-US" sz="1700" dirty="0">
+                <a:solidFill>
+                  <a:srgbClr val="1E293B"/>
+                </a:solidFill>
+                <a:latin typeface="Calibri" pitchFamily="34" charset="0"/>
+                <a:ea typeface="Calibri" pitchFamily="34" charset="-122"/>
+                <a:cs typeface="Calibri" pitchFamily="34" charset="-120"/>
+              </a:rPr>
+              <a:t> </a:t>
+            </a:r>
+            <a:pPr indent="0" marL="0">
+              <a:buNone/>
+            </a:pPr>
+            <a:r>
+              <a:rPr lang="en-US" sz="1700" dirty="0">
+                <a:solidFill>
+                  <a:srgbClr val="1E293B"/>
+                </a:solidFill>
+                <a:latin typeface="Calibri" pitchFamily="34" charset="0"/>
+                <a:ea typeface="Calibri" pitchFamily="34" charset="-122"/>
+                <a:cs typeface="Calibri" pitchFamily="34" charset="-120"/>
+              </a:rPr>
+              <a:t>oversize</a:t>
+            </a:r>
+            <a:pPr indent="0" marL="0">
+              <a:buNone/>
+            </a:pPr>
+            <a:r>
+              <a:rPr lang="en-US" sz="1700" dirty="0">
+                <a:solidFill>
+                  <a:srgbClr val="1E293B"/>
+                </a:solidFill>
+                <a:latin typeface="Calibri" pitchFamily="34" charset="0"/>
+                <a:ea typeface="Calibri" pitchFamily="34" charset="-122"/>
+                <a:cs typeface="Calibri" pitchFamily="34" charset="-120"/>
+              </a:rPr>
+              <a:t> </a:t>
+            </a:r>
+            <a:pPr indent="0" marL="0">
+              <a:buNone/>
+            </a:pPr>
+            <a:r>
+              <a:rPr lang="en-US" sz="1700" dirty="0">
+                <a:solidFill>
+                  <a:srgbClr val="1E293B"/>
+                </a:solidFill>
+                <a:latin typeface="Calibri" pitchFamily="34" charset="0"/>
+                <a:ea typeface="Calibri" pitchFamily="34" charset="-122"/>
+                <a:cs typeface="Calibri" pitchFamily="34" charset="-120"/>
+              </a:rPr>
+              <a:t>ears.</a:t>
+            </a:r>
+            <a:endParaRPr lang="en-US" sz="1700" dirty="0"/>
+          </a:p>
+        </p:txBody>
+      </p:sp>
+      <p:sp>
+        <p:nvSpPr>
+          <p:cNvPr id="12" name="Shape 10"/>
+          <p:cNvSpPr/>
+          <p:nvPr/>
+        </p:nvSpPr>
+        <p:spPr>
+          <a:xfrm>
+            <a:off x="365760" y="3008376"/>
+            <a:ext cx="8412480" cy="1837944"/>
+          </a:xfrm>
+          <a:prstGeom prst="roundRect">
+            <a:avLst>
+              <a:gd name="adj" fmla="val 4975"/>
+            </a:avLst>
+          </a:prstGeom>
+          <a:solidFill>
+            <a:srgbClr val="E8F8EF"/>
+          </a:solidFill>
+          <a:ln/>
+          <a:effectLst>
+            <a:outerShdw sx="100000" sy="100000" kx="0" ky="0" algn="bl" rotWithShape="0" blurRad="101600" dist="38100" dir="2700000">
+              <a:srgbClr val="000000">
+                <a:alpha val="12000"/>
+              </a:srgbClr>
+            </a:outerShdw>
+          </a:effectLst>
+        </p:spPr>
+      </p:sp>
+      <p:sp>
+        <p:nvSpPr>
+          <p:cNvPr id="13" name="Text 11"/>
+          <p:cNvSpPr/>
+          <p:nvPr/>
+        </p:nvSpPr>
+        <p:spPr>
+          <a:xfrm>
+            <a:off x="566928" y="3072384"/>
+            <a:ext cx="8229600" cy="237744"/>
+          </a:xfrm>
+          <a:prstGeom prst="rect">
+            <a:avLst/>
+          </a:prstGeom>
+          <a:noFill/>
+          <a:ln/>
+        </p:spPr>
+        <p:txBody>
+          <a:bodyPr wrap="square" lIns="0" tIns="0" rIns="0" bIns="0" rtlCol="0" anchor="ctr"/>
+          <a:lstStyle/>
+          <a:p>
+            <a:pPr indent="0" marL="0">
+              <a:buNone/>
+            </a:pPr>
+            <a:r>
+              <a:rPr lang="en-US" sz="1100" b="1" spc="100" kern="0" dirty="0">
+                <a:solidFill>
+                  <a:srgbClr val="34B76F"/>
+                </a:solidFill>
+                <a:latin typeface="Calibri" pitchFamily="34" charset="0"/>
+                <a:ea typeface="Calibri" pitchFamily="34" charset="-122"/>
+                <a:cs typeface="Calibri" pitchFamily="34" charset="-120"/>
+              </a:rPr>
+              <a:t>✅  THE PATTERN</a:t>
+            </a:r>
+            <a:endParaRPr lang="en-US" sz="1100" dirty="0"/>
+          </a:p>
+        </p:txBody>
+      </p:sp>
+      <p:sp>
+        <p:nvSpPr>
+          <p:cNvPr id="14" name="Text 12"/>
+          <p:cNvSpPr/>
+          <p:nvPr/>
+        </p:nvSpPr>
+        <p:spPr>
+          <a:xfrm>
+            <a:off x="566928" y="3328416"/>
+            <a:ext cx="8010144" cy="1380744"/>
+          </a:xfrm>
+          <a:prstGeom prst="rect">
+            <a:avLst/>
+          </a:prstGeom>
+          <a:noFill/>
+          <a:ln/>
+        </p:spPr>
+        <p:txBody>
+          <a:bodyPr wrap="square" lIns="0" tIns="0" rIns="0" bIns="0" rtlCol="0" anchor="t">
+            <a:normAutofit/>
+          </a:bodyPr>
+          <a:lstStyle/>
+          <a:p>
+            <a:pPr indent="0" marL="0">
+              <a:buNone/>
+            </a:pPr>
+            <a:r>
+              <a:rPr lang="en-US" sz="1300" dirty="0">
+                <a:solidFill>
+                  <a:srgbClr val="1E293B"/>
+                </a:solidFill>
+                <a:latin typeface="Calibri" pitchFamily="34" charset="0"/>
+                <a:ea typeface="Calibri" pitchFamily="34" charset="-122"/>
+                <a:cs typeface="Calibri" pitchFamily="34" charset="-120"/>
+              </a:rPr>
+              <a:t>A singular noun names one thing. A plural noun names more than one. Most plurals add -s or -es, but a few change their whole shape — one mouse becomes many mice.</a:t>
+            </a:r>
+            <a:endParaRPr lang="en-US" sz="1300" dirty="0"/>
+          </a:p>
+          <a:p>
+            <a:pPr indent="0" marL="0">
+              <a:buNone/>
+            </a:pPr>
+            <a:r>
+              <a:rPr lang="en-US" sz="1300" dirty="0">
+                <a:solidFill>
+                  <a:srgbClr val="1E293B"/>
+                </a:solidFill>
+                <a:latin typeface="Calibri" pitchFamily="34" charset="0"/>
+                <a:ea typeface="Calibri" pitchFamily="34" charset="-122"/>
+                <a:cs typeface="Calibri" pitchFamily="34" charset="-120"/>
+              </a:rPr>
+              <a:t>brothers and sisters are plural; mouse is singular.</a:t>
+            </a:r>
+            <a:endParaRPr lang="en-US" sz="1300" dirty="0"/>
+          </a:p>
+          <a:p>
+            <a:pPr indent="0" marL="0">
+              <a:buNone/>
+            </a:pPr>
+            <a:r>
+              <a:rPr lang="en-US" sz="1300" dirty="0">
+                <a:solidFill>
+                  <a:srgbClr val="1E293B"/>
+                </a:solidFill>
+                <a:latin typeface="Calibri" pitchFamily="34" charset="0"/>
+                <a:ea typeface="Calibri" pitchFamily="34" charset="-122"/>
+                <a:cs typeface="Calibri" pitchFamily="34" charset="-120"/>
+              </a:rPr>
+              <a:t>palm is singular; ears is plural.</a:t>
+            </a:r>
+            <a:endParaRPr lang="en-US" sz="1300" dirty="0"/>
           </a:p>
         </p:txBody>
       </p:sp>
@@ -4056,7 +5416,7 @@
             <a:avLst/>
           </a:prstGeom>
           <a:solidFill>
-            <a:srgbClr val="0E1C42"/>
+            <a:srgbClr val="C7922C"/>
           </a:solidFill>
           <a:ln/>
         </p:spPr>
@@ -4094,7 +5454,7 @@
                 <a:ea typeface="Calibri" pitchFamily="34" charset="-122"/>
                 <a:cs typeface="Calibri" pitchFamily="34" charset="-120"/>
               </a:rPr>
-              <a:t>🔠  Spelling</a:t>
+              <a:t>✏️  Grammar</a:t>
             </a:r>
             <a:endParaRPr lang="en-US" sz="2200" dirty="0"/>
           </a:p>
@@ -4127,13 +5487,13 @@
             <a:r>
               <a:rPr lang="en-US" sz="1100" b="1" spc="100" kern="0" dirty="0">
                 <a:solidFill>
-                  <a:srgbClr val="0E1C42"/>
-                </a:solidFill>
-                <a:latin typeface="Calibri" pitchFamily="34" charset="0"/>
-                <a:ea typeface="Calibri" pitchFamily="34" charset="-122"/>
-                <a:cs typeface="Calibri" pitchFamily="34" charset="-120"/>
-              </a:rPr>
-              <a:t>DOUBLING THE FINAL CONSONANT</a:t>
+                  <a:srgbClr val="C7922C"/>
+                </a:solidFill>
+                <a:latin typeface="Calibri" pitchFamily="34" charset="0"/>
+                <a:ea typeface="Calibri" pitchFamily="34" charset="-122"/>
+                <a:cs typeface="Calibri" pitchFamily="34" charset="-120"/>
+              </a:rPr>
+              <a:t>SINGULAR AND PLURAL NOUNS</a:t>
             </a:r>
             <a:endParaRPr lang="en-US" sz="1100" dirty="0"/>
           </a:p>
@@ -4147,77 +5507,16 @@
         </p:nvSpPr>
         <p:spPr>
           <a:xfrm>
-            <a:off x="411480" y="1078992"/>
-            <a:ext cx="4114800" cy="457200"/>
+            <a:off x="365760" y="1078992"/>
+            <a:ext cx="8412480" cy="658368"/>
           </a:xfrm>
           <a:prstGeom prst="roundRect">
             <a:avLst>
-              <a:gd name="adj" fmla="val 16000"/>
+              <a:gd name="adj" fmla="val 13889"/>
             </a:avLst>
           </a:prstGeom>
           <a:solidFill>
-            <a:srgbClr val="0E1C42"/>
-          </a:solidFill>
-          <a:ln/>
-        </p:spPr>
-      </p:sp>
-      <p:sp>
-        <p:nvSpPr>
-          <p:cNvPr id="6" name="Text 4"/>
-          <p:cNvSpPr/>
-          <p:nvPr/>
-        </p:nvSpPr>
-        <p:spPr>
-          <a:xfrm>
-            <a:off x="457200" y="1133856"/>
-            <a:ext cx="4023360" cy="347472"/>
-          </a:xfrm>
-          <a:prstGeom prst="rect">
-            <a:avLst/>
-          </a:prstGeom>
-          <a:noFill/>
-          <a:ln/>
-        </p:spPr>
-        <p:txBody>
-          <a:bodyPr wrap="square" lIns="0" tIns="0" rIns="0" bIns="0" rtlCol="0" anchor="ctr"/>
-          <a:lstStyle/>
-          <a:p>
-            <a:pPr algn="ctr" indent="0" marL="0">
-              <a:buNone/>
-            </a:pPr>
-            <a:r>
-              <a:rPr lang="en-US" sz="1300" b="1" dirty="0">
-                <a:solidFill>
-                  <a:srgbClr val="FFFFFF"/>
-                </a:solidFill>
-                <a:latin typeface="Calibri" pitchFamily="34" charset="0"/>
-                <a:ea typeface="Calibri" pitchFamily="34" charset="-122"/>
-                <a:cs typeface="Calibri" pitchFamily="34" charset="-120"/>
-              </a:rPr>
-              <a:t>Did not double</a:t>
-            </a:r>
-            <a:endParaRPr lang="en-US" sz="1300" dirty="0"/>
-          </a:p>
-        </p:txBody>
-      </p:sp>
-      <p:sp>
-        <p:nvSpPr>
-          <p:cNvPr id="7" name="Shape 5"/>
-          <p:cNvSpPr/>
-          <p:nvPr/>
-        </p:nvSpPr>
-        <p:spPr>
-          <a:xfrm>
-            <a:off x="411480" y="1591056"/>
-            <a:ext cx="4114800" cy="2103120"/>
-          </a:xfrm>
-          <a:prstGeom prst="roundRect">
-            <a:avLst>
-              <a:gd name="adj" fmla="val 4348"/>
-            </a:avLst>
-          </a:prstGeom>
-          <a:solidFill>
-            <a:srgbClr val="FFFFFF"/>
+            <a:srgbClr val="FEF6E8"/>
           </a:solidFill>
           <a:ln/>
           <a:effectLst>
@@ -4231,14 +5530,14 @@
       </p:sp>
       <p:sp>
         <p:nvSpPr>
-          <p:cNvPr id="8" name="Text 6"/>
-          <p:cNvSpPr/>
-          <p:nvPr/>
-        </p:nvSpPr>
-        <p:spPr>
-          <a:xfrm>
-            <a:off x="502920" y="1700784"/>
-            <a:ext cx="3931920" cy="1883664"/>
+          <p:cNvPr id="6" name="Text 4"/>
+          <p:cNvSpPr/>
+          <p:nvPr/>
+        </p:nvSpPr>
+        <p:spPr>
+          <a:xfrm>
+            <a:off x="594360" y="1225296"/>
+            <a:ext cx="7863840" cy="402336"/>
           </a:xfrm>
           <a:prstGeom prst="rect">
             <a:avLst/>
@@ -4250,150 +5549,38 @@
           <a:bodyPr wrap="square" lIns="0" tIns="0" rIns="0" bIns="0" rtlCol="0" anchor="ctr"/>
           <a:lstStyle/>
           <a:p>
-            <a:pPr algn="ctr" indent="0" marL="0">
-              <a:buNone/>
-            </a:pPr>
-            <a:r>
-              <a:rPr lang="en-US" sz="1400" dirty="0">
-                <a:solidFill>
-                  <a:srgbClr val="1E293B"/>
-                </a:solidFill>
-                <a:latin typeface="Calibri" pitchFamily="34" charset="0"/>
-                <a:ea typeface="Calibri" pitchFamily="34" charset="-122"/>
-                <a:cs typeface="Calibri" pitchFamily="34" charset="-120"/>
-              </a:rPr>
-              <a:t>wanted</a:t>
-            </a:r>
-            <a:endParaRPr lang="en-US" sz="1400" dirty="0"/>
-          </a:p>
-          <a:p>
-            <a:pPr algn="ctr" indent="0" marL="0">
-              <a:buNone/>
-            </a:pPr>
-            <a:r>
-              <a:rPr lang="en-US" sz="1400" dirty="0">
-                <a:solidFill>
-                  <a:srgbClr val="1E293B"/>
-                </a:solidFill>
-                <a:latin typeface="Calibri" pitchFamily="34" charset="0"/>
-                <a:ea typeface="Calibri" pitchFamily="34" charset="-122"/>
-                <a:cs typeface="Calibri" pitchFamily="34" charset="-120"/>
-              </a:rPr>
-              <a:t>looked</a:t>
-            </a:r>
-            <a:endParaRPr lang="en-US" sz="1400" dirty="0"/>
-          </a:p>
-          <a:p>
-            <a:pPr algn="ctr" indent="0" marL="0">
-              <a:buNone/>
-            </a:pPr>
-            <a:r>
-              <a:rPr lang="en-US" sz="1400" dirty="0">
-                <a:solidFill>
-                  <a:srgbClr val="1E293B"/>
-                </a:solidFill>
-                <a:latin typeface="Calibri" pitchFamily="34" charset="0"/>
-                <a:ea typeface="Calibri" pitchFamily="34" charset="-122"/>
-                <a:cs typeface="Calibri" pitchFamily="34" charset="-120"/>
-              </a:rPr>
-              <a:t>shouted</a:t>
-            </a:r>
-            <a:endParaRPr lang="en-US" sz="1400" dirty="0"/>
-          </a:p>
-          <a:p>
-            <a:pPr algn="ctr" indent="0" marL="0">
-              <a:buNone/>
-            </a:pPr>
-            <a:r>
-              <a:rPr lang="en-US" sz="1400" dirty="0">
-                <a:solidFill>
-                  <a:srgbClr val="1E293B"/>
-                </a:solidFill>
-                <a:latin typeface="Calibri" pitchFamily="34" charset="0"/>
-                <a:ea typeface="Calibri" pitchFamily="34" charset="-122"/>
-                <a:cs typeface="Calibri" pitchFamily="34" charset="-120"/>
-              </a:rPr>
-              <a:t>jumped</a:t>
-            </a:r>
-            <a:endParaRPr lang="en-US" sz="1400" dirty="0"/>
-          </a:p>
-        </p:txBody>
-      </p:sp>
-      <p:sp>
-        <p:nvSpPr>
-          <p:cNvPr id="9" name="Shape 7"/>
-          <p:cNvSpPr/>
-          <p:nvPr/>
-        </p:nvSpPr>
-        <p:spPr>
-          <a:xfrm>
-            <a:off x="4617720" y="1078992"/>
-            <a:ext cx="4114800" cy="457200"/>
+            <a:pPr indent="0" marL="0">
+              <a:buNone/>
+            </a:pPr>
+            <a:r>
+              <a:rPr lang="en-US" sz="1600" dirty="0">
+                <a:solidFill>
+                  <a:srgbClr val="1E293B"/>
+                </a:solidFill>
+                <a:latin typeface="Calibri" pitchFamily="34" charset="0"/>
+                <a:ea typeface="Calibri" pitchFamily="34" charset="-122"/>
+                <a:cs typeface="Calibri" pitchFamily="34" charset="-120"/>
+              </a:rPr>
+              <a:t>The mouses feared the dungeon.</a:t>
+            </a:r>
+            <a:endParaRPr lang="en-US" sz="1600" dirty="0"/>
+          </a:p>
+        </p:txBody>
+      </p:sp>
+      <p:sp>
+        <p:nvSpPr>
+          <p:cNvPr id="7" name="Shape 5"/>
+          <p:cNvSpPr/>
+          <p:nvPr/>
+        </p:nvSpPr>
+        <p:spPr>
+          <a:xfrm>
+            <a:off x="365760" y="1810512"/>
+            <a:ext cx="8412480" cy="658368"/>
           </a:xfrm>
           <a:prstGeom prst="roundRect">
             <a:avLst>
-              <a:gd name="adj" fmla="val 16000"/>
-            </a:avLst>
-          </a:prstGeom>
-          <a:solidFill>
-            <a:srgbClr val="0E1C42"/>
-          </a:solidFill>
-          <a:ln/>
-        </p:spPr>
-      </p:sp>
-      <p:sp>
-        <p:nvSpPr>
-          <p:cNvPr id="10" name="Text 8"/>
-          <p:cNvSpPr/>
-          <p:nvPr/>
-        </p:nvSpPr>
-        <p:spPr>
-          <a:xfrm>
-            <a:off x="4663440" y="1133856"/>
-            <a:ext cx="4023360" cy="347472"/>
-          </a:xfrm>
-          <a:prstGeom prst="rect">
-            <a:avLst/>
-          </a:prstGeom>
-          <a:noFill/>
-          <a:ln/>
-        </p:spPr>
-        <p:txBody>
-          <a:bodyPr wrap="square" lIns="0" tIns="0" rIns="0" bIns="0" rtlCol="0" anchor="ctr"/>
-          <a:lstStyle/>
-          <a:p>
-            <a:pPr algn="ctr" indent="0" marL="0">
-              <a:buNone/>
-            </a:pPr>
-            <a:r>
-              <a:rPr lang="en-US" sz="1300" b="1" dirty="0">
-                <a:solidFill>
-                  <a:srgbClr val="FFFFFF"/>
-                </a:solidFill>
-                <a:latin typeface="Calibri" pitchFamily="34" charset="0"/>
-                <a:ea typeface="Calibri" pitchFamily="34" charset="-122"/>
-                <a:cs typeface="Calibri" pitchFamily="34" charset="-120"/>
-              </a:rPr>
-              <a:t>Doubled the consonant</a:t>
-            </a:r>
-            <a:endParaRPr lang="en-US" sz="1300" dirty="0"/>
-          </a:p>
-        </p:txBody>
-      </p:sp>
-      <p:sp>
-        <p:nvSpPr>
-          <p:cNvPr id="11" name="Shape 9"/>
-          <p:cNvSpPr/>
-          <p:nvPr/>
-        </p:nvSpPr>
-        <p:spPr>
-          <a:xfrm>
-            <a:off x="4617720" y="1591056"/>
-            <a:ext cx="4114800" cy="2103120"/>
-          </a:xfrm>
-          <a:prstGeom prst="roundRect">
-            <a:avLst>
-              <a:gd name="adj" fmla="val 4348"/>
+              <a:gd name="adj" fmla="val 13889"/>
             </a:avLst>
           </a:prstGeom>
           <a:solidFill>
@@ -4411,14 +5598,150 @@
       </p:sp>
       <p:sp>
         <p:nvSpPr>
+          <p:cNvPr id="8" name="Text 6"/>
+          <p:cNvSpPr/>
+          <p:nvPr/>
+        </p:nvSpPr>
+        <p:spPr>
+          <a:xfrm>
+            <a:off x="594360" y="1956816"/>
+            <a:ext cx="7863840" cy="402336"/>
+          </a:xfrm>
+          <a:prstGeom prst="rect">
+            <a:avLst/>
+          </a:prstGeom>
+          <a:noFill/>
+          <a:ln/>
+        </p:spPr>
+        <p:txBody>
+          <a:bodyPr wrap="square" lIns="0" tIns="0" rIns="0" bIns="0" rtlCol="0" anchor="ctr"/>
+          <a:lstStyle/>
+          <a:p>
+            <a:pPr indent="0" marL="0">
+              <a:buNone/>
+            </a:pPr>
+            <a:r>
+              <a:rPr lang="en-US" sz="1600" dirty="0">
+                <a:solidFill>
+                  <a:srgbClr val="1E293B"/>
+                </a:solidFill>
+                <a:latin typeface="Calibri" pitchFamily="34" charset="0"/>
+                <a:ea typeface="Calibri" pitchFamily="34" charset="-122"/>
+                <a:cs typeface="Calibri" pitchFamily="34" charset="-120"/>
+              </a:rPr>
+              <a:t>Despereaux had two brother.</a:t>
+            </a:r>
+            <a:endParaRPr lang="en-US" sz="1600" dirty="0"/>
+          </a:p>
+        </p:txBody>
+      </p:sp>
+      <p:sp>
+        <p:nvSpPr>
+          <p:cNvPr id="9" name="Shape 7"/>
+          <p:cNvSpPr/>
+          <p:nvPr/>
+        </p:nvSpPr>
+        <p:spPr>
+          <a:xfrm>
+            <a:off x="365760" y="2542032"/>
+            <a:ext cx="8412480" cy="658368"/>
+          </a:xfrm>
+          <a:prstGeom prst="roundRect">
+            <a:avLst>
+              <a:gd name="adj" fmla="val 13889"/>
+            </a:avLst>
+          </a:prstGeom>
+          <a:solidFill>
+            <a:srgbClr val="FEF6E8"/>
+          </a:solidFill>
+          <a:ln/>
+          <a:effectLst>
+            <a:outerShdw sx="100000" sy="100000" kx="0" ky="0" algn="bl" rotWithShape="0" blurRad="101600" dist="38100" dir="2700000">
+              <a:srgbClr val="000000">
+                <a:alpha val="12000"/>
+              </a:srgbClr>
+            </a:outerShdw>
+          </a:effectLst>
+        </p:spPr>
+      </p:sp>
+      <p:sp>
+        <p:nvSpPr>
+          <p:cNvPr id="10" name="Text 8"/>
+          <p:cNvSpPr/>
+          <p:nvPr/>
+        </p:nvSpPr>
+        <p:spPr>
+          <a:xfrm>
+            <a:off x="594360" y="2688336"/>
+            <a:ext cx="7863840" cy="402336"/>
+          </a:xfrm>
+          <a:prstGeom prst="rect">
+            <a:avLst/>
+          </a:prstGeom>
+          <a:noFill/>
+          <a:ln/>
+        </p:spPr>
+        <p:txBody>
+          <a:bodyPr wrap="square" lIns="0" tIns="0" rIns="0" bIns="0" rtlCol="0" anchor="ctr"/>
+          <a:lstStyle/>
+          <a:p>
+            <a:pPr indent="0" marL="0">
+              <a:buNone/>
+            </a:pPr>
+            <a:r>
+              <a:rPr lang="en-US" sz="1600" dirty="0">
+                <a:solidFill>
+                  <a:srgbClr val="1E293B"/>
+                </a:solidFill>
+                <a:latin typeface="Calibri" pitchFamily="34" charset="0"/>
+                <a:ea typeface="Calibri" pitchFamily="34" charset="-122"/>
+                <a:cs typeface="Calibri" pitchFamily="34" charset="-120"/>
+              </a:rPr>
+              <a:t>The king played two songes.</a:t>
+            </a:r>
+            <a:endParaRPr lang="en-US" sz="1600" dirty="0"/>
+          </a:p>
+        </p:txBody>
+      </p:sp>
+      <p:sp>
+        <p:nvSpPr>
+          <p:cNvPr id="11" name="Shape 9"/>
+          <p:cNvSpPr/>
+          <p:nvPr/>
+        </p:nvSpPr>
+        <p:spPr>
+          <a:xfrm>
+            <a:off x="365760" y="3273552"/>
+            <a:ext cx="8412480" cy="658368"/>
+          </a:xfrm>
+          <a:prstGeom prst="roundRect">
+            <a:avLst>
+              <a:gd name="adj" fmla="val 13889"/>
+            </a:avLst>
+          </a:prstGeom>
+          <a:solidFill>
+            <a:srgbClr val="FFFFFF"/>
+          </a:solidFill>
+          <a:ln/>
+          <a:effectLst>
+            <a:outerShdw sx="100000" sy="100000" kx="0" ky="0" algn="bl" rotWithShape="0" blurRad="101600" dist="38100" dir="2700000">
+              <a:srgbClr val="000000">
+                <a:alpha val="12000"/>
+              </a:srgbClr>
+            </a:outerShdw>
+          </a:effectLst>
+        </p:spPr>
+      </p:sp>
+      <p:sp>
+        <p:nvSpPr>
           <p:cNvPr id="12" name="Text 10"/>
           <p:cNvSpPr/>
           <p:nvPr/>
         </p:nvSpPr>
         <p:spPr>
           <a:xfrm>
-            <a:off x="4709160" y="1700784"/>
-            <a:ext cx="3931920" cy="1883664"/>
+            <a:off x="594360" y="3419856"/>
+            <a:ext cx="7863840" cy="402336"/>
           </a:xfrm>
           <a:prstGeom prst="rect">
             <a:avLst/>
@@ -4430,72 +5753,60 @@
           <a:bodyPr wrap="square" lIns="0" tIns="0" rIns="0" bIns="0" rtlCol="0" anchor="ctr"/>
           <a:lstStyle/>
           <a:p>
-            <a:pPr algn="ctr" indent="0" marL="0">
-              <a:buNone/>
-            </a:pPr>
-            <a:r>
-              <a:rPr lang="en-US" sz="1400" dirty="0">
-                <a:solidFill>
-                  <a:srgbClr val="1E293B"/>
-                </a:solidFill>
-                <a:latin typeface="Calibri" pitchFamily="34" charset="0"/>
-                <a:ea typeface="Calibri" pitchFamily="34" charset="-122"/>
-                <a:cs typeface="Calibri" pitchFamily="34" charset="-120"/>
-              </a:rPr>
-              <a:t>nodding</a:t>
-            </a:r>
-            <a:endParaRPr lang="en-US" sz="1400" dirty="0"/>
-          </a:p>
-          <a:p>
-            <a:pPr algn="ctr" indent="0" marL="0">
-              <a:buNone/>
-            </a:pPr>
-            <a:r>
-              <a:rPr lang="en-US" sz="1400" dirty="0">
-                <a:solidFill>
-                  <a:srgbClr val="1E293B"/>
-                </a:solidFill>
-                <a:latin typeface="Calibri" pitchFamily="34" charset="0"/>
-                <a:ea typeface="Calibri" pitchFamily="34" charset="-122"/>
-                <a:cs typeface="Calibri" pitchFamily="34" charset="-120"/>
-              </a:rPr>
-              <a:t>wrapped</a:t>
-            </a:r>
-            <a:endParaRPr lang="en-US" sz="1400" dirty="0"/>
-          </a:p>
-          <a:p>
-            <a:pPr algn="ctr" indent="0" marL="0">
-              <a:buNone/>
-            </a:pPr>
-            <a:r>
-              <a:rPr lang="en-US" sz="1400" dirty="0">
-                <a:solidFill>
-                  <a:srgbClr val="1E293B"/>
-                </a:solidFill>
-                <a:latin typeface="Calibri" pitchFamily="34" charset="0"/>
-                <a:ea typeface="Calibri" pitchFamily="34" charset="-122"/>
-                <a:cs typeface="Calibri" pitchFamily="34" charset="-120"/>
-              </a:rPr>
-              <a:t>snapped</a:t>
-            </a:r>
-            <a:endParaRPr lang="en-US" sz="1400" dirty="0"/>
-          </a:p>
-          <a:p>
-            <a:pPr algn="ctr" indent="0" marL="0">
-              <a:buNone/>
-            </a:pPr>
-            <a:r>
-              <a:rPr lang="en-US" sz="1400" dirty="0">
-                <a:solidFill>
-                  <a:srgbClr val="1E293B"/>
-                </a:solidFill>
-                <a:latin typeface="Calibri" pitchFamily="34" charset="0"/>
-                <a:ea typeface="Calibri" pitchFamily="34" charset="-122"/>
-                <a:cs typeface="Calibri" pitchFamily="34" charset="-120"/>
-              </a:rPr>
-              <a:t>stopped</a:t>
-            </a:r>
-            <a:endParaRPr lang="en-US" sz="1400" dirty="0"/>
+            <a:pPr indent="0" marL="0">
+              <a:buNone/>
+            </a:pPr>
+            <a:r>
+              <a:rPr lang="en-US" sz="1600" dirty="0">
+                <a:solidFill>
+                  <a:srgbClr val="1E293B"/>
+                </a:solidFill>
+                <a:latin typeface="Calibri" pitchFamily="34" charset="0"/>
+                <a:ea typeface="Calibri" pitchFamily="34" charset="-122"/>
+                <a:cs typeface="Calibri" pitchFamily="34" charset="-120"/>
+              </a:rPr>
+              <a:t>A mouse sat at the foots of the king.</a:t>
+            </a:r>
+            <a:endParaRPr lang="en-US" sz="1600" dirty="0"/>
+          </a:p>
+        </p:txBody>
+      </p:sp>
+      <p:sp>
+        <p:nvSpPr>
+          <p:cNvPr id="13" name="Text 11"/>
+          <p:cNvSpPr/>
+          <p:nvPr/>
+        </p:nvSpPr>
+        <p:spPr>
+          <a:xfrm>
+            <a:off x="365760" y="4050792"/>
+            <a:ext cx="8412480" cy="365760"/>
+          </a:xfrm>
+          <a:prstGeom prst="rect">
+            <a:avLst/>
+          </a:prstGeom>
+          <a:noFill/>
+          <a:ln/>
+        </p:spPr>
+        <p:txBody>
+          <a:bodyPr wrap="square" lIns="0" tIns="0" rIns="0" bIns="0" rtlCol="0" anchor="ctr"/>
+          <a:lstStyle/>
+          <a:p>
+            <a:pPr indent="0" marL="0">
+              <a:buNone/>
+            </a:pPr>
+            <a:r>
+              <a:rPr lang="en-US" sz="1500" i="1" dirty="0">
+                <a:solidFill>
+                  <a:srgbClr val="64748B"/>
+                </a:solidFill>
+                <a:latin typeface="Calibri" pitchFamily="34" charset="0"/>
+                <a:ea typeface="Calibri" pitchFamily="34" charset="-122"/>
+                <a:cs typeface="Calibri" pitchFamily="34" charset="-120"/>
+              </a:rPr>
+              <a:t>Your turn. Each sentence has one noun with the wrong ending for how many it means. Tap it.</a:t>
+            </a:r>
+            <a:endParaRPr lang="en-US" sz="1500" dirty="0"/>
           </a:p>
         </p:txBody>
       </p:sp>
@@ -4510,6 +5821,831 @@
 <file path=ppt/slides/slide15.xml><?xml version="1.0" encoding="utf-8"?>
 <p:sld xmlns:a="http://schemas.openxmlformats.org/drawingml/2006/main" xmlns:r="http://schemas.openxmlformats.org/officeDocument/2006/relationships" xmlns:p="http://schemas.openxmlformats.org/presentationml/2006/main">
   <p:cSld name="Slide 15">
+    <p:bg>
+      <p:bgPr>
+        <a:solidFill>
+          <a:srgbClr val="F8FAFC"/>
+        </a:solidFill>
+      </p:bgPr>
+    </p:bg>
+    <p:spTree>
+      <p:nvGrpSpPr>
+        <p:cNvPr id="1" name=""/>
+        <p:cNvGrpSpPr/>
+        <p:nvPr/>
+      </p:nvGrpSpPr>
+      <p:grpSpPr>
+        <a:xfrm>
+          <a:off x="0" y="0"/>
+          <a:ext cx="0" cy="0"/>
+          <a:chOff x="0" y="0"/>
+          <a:chExt cx="0" cy="0"/>
+        </a:xfrm>
+      </p:grpSpPr>
+      <p:sp>
+        <p:nvSpPr>
+          <p:cNvPr id="2" name="Shape 0"/>
+          <p:cNvSpPr/>
+          <p:nvPr/>
+        </p:nvSpPr>
+        <p:spPr>
+          <a:xfrm>
+            <a:off x="0" y="0"/>
+            <a:ext cx="9144000" cy="566928"/>
+          </a:xfrm>
+          <a:prstGeom prst="rect">
+            <a:avLst/>
+          </a:prstGeom>
+          <a:solidFill>
+            <a:srgbClr val="C7922C"/>
+          </a:solidFill>
+          <a:ln/>
+        </p:spPr>
+      </p:sp>
+      <p:sp>
+        <p:nvSpPr>
+          <p:cNvPr id="3" name="Text 1"/>
+          <p:cNvSpPr/>
+          <p:nvPr/>
+        </p:nvSpPr>
+        <p:spPr>
+          <a:xfrm>
+            <a:off x="365760" y="54864"/>
+            <a:ext cx="8412480" cy="457200"/>
+          </a:xfrm>
+          <a:prstGeom prst="rect">
+            <a:avLst/>
+          </a:prstGeom>
+          <a:noFill/>
+          <a:ln/>
+        </p:spPr>
+        <p:txBody>
+          <a:bodyPr wrap="square" lIns="0" tIns="0" rIns="0" bIns="0" rtlCol="0" anchor="ctr"/>
+          <a:lstStyle/>
+          <a:p>
+            <a:pPr indent="0" marL="0">
+              <a:buNone/>
+            </a:pPr>
+            <a:r>
+              <a:rPr lang="en-US" sz="2200" b="1" dirty="0">
+                <a:solidFill>
+                  <a:srgbClr val="FFFFFF"/>
+                </a:solidFill>
+                <a:latin typeface="Calibri" pitchFamily="34" charset="0"/>
+                <a:ea typeface="Calibri" pitchFamily="34" charset="-122"/>
+                <a:cs typeface="Calibri" pitchFamily="34" charset="-120"/>
+              </a:rPr>
+              <a:t>✏️  Grammar</a:t>
+            </a:r>
+            <a:endParaRPr lang="en-US" sz="2200" dirty="0"/>
+          </a:p>
+        </p:txBody>
+      </p:sp>
+      <p:sp>
+        <p:nvSpPr>
+          <p:cNvPr id="4" name="Text 2"/>
+          <p:cNvSpPr/>
+          <p:nvPr/>
+        </p:nvSpPr>
+        <p:spPr>
+          <a:xfrm>
+            <a:off x="365760" y="777240"/>
+            <a:ext cx="8229600" cy="237744"/>
+          </a:xfrm>
+          <a:prstGeom prst="rect">
+            <a:avLst/>
+          </a:prstGeom>
+          <a:noFill/>
+          <a:ln/>
+        </p:spPr>
+        <p:txBody>
+          <a:bodyPr wrap="square" lIns="0" tIns="0" rIns="0" bIns="0" rtlCol="0" anchor="ctr"/>
+          <a:lstStyle/>
+          <a:p>
+            <a:pPr indent="0" marL="0">
+              <a:buNone/>
+            </a:pPr>
+            <a:r>
+              <a:rPr lang="en-US" sz="1100" b="1" spc="100" kern="0" dirty="0">
+                <a:solidFill>
+                  <a:srgbClr val="C7922C"/>
+                </a:solidFill>
+                <a:latin typeface="Calibri" pitchFamily="34" charset="0"/>
+                <a:ea typeface="Calibri" pitchFamily="34" charset="-122"/>
+                <a:cs typeface="Calibri" pitchFamily="34" charset="-120"/>
+              </a:rPr>
+              <a:t>SINGULAR AND PLURAL NOUNS</a:t>
+            </a:r>
+            <a:endParaRPr lang="en-US" sz="1100" dirty="0"/>
+          </a:p>
+        </p:txBody>
+      </p:sp>
+      <p:sp>
+        <p:nvSpPr>
+          <p:cNvPr id="5" name="Shape 3"/>
+          <p:cNvSpPr/>
+          <p:nvPr/>
+        </p:nvSpPr>
+        <p:spPr>
+          <a:xfrm>
+            <a:off x="365760" y="1078992"/>
+            <a:ext cx="8412480" cy="658368"/>
+          </a:xfrm>
+          <a:prstGeom prst="roundRect">
+            <a:avLst>
+              <a:gd name="adj" fmla="val 13889"/>
+            </a:avLst>
+          </a:prstGeom>
+          <a:solidFill>
+            <a:srgbClr val="FEF6E8"/>
+          </a:solidFill>
+          <a:ln/>
+          <a:effectLst>
+            <a:outerShdw sx="100000" sy="100000" kx="0" ky="0" algn="bl" rotWithShape="0" blurRad="101600" dist="38100" dir="2700000">
+              <a:srgbClr val="000000">
+                <a:alpha val="12000"/>
+              </a:srgbClr>
+            </a:outerShdw>
+          </a:effectLst>
+        </p:spPr>
+      </p:sp>
+      <p:sp>
+        <p:nvSpPr>
+          <p:cNvPr id="6" name="Text 4"/>
+          <p:cNvSpPr/>
+          <p:nvPr/>
+        </p:nvSpPr>
+        <p:spPr>
+          <a:xfrm>
+            <a:off x="594360" y="1225296"/>
+            <a:ext cx="7863840" cy="402336"/>
+          </a:xfrm>
+          <a:prstGeom prst="rect">
+            <a:avLst/>
+          </a:prstGeom>
+          <a:noFill/>
+          <a:ln/>
+        </p:spPr>
+        <p:txBody>
+          <a:bodyPr wrap="square" lIns="0" tIns="0" rIns="0" bIns="0" rtlCol="0" anchor="ctr"/>
+          <a:lstStyle/>
+          <a:p>
+            <a:pPr indent="0" marL="0">
+              <a:buNone/>
+            </a:pPr>
+            <a:r>
+              <a:rPr lang="en-US" sz="1600" dirty="0">
+                <a:solidFill>
+                  <a:srgbClr val="1E293B"/>
+                </a:solidFill>
+                <a:latin typeface="Calibri" pitchFamily="34" charset="0"/>
+                <a:ea typeface="Calibri" pitchFamily="34" charset="-122"/>
+                <a:cs typeface="Calibri" pitchFamily="34" charset="-120"/>
+              </a:rPr>
+              <a:t>The </a:t>
+            </a:r>
+            <a:pPr indent="0" marL="0">
+              <a:buNone/>
+            </a:pPr>
+            <a:r>
+              <a:rPr lang="en-US" sz="1600" b="1" dirty="0">
+                <a:solidFill>
+                  <a:srgbClr val="34B76F"/>
+                </a:solidFill>
+                <a:latin typeface="Calibri" pitchFamily="34" charset="0"/>
+                <a:ea typeface="Calibri" pitchFamily="34" charset="-122"/>
+                <a:cs typeface="Calibri" pitchFamily="34" charset="-120"/>
+              </a:rPr>
+              <a:t>mouses</a:t>
+            </a:r>
+            <a:pPr indent="0" marL="0">
+              <a:buNone/>
+            </a:pPr>
+            <a:r>
+              <a:rPr lang="en-US" sz="1600" dirty="0">
+                <a:solidFill>
+                  <a:srgbClr val="1E293B"/>
+                </a:solidFill>
+                <a:latin typeface="Calibri" pitchFamily="34" charset="0"/>
+                <a:ea typeface="Calibri" pitchFamily="34" charset="-122"/>
+                <a:cs typeface="Calibri" pitchFamily="34" charset="-120"/>
+              </a:rPr>
+              <a:t> feared the dungeon.</a:t>
+            </a:r>
+            <a:endParaRPr lang="en-US" sz="1600" dirty="0"/>
+          </a:p>
+        </p:txBody>
+      </p:sp>
+      <p:sp>
+        <p:nvSpPr>
+          <p:cNvPr id="7" name="Shape 5"/>
+          <p:cNvSpPr/>
+          <p:nvPr/>
+        </p:nvSpPr>
+        <p:spPr>
+          <a:xfrm>
+            <a:off x="365760" y="1810512"/>
+            <a:ext cx="8412480" cy="658368"/>
+          </a:xfrm>
+          <a:prstGeom prst="roundRect">
+            <a:avLst>
+              <a:gd name="adj" fmla="val 13889"/>
+            </a:avLst>
+          </a:prstGeom>
+          <a:solidFill>
+            <a:srgbClr val="FFFFFF"/>
+          </a:solidFill>
+          <a:ln/>
+          <a:effectLst>
+            <a:outerShdw sx="100000" sy="100000" kx="0" ky="0" algn="bl" rotWithShape="0" blurRad="101600" dist="38100" dir="2700000">
+              <a:srgbClr val="000000">
+                <a:alpha val="12000"/>
+              </a:srgbClr>
+            </a:outerShdw>
+          </a:effectLst>
+        </p:spPr>
+      </p:sp>
+      <p:sp>
+        <p:nvSpPr>
+          <p:cNvPr id="8" name="Text 6"/>
+          <p:cNvSpPr/>
+          <p:nvPr/>
+        </p:nvSpPr>
+        <p:spPr>
+          <a:xfrm>
+            <a:off x="594360" y="1956816"/>
+            <a:ext cx="7863840" cy="402336"/>
+          </a:xfrm>
+          <a:prstGeom prst="rect">
+            <a:avLst/>
+          </a:prstGeom>
+          <a:noFill/>
+          <a:ln/>
+        </p:spPr>
+        <p:txBody>
+          <a:bodyPr wrap="square" lIns="0" tIns="0" rIns="0" bIns="0" rtlCol="0" anchor="ctr"/>
+          <a:lstStyle/>
+          <a:p>
+            <a:pPr indent="0" marL="0">
+              <a:buNone/>
+            </a:pPr>
+            <a:r>
+              <a:rPr lang="en-US" sz="1600" dirty="0">
+                <a:solidFill>
+                  <a:srgbClr val="1E293B"/>
+                </a:solidFill>
+                <a:latin typeface="Calibri" pitchFamily="34" charset="0"/>
+                <a:ea typeface="Calibri" pitchFamily="34" charset="-122"/>
+                <a:cs typeface="Calibri" pitchFamily="34" charset="-120"/>
+              </a:rPr>
+              <a:t>Despereaux had two </a:t>
+            </a:r>
+            <a:pPr indent="0" marL="0">
+              <a:buNone/>
+            </a:pPr>
+            <a:r>
+              <a:rPr lang="en-US" sz="1600" b="1" dirty="0">
+                <a:solidFill>
+                  <a:srgbClr val="34B76F"/>
+                </a:solidFill>
+                <a:latin typeface="Calibri" pitchFamily="34" charset="0"/>
+                <a:ea typeface="Calibri" pitchFamily="34" charset="-122"/>
+                <a:cs typeface="Calibri" pitchFamily="34" charset="-120"/>
+              </a:rPr>
+              <a:t>brother.</a:t>
+            </a:r>
+            <a:endParaRPr lang="en-US" sz="1600" dirty="0"/>
+          </a:p>
+        </p:txBody>
+      </p:sp>
+      <p:sp>
+        <p:nvSpPr>
+          <p:cNvPr id="9" name="Shape 7"/>
+          <p:cNvSpPr/>
+          <p:nvPr/>
+        </p:nvSpPr>
+        <p:spPr>
+          <a:xfrm>
+            <a:off x="365760" y="2542032"/>
+            <a:ext cx="8412480" cy="658368"/>
+          </a:xfrm>
+          <a:prstGeom prst="roundRect">
+            <a:avLst>
+              <a:gd name="adj" fmla="val 13889"/>
+            </a:avLst>
+          </a:prstGeom>
+          <a:solidFill>
+            <a:srgbClr val="FEF6E8"/>
+          </a:solidFill>
+          <a:ln/>
+          <a:effectLst>
+            <a:outerShdw sx="100000" sy="100000" kx="0" ky="0" algn="bl" rotWithShape="0" blurRad="101600" dist="38100" dir="2700000">
+              <a:srgbClr val="000000">
+                <a:alpha val="12000"/>
+              </a:srgbClr>
+            </a:outerShdw>
+          </a:effectLst>
+        </p:spPr>
+      </p:sp>
+      <p:sp>
+        <p:nvSpPr>
+          <p:cNvPr id="10" name="Text 8"/>
+          <p:cNvSpPr/>
+          <p:nvPr/>
+        </p:nvSpPr>
+        <p:spPr>
+          <a:xfrm>
+            <a:off x="594360" y="2688336"/>
+            <a:ext cx="7863840" cy="402336"/>
+          </a:xfrm>
+          <a:prstGeom prst="rect">
+            <a:avLst/>
+          </a:prstGeom>
+          <a:noFill/>
+          <a:ln/>
+        </p:spPr>
+        <p:txBody>
+          <a:bodyPr wrap="square" lIns="0" tIns="0" rIns="0" bIns="0" rtlCol="0" anchor="ctr"/>
+          <a:lstStyle/>
+          <a:p>
+            <a:pPr indent="0" marL="0">
+              <a:buNone/>
+            </a:pPr>
+            <a:r>
+              <a:rPr lang="en-US" sz="1600" dirty="0">
+                <a:solidFill>
+                  <a:srgbClr val="1E293B"/>
+                </a:solidFill>
+                <a:latin typeface="Calibri" pitchFamily="34" charset="0"/>
+                <a:ea typeface="Calibri" pitchFamily="34" charset="-122"/>
+                <a:cs typeface="Calibri" pitchFamily="34" charset="-120"/>
+              </a:rPr>
+              <a:t>The king played two </a:t>
+            </a:r>
+            <a:pPr indent="0" marL="0">
+              <a:buNone/>
+            </a:pPr>
+            <a:r>
+              <a:rPr lang="en-US" sz="1600" b="1" dirty="0">
+                <a:solidFill>
+                  <a:srgbClr val="34B76F"/>
+                </a:solidFill>
+                <a:latin typeface="Calibri" pitchFamily="34" charset="0"/>
+                <a:ea typeface="Calibri" pitchFamily="34" charset="-122"/>
+                <a:cs typeface="Calibri" pitchFamily="34" charset="-120"/>
+              </a:rPr>
+              <a:t>songes.</a:t>
+            </a:r>
+            <a:endParaRPr lang="en-US" sz="1600" dirty="0"/>
+          </a:p>
+        </p:txBody>
+      </p:sp>
+      <p:sp>
+        <p:nvSpPr>
+          <p:cNvPr id="11" name="Shape 9"/>
+          <p:cNvSpPr/>
+          <p:nvPr/>
+        </p:nvSpPr>
+        <p:spPr>
+          <a:xfrm>
+            <a:off x="365760" y="3273552"/>
+            <a:ext cx="8412480" cy="658368"/>
+          </a:xfrm>
+          <a:prstGeom prst="roundRect">
+            <a:avLst>
+              <a:gd name="adj" fmla="val 13889"/>
+            </a:avLst>
+          </a:prstGeom>
+          <a:solidFill>
+            <a:srgbClr val="FFFFFF"/>
+          </a:solidFill>
+          <a:ln/>
+          <a:effectLst>
+            <a:outerShdw sx="100000" sy="100000" kx="0" ky="0" algn="bl" rotWithShape="0" blurRad="101600" dist="38100" dir="2700000">
+              <a:srgbClr val="000000">
+                <a:alpha val="12000"/>
+              </a:srgbClr>
+            </a:outerShdw>
+          </a:effectLst>
+        </p:spPr>
+      </p:sp>
+      <p:sp>
+        <p:nvSpPr>
+          <p:cNvPr id="12" name="Text 10"/>
+          <p:cNvSpPr/>
+          <p:nvPr/>
+        </p:nvSpPr>
+        <p:spPr>
+          <a:xfrm>
+            <a:off x="594360" y="3419856"/>
+            <a:ext cx="7863840" cy="402336"/>
+          </a:xfrm>
+          <a:prstGeom prst="rect">
+            <a:avLst/>
+          </a:prstGeom>
+          <a:noFill/>
+          <a:ln/>
+        </p:spPr>
+        <p:txBody>
+          <a:bodyPr wrap="square" lIns="0" tIns="0" rIns="0" bIns="0" rtlCol="0" anchor="ctr"/>
+          <a:lstStyle/>
+          <a:p>
+            <a:pPr indent="0" marL="0">
+              <a:buNone/>
+            </a:pPr>
+            <a:r>
+              <a:rPr lang="en-US" sz="1600" dirty="0">
+                <a:solidFill>
+                  <a:srgbClr val="1E293B"/>
+                </a:solidFill>
+                <a:latin typeface="Calibri" pitchFamily="34" charset="0"/>
+                <a:ea typeface="Calibri" pitchFamily="34" charset="-122"/>
+                <a:cs typeface="Calibri" pitchFamily="34" charset="-120"/>
+              </a:rPr>
+              <a:t>A mouse sat at the </a:t>
+            </a:r>
+            <a:pPr indent="0" marL="0">
+              <a:buNone/>
+            </a:pPr>
+            <a:r>
+              <a:rPr lang="en-US" sz="1600" b="1" dirty="0">
+                <a:solidFill>
+                  <a:srgbClr val="34B76F"/>
+                </a:solidFill>
+                <a:latin typeface="Calibri" pitchFamily="34" charset="0"/>
+                <a:ea typeface="Calibri" pitchFamily="34" charset="-122"/>
+                <a:cs typeface="Calibri" pitchFamily="34" charset="-120"/>
+              </a:rPr>
+              <a:t>foots</a:t>
+            </a:r>
+            <a:pPr indent="0" marL="0">
+              <a:buNone/>
+            </a:pPr>
+            <a:r>
+              <a:rPr lang="en-US" sz="1600" dirty="0">
+                <a:solidFill>
+                  <a:srgbClr val="1E293B"/>
+                </a:solidFill>
+                <a:latin typeface="Calibri" pitchFamily="34" charset="0"/>
+                <a:ea typeface="Calibri" pitchFamily="34" charset="-122"/>
+                <a:cs typeface="Calibri" pitchFamily="34" charset="-120"/>
+              </a:rPr>
+              <a:t> of the king.</a:t>
+            </a:r>
+            <a:endParaRPr lang="en-US" sz="1600" dirty="0"/>
+          </a:p>
+        </p:txBody>
+      </p:sp>
+      <p:sp>
+        <p:nvSpPr>
+          <p:cNvPr id="13" name="Text 11"/>
+          <p:cNvSpPr/>
+          <p:nvPr/>
+        </p:nvSpPr>
+        <p:spPr>
+          <a:xfrm>
+            <a:off x="365760" y="4050792"/>
+            <a:ext cx="8412480" cy="841248"/>
+          </a:xfrm>
+          <a:prstGeom prst="rect">
+            <a:avLst/>
+          </a:prstGeom>
+          <a:noFill/>
+          <a:ln/>
+        </p:spPr>
+        <p:txBody>
+          <a:bodyPr wrap="square" lIns="0" tIns="0" rIns="0" bIns="0" rtlCol="0" anchor="t">
+            <a:normAutofit/>
+          </a:bodyPr>
+          <a:lstStyle/>
+          <a:p>
+            <a:pPr indent="0" marL="0">
+              <a:buNone/>
+            </a:pPr>
+            <a:r>
+              <a:rPr lang="en-US" sz="1200" dirty="0">
+                <a:solidFill>
+                  <a:srgbClr val="34B76F"/>
+                </a:solidFill>
+                <a:latin typeface="Calibri" pitchFamily="34" charset="0"/>
+                <a:ea typeface="Calibri" pitchFamily="34" charset="-122"/>
+                <a:cs typeface="Calibri" pitchFamily="34" charset="-120"/>
+              </a:rPr>
+              <a:t>mouses → mice. brother → brothers. songes → songs. foots → foot.</a:t>
+            </a:r>
+            <a:endParaRPr lang="en-US" sz="1200" dirty="0"/>
+          </a:p>
+          <a:p>
+            <a:pPr indent="0" marL="0">
+              <a:buNone/>
+            </a:pPr>
+            <a:r>
+              <a:rPr lang="en-US" sz="1200" dirty="0">
+                <a:solidFill>
+                  <a:srgbClr val="34B76F"/>
+                </a:solidFill>
+                <a:latin typeface="Calibri" pitchFamily="34" charset="0"/>
+                <a:ea typeface="Calibri" pitchFamily="34" charset="-122"/>
+                <a:cs typeface="Calibri" pitchFamily="34" charset="-120"/>
+              </a:rPr>
+              <a:t>Mouse and foot change their middles instead of taking an ending.</a:t>
+            </a:r>
+            <a:endParaRPr lang="en-US" sz="1200" dirty="0"/>
+          </a:p>
+        </p:txBody>
+      </p:sp>
+    </p:spTree>
+  </p:cSld>
+  <p:clrMapOvr>
+    <a:masterClrMapping/>
+  </p:clrMapOvr>
+</p:sld>
+</file>
+
+<file path=ppt/slides/slide16.xml><?xml version="1.0" encoding="utf-8"?>
+<p:sld xmlns:a="http://schemas.openxmlformats.org/drawingml/2006/main" xmlns:r="http://schemas.openxmlformats.org/officeDocument/2006/relationships" xmlns:p="http://schemas.openxmlformats.org/presentationml/2006/main">
+  <p:cSld name="Slide 16">
+    <p:bg>
+      <p:bgPr>
+        <a:solidFill>
+          <a:srgbClr val="F8FAFC"/>
+        </a:solidFill>
+      </p:bgPr>
+    </p:bg>
+    <p:spTree>
+      <p:nvGrpSpPr>
+        <p:cNvPr id="1" name=""/>
+        <p:cNvGrpSpPr/>
+        <p:nvPr/>
+      </p:nvGrpSpPr>
+      <p:grpSpPr>
+        <a:xfrm>
+          <a:off x="0" y="0"/>
+          <a:ext cx="0" cy="0"/>
+          <a:chOff x="0" y="0"/>
+          <a:chExt cx="0" cy="0"/>
+        </a:xfrm>
+      </p:grpSpPr>
+      <p:sp>
+        <p:nvSpPr>
+          <p:cNvPr id="2" name="Shape 0"/>
+          <p:cNvSpPr/>
+          <p:nvPr/>
+        </p:nvSpPr>
+        <p:spPr>
+          <a:xfrm>
+            <a:off x="0" y="0"/>
+            <a:ext cx="9144000" cy="566928"/>
+          </a:xfrm>
+          <a:prstGeom prst="rect">
+            <a:avLst/>
+          </a:prstGeom>
+          <a:solidFill>
+            <a:srgbClr val="0E1C42"/>
+          </a:solidFill>
+          <a:ln/>
+        </p:spPr>
+      </p:sp>
+      <p:sp>
+        <p:nvSpPr>
+          <p:cNvPr id="3" name="Text 1"/>
+          <p:cNvSpPr/>
+          <p:nvPr/>
+        </p:nvSpPr>
+        <p:spPr>
+          <a:xfrm>
+            <a:off x="365760" y="54864"/>
+            <a:ext cx="8412480" cy="457200"/>
+          </a:xfrm>
+          <a:prstGeom prst="rect">
+            <a:avLst/>
+          </a:prstGeom>
+          <a:noFill/>
+          <a:ln/>
+        </p:spPr>
+        <p:txBody>
+          <a:bodyPr wrap="square" lIns="0" tIns="0" rIns="0" bIns="0" rtlCol="0" anchor="ctr"/>
+          <a:lstStyle/>
+          <a:p>
+            <a:pPr indent="0" marL="0">
+              <a:buNone/>
+            </a:pPr>
+            <a:r>
+              <a:rPr lang="en-US" sz="2200" b="1" dirty="0">
+                <a:solidFill>
+                  <a:srgbClr val="FFFFFF"/>
+                </a:solidFill>
+                <a:latin typeface="Calibri" pitchFamily="34" charset="0"/>
+                <a:ea typeface="Calibri" pitchFamily="34" charset="-122"/>
+                <a:cs typeface="Calibri" pitchFamily="34" charset="-120"/>
+              </a:rPr>
+              <a:t>🔠  Spelling</a:t>
+            </a:r>
+            <a:endParaRPr lang="en-US" sz="2200" dirty="0"/>
+          </a:p>
+        </p:txBody>
+      </p:sp>
+      <p:sp>
+        <p:nvSpPr>
+          <p:cNvPr id="4" name="Text 2"/>
+          <p:cNvSpPr/>
+          <p:nvPr/>
+        </p:nvSpPr>
+        <p:spPr>
+          <a:xfrm>
+            <a:off x="365760" y="777240"/>
+            <a:ext cx="8229600" cy="237744"/>
+          </a:xfrm>
+          <a:prstGeom prst="rect">
+            <a:avLst/>
+          </a:prstGeom>
+          <a:noFill/>
+          <a:ln/>
+        </p:spPr>
+        <p:txBody>
+          <a:bodyPr wrap="square" lIns="0" tIns="0" rIns="0" bIns="0" rtlCol="0" anchor="ctr"/>
+          <a:lstStyle/>
+          <a:p>
+            <a:pPr indent="0" marL="0">
+              <a:buNone/>
+            </a:pPr>
+            <a:r>
+              <a:rPr lang="en-US" sz="1100" b="1" spc="100" kern="0" dirty="0">
+                <a:solidFill>
+                  <a:srgbClr val="0E1C42"/>
+                </a:solidFill>
+                <a:latin typeface="Calibri" pitchFamily="34" charset="0"/>
+                <a:ea typeface="Calibri" pitchFamily="34" charset="-122"/>
+                <a:cs typeface="Calibri" pitchFamily="34" charset="-120"/>
+              </a:rPr>
+              <a:t>DROPPING FINAL E BEFORE VOWEL SUFFIX</a:t>
+            </a:r>
+            <a:endParaRPr lang="en-US" sz="1100" dirty="0"/>
+          </a:p>
+        </p:txBody>
+      </p:sp>
+      <p:sp>
+        <p:nvSpPr>
+          <p:cNvPr id="5" name="Text 3"/>
+          <p:cNvSpPr/>
+          <p:nvPr/>
+        </p:nvSpPr>
+        <p:spPr>
+          <a:xfrm>
+            <a:off x="365760" y="1051560"/>
+            <a:ext cx="8229600" cy="237744"/>
+          </a:xfrm>
+          <a:prstGeom prst="rect">
+            <a:avLst/>
+          </a:prstGeom>
+          <a:noFill/>
+          <a:ln/>
+        </p:spPr>
+        <p:txBody>
+          <a:bodyPr wrap="square" lIns="0" tIns="0" rIns="0" bIns="0" rtlCol="0" anchor="ctr"/>
+          <a:lstStyle/>
+          <a:p>
+            <a:pPr indent="0" marL="0">
+              <a:buNone/>
+            </a:pPr>
+            <a:r>
+              <a:rPr lang="en-US" sz="1100" b="1" spc="100" kern="0" dirty="0">
+                <a:solidFill>
+                  <a:srgbClr val="C7922C"/>
+                </a:solidFill>
+                <a:latin typeface="Calibri" pitchFamily="34" charset="0"/>
+                <a:ea typeface="Calibri" pitchFamily="34" charset="-122"/>
+                <a:cs typeface="Calibri" pitchFamily="34" charset="-120"/>
+              </a:rPr>
+              <a:t>📖  THE RULE</a:t>
+            </a:r>
+            <a:endParaRPr lang="en-US" sz="1100" dirty="0"/>
+          </a:p>
+        </p:txBody>
+      </p:sp>
+      <p:sp>
+        <p:nvSpPr>
+          <p:cNvPr id="6" name="Shape 4"/>
+          <p:cNvSpPr/>
+          <p:nvPr/>
+        </p:nvSpPr>
+        <p:spPr>
+          <a:xfrm>
+            <a:off x="365760" y="1298448"/>
+            <a:ext cx="8412480" cy="960120"/>
+          </a:xfrm>
+          <a:prstGeom prst="roundRect">
+            <a:avLst>
+              <a:gd name="adj" fmla="val 9524"/>
+            </a:avLst>
+          </a:prstGeom>
+          <a:solidFill>
+            <a:srgbClr val="FEF6E8"/>
+          </a:solidFill>
+          <a:ln w="19050">
+            <a:solidFill>
+              <a:srgbClr val="C7922C"/>
+            </a:solidFill>
+            <a:prstDash val="solid"/>
+          </a:ln>
+          <a:effectLst>
+            <a:outerShdw sx="100000" sy="100000" kx="0" ky="0" algn="bl" rotWithShape="0" blurRad="101600" dist="38100" dir="2700000">
+              <a:srgbClr val="000000">
+                <a:alpha val="12000"/>
+              </a:srgbClr>
+            </a:outerShdw>
+          </a:effectLst>
+        </p:spPr>
+      </p:sp>
+      <p:sp>
+        <p:nvSpPr>
+          <p:cNvPr id="7" name="Text 5"/>
+          <p:cNvSpPr/>
+          <p:nvPr/>
+        </p:nvSpPr>
+        <p:spPr>
+          <a:xfrm>
+            <a:off x="594360" y="1426464"/>
+            <a:ext cx="7955280" cy="704088"/>
+          </a:xfrm>
+          <a:prstGeom prst="rect">
+            <a:avLst/>
+          </a:prstGeom>
+          <a:noFill/>
+          <a:ln/>
+        </p:spPr>
+        <p:txBody>
+          <a:bodyPr wrap="square" lIns="0" tIns="0" rIns="0" bIns="0" rtlCol="0" anchor="ctr"/>
+          <a:lstStyle/>
+          <a:p>
+            <a:pPr indent="0" marL="0">
+              <a:buNone/>
+            </a:pPr>
+            <a:r>
+              <a:rPr lang="en-US" sz="1700" dirty="0">
+                <a:solidFill>
+                  <a:srgbClr val="1E293B"/>
+                </a:solidFill>
+                <a:latin typeface="Calibri" pitchFamily="34" charset="0"/>
+                <a:ea typeface="Calibri" pitchFamily="34" charset="-122"/>
+                <a:cs typeface="Calibri" pitchFamily="34" charset="-120"/>
+              </a:rPr>
+              <a:t>When a base word ends in a silent e and the ending starts with a vowel, drop the e: hope + -ing = hoping. If the ending starts with a consonant, keep it: hope + -ful = hopeful.</a:t>
+            </a:r>
+            <a:endParaRPr lang="en-US" sz="1700" dirty="0"/>
+          </a:p>
+        </p:txBody>
+      </p:sp>
+      <p:sp>
+        <p:nvSpPr>
+          <p:cNvPr id="8" name="Text 6"/>
+          <p:cNvSpPr/>
+          <p:nvPr/>
+        </p:nvSpPr>
+        <p:spPr>
+          <a:xfrm>
+            <a:off x="365760" y="2395728"/>
+            <a:ext cx="8412480" cy="411480"/>
+          </a:xfrm>
+          <a:prstGeom prst="rect">
+            <a:avLst/>
+          </a:prstGeom>
+          <a:noFill/>
+          <a:ln/>
+        </p:spPr>
+        <p:txBody>
+          <a:bodyPr wrap="square" lIns="0" tIns="0" rIns="0" bIns="0" rtlCol="0" anchor="ctr"/>
+          <a:lstStyle/>
+          <a:p>
+            <a:pPr indent="0" marL="0">
+              <a:buNone/>
+            </a:pPr>
+            <a:r>
+              <a:rPr lang="en-US" sz="1400" i="1" dirty="0">
+                <a:solidFill>
+                  <a:srgbClr val="64748B"/>
+                </a:solidFill>
+                <a:latin typeface="Calibri" pitchFamily="34" charset="0"/>
+                <a:ea typeface="Calibri" pitchFamily="34" charset="-122"/>
+                <a:cs typeface="Calibri" pitchFamily="34" charset="-120"/>
+              </a:rPr>
+              <a:t>Keep It or Drop It Dice! Roll a word, say it out loud, decide — then tap to check yourself.</a:t>
+            </a:r>
+            <a:endParaRPr lang="en-US" sz="1400" dirty="0"/>
+          </a:p>
+        </p:txBody>
+      </p:sp>
+    </p:spTree>
+  </p:cSld>
+  <p:clrMapOvr>
+    <a:masterClrMapping/>
+  </p:clrMapOvr>
+</p:sld>
+</file>
+
+<file path=ppt/slides/slide17.xml><?xml version="1.0" encoding="utf-8"?>
+<p:sld xmlns:a="http://schemas.openxmlformats.org/drawingml/2006/main" xmlns:r="http://schemas.openxmlformats.org/officeDocument/2006/relationships" xmlns:p="http://schemas.openxmlformats.org/presentationml/2006/main">
+  <p:cSld name="Slide 17">
     <p:bg>
       <p:bgPr>
         <a:solidFill>
@@ -6064,7 +8200,7 @@
                 <a:ea typeface="Calibri" pitchFamily="34" charset="-122"/>
                 <a:cs typeface="Calibri" pitchFamily="34" charset="-120"/>
               </a:rPr>
-              <a:t>Good readers look back at what they have read and think about the big picture . Today we review all of Chapters 1–7. Think about how the author built Despereaux’s character — what a character looks like, what others say about them, and what they do — piece by piece.</a:t>
+              <a:t>Good readers look back at what they have read and think about the big picture. Today we review all of Chapters 1–7. Think about how the author built Despereaux’s character — what a character looks like, what others say about them, and what they do — piece by piece.</a:t>
             </a:r>
             <a:endParaRPr lang="en-US" sz="1500" dirty="0"/>
           </a:p>
@@ -6084,7 +8220,7 @@
     <p:bg>
       <p:bgPr>
         <a:solidFill>
-          <a:srgbClr val="F8FAFC"/>
+          <a:srgbClr val="FFFFFF"/>
         </a:solidFill>
       </p:bgPr>
     </p:bg>
@@ -6169,7 +8305,7 @@
         </p:nvSpPr>
         <p:spPr>
           <a:xfrm>
-            <a:off x="365760" y="749808"/>
+            <a:off x="365760" y="804672"/>
             <a:ext cx="8229600" cy="237744"/>
           </a:xfrm>
           <a:prstGeom prst="rect">
@@ -6194,7 +8330,7 @@
                 <a:ea typeface="Calibri" pitchFamily="34" charset="-122"/>
                 <a:cs typeface="Calibri" pitchFamily="34" charset="-120"/>
               </a:rPr>
-              <a:t>FIX THESE SENTENCES</a:t>
+              <a:t>CORRECT MODEL — STUDY WHAT IS RIGHT</a:t>
             </a:r>
             <a:endParaRPr lang="en-US" sz="1100" dirty="0"/>
           </a:p>
@@ -6208,16 +8344,16 @@
         </p:nvSpPr>
         <p:spPr>
           <a:xfrm>
-            <a:off x="365760" y="1024128"/>
-            <a:ext cx="8412480" cy="777240"/>
+            <a:off x="365760" y="1078992"/>
+            <a:ext cx="8412480" cy="822960"/>
           </a:xfrm>
           <a:prstGeom prst="roundRect">
             <a:avLst>
-              <a:gd name="adj" fmla="val 11765"/>
+              <a:gd name="adj" fmla="val 11111"/>
             </a:avLst>
           </a:prstGeom>
           <a:solidFill>
-            <a:srgbClr val="FFFFFF"/>
+            <a:srgbClr val="E5F7FC"/>
           </a:solidFill>
           <a:ln w="19050">
             <a:solidFill>
@@ -6242,8 +8378,8 @@
         </p:nvSpPr>
         <p:spPr>
           <a:xfrm>
-            <a:off x="594360" y="1152144"/>
-            <a:ext cx="7955280" cy="521208"/>
+            <a:off x="594360" y="1207008"/>
+            <a:ext cx="7955280" cy="566928"/>
           </a:xfrm>
           <a:prstGeom prst="rect">
             <a:avLst/>
@@ -6267,7 +8403,7 @@
                 <a:ea typeface="Calibri" pitchFamily="34" charset="-122"/>
                 <a:cs typeface="Calibri" pitchFamily="34" charset="-120"/>
               </a:rPr>
-              <a:t>1. lester said he will call a meeting of the mouse council to decide what to do about despereaux</a:t>
+              <a:t>The Mouse Council sent Furlough to gather the threads from the dungeon below.</a:t>
             </a:r>
             <a:endParaRPr lang="en-US" sz="1700" dirty="0"/>
           </a:p>
@@ -6275,37 +8411,42 @@
       </p:sp>
       <p:sp>
         <p:nvSpPr>
-          <p:cNvPr id="7" name="Shape 5"/>
-          <p:cNvSpPr/>
-          <p:nvPr/>
-        </p:nvSpPr>
-        <p:spPr>
-          <a:xfrm>
-            <a:off x="365760" y="1874520"/>
-            <a:ext cx="8412480" cy="777240"/>
-          </a:xfrm>
-          <a:prstGeom prst="roundRect">
-            <a:avLst>
-              <a:gd name="adj" fmla="val 11765"/>
-            </a:avLst>
-          </a:prstGeom>
-          <a:solidFill>
-            <a:srgbClr val="FFFFFF"/>
-          </a:solidFill>
-          <a:ln w="19050">
-            <a:solidFill>
-              <a:srgbClr val="55C8E8"/>
-            </a:solidFill>
-            <a:prstDash val="solid"/>
-          </a:ln>
-          <a:effectLst>
-            <a:outerShdw sx="100000" sy="100000" kx="0" ky="0" algn="bl" rotWithShape="0" blurRad="101600" dist="38100" dir="2700000">
-              <a:srgbClr val="000000">
-                <a:alpha val="12000"/>
-              </a:srgbClr>
-            </a:outerShdw>
-          </a:effectLst>
-        </p:spPr>
+          <p:cNvPr id="7" name="Text 5"/>
+          <p:cNvSpPr/>
+          <p:nvPr/>
+        </p:nvSpPr>
+        <p:spPr>
+          <a:xfrm>
+            <a:off x="365760" y="2103120"/>
+            <a:ext cx="8229600" cy="237744"/>
+          </a:xfrm>
+          <a:prstGeom prst="rect">
+            <a:avLst/>
+          </a:prstGeom>
+          <a:noFill/>
+          <a:ln/>
+        </p:spPr>
+        <p:txBody>
+          <a:bodyPr wrap="square" lIns="0" tIns="0" rIns="0" bIns="0" rtlCol="0" anchor="ctr"/>
+          <a:lstStyle/>
+          <a:p>
+            <a:pPr indent="0" marL="0">
+              <a:buNone/>
+            </a:pPr>
+            <a:r>
+              <a:rPr lang="en-US" sz="1100" b="1" spc="100" kern="0" dirty="0">
+                <a:solidFill>
+                  <a:srgbClr val="55C8E8"/>
+                </a:solidFill>
+                <a:latin typeface="Calibri" pitchFamily="34" charset="0"/>
+                <a:ea typeface="Calibri" pitchFamily="34" charset="-122"/>
+                <a:cs typeface="Calibri" pitchFamily="34" charset="-120"/>
+              </a:rPr>
+              <a:t>NOTICE</a:t>
+            </a:r>
+            <a:endParaRPr lang="en-US" sz="1100" dirty="0"/>
+          </a:p>
+        </p:txBody>
       </p:sp>
       <p:sp>
         <p:nvSpPr>
@@ -6315,73 +8456,34 @@
         </p:nvSpPr>
         <p:spPr>
           <a:xfrm>
-            <a:off x="594360" y="2002536"/>
-            <a:ext cx="7955280" cy="521208"/>
-          </a:xfrm>
-          <a:prstGeom prst="rect">
-            <a:avLst/>
-          </a:prstGeom>
-          <a:noFill/>
-          <a:ln/>
-        </p:spPr>
-        <p:txBody>
-          <a:bodyPr wrap="square" lIns="0" tIns="0" rIns="0" bIns="0" rtlCol="0" anchor="ctr"/>
-          <a:lstStyle/>
-          <a:p>
-            <a:pPr indent="0" marL="0">
-              <a:buNone/>
-            </a:pPr>
-            <a:r>
-              <a:rPr lang="en-US" sz="1700" dirty="0">
-                <a:solidFill>
-                  <a:srgbClr val="1E293B"/>
-                </a:solidFill>
-                <a:latin typeface="Calibri" pitchFamily="34" charset="0"/>
-                <a:ea typeface="Calibri" pitchFamily="34" charset="-122"/>
-                <a:cs typeface="Calibri" pitchFamily="34" charset="-120"/>
-              </a:rPr>
-              <a:t>2. antoinette said you and this council of the mouse is a waste of time</a:t>
-            </a:r>
-            <a:endParaRPr lang="en-US" sz="1700" dirty="0"/>
-          </a:p>
-        </p:txBody>
-      </p:sp>
-      <p:sp>
-        <p:nvSpPr>
-          <p:cNvPr id="9" name="Text 7"/>
-          <p:cNvSpPr/>
-          <p:nvPr/>
-        </p:nvSpPr>
-        <p:spPr>
-          <a:xfrm>
-            <a:off x="365760" y="2788920"/>
-            <a:ext cx="8412480" cy="365760"/>
-          </a:xfrm>
-          <a:prstGeom prst="rect">
-            <a:avLst/>
-          </a:prstGeom>
-          <a:noFill/>
-          <a:ln/>
-        </p:spPr>
-        <p:txBody>
-          <a:bodyPr wrap="square" lIns="0" tIns="0" rIns="0" bIns="0" rtlCol="0" anchor="ctr"/>
-          <a:lstStyle/>
-          <a:p>
-            <a:pPr indent="0" marL="0">
-              <a:buNone/>
-            </a:pPr>
-            <a:r>
-              <a:rPr lang="en-US" sz="1600" b="1" dirty="0">
-                <a:solidFill>
-                  <a:srgbClr val="0E1C42"/>
-                </a:solidFill>
-                <a:latin typeface="Calibri" pitchFamily="34" charset="0"/>
-                <a:ea typeface="Calibri" pitchFamily="34" charset="-122"/>
-                <a:cs typeface="Calibri" pitchFamily="34" charset="-120"/>
-              </a:rPr>
-              <a:t>Rewrite both sentences correctly in your notebook.</a:t>
-            </a:r>
-            <a:endParaRPr lang="en-US" sz="1600" dirty="0"/>
+            <a:off x="365760" y="2359152"/>
+            <a:ext cx="8412480" cy="1097280"/>
+          </a:xfrm>
+          <a:prstGeom prst="rect">
+            <a:avLst/>
+          </a:prstGeom>
+          <a:noFill/>
+          <a:ln/>
+        </p:spPr>
+        <p:txBody>
+          <a:bodyPr wrap="square" lIns="0" tIns="0" rIns="0" bIns="0" rtlCol="0" anchor="t"/>
+          <a:lstStyle/>
+          <a:p>
+            <a:pPr indent="0" marL="0">
+              <a:buNone/>
+            </a:pPr>
+            <a:r>
+              <a:rPr lang="en-US" sz="1500" dirty="0">
+                <a:solidFill>
+                  <a:srgbClr val="1E293B"/>
+                </a:solidFill>
+                <a:latin typeface="Calibri" pitchFamily="34" charset="0"/>
+                <a:ea typeface="Calibri" pitchFamily="34" charset="-122"/>
+                <a:cs typeface="Calibri" pitchFamily="34" charset="-120"/>
+              </a:rPr>
+              <a:t>Mouse Council is the name of a group, so both words are capitalized. Furlough is a name. Threads is a plural noun and adds -s. A period ends the sentence.</a:t>
+            </a:r>
+            <a:endParaRPr lang="en-US" sz="1500" dirty="0"/>
           </a:p>
         </p:txBody>
       </p:sp>
@@ -6509,7 +8611,7 @@
                 <a:ea typeface="Calibri" pitchFamily="34" charset="-122"/>
                 <a:cs typeface="Calibri" pitchFamily="34" charset="-120"/>
               </a:rPr>
-              <a:t>FIX THESE SENTENCES</a:t>
+              <a:t>NOW FIX THIS ONE</a:t>
             </a:r>
             <a:endParaRPr lang="en-US" sz="1100" dirty="0"/>
           </a:p>
@@ -6582,7 +8684,7 @@
                 <a:ea typeface="Calibri" pitchFamily="34" charset="-122"/>
                 <a:cs typeface="Calibri" pitchFamily="34" charset="-120"/>
               </a:rPr>
-              <a:t>1. lester said he will call a meeting of the mouse council to decide what to do about despereaux</a:t>
+              <a:t>lester said he will call a meeting of the mouse council to decide what to do about despereaux</a:t>
             </a:r>
             <a:endParaRPr lang="en-US" sz="1700" dirty="0"/>
           </a:p>
@@ -6590,48 +8692,14 @@
       </p:sp>
       <p:sp>
         <p:nvSpPr>
-          <p:cNvPr id="7" name="Shape 5"/>
-          <p:cNvSpPr/>
-          <p:nvPr/>
-        </p:nvSpPr>
-        <p:spPr>
-          <a:xfrm>
-            <a:off x="365760" y="1874520"/>
-            <a:ext cx="8412480" cy="777240"/>
-          </a:xfrm>
-          <a:prstGeom prst="roundRect">
-            <a:avLst>
-              <a:gd name="adj" fmla="val 11765"/>
-            </a:avLst>
-          </a:prstGeom>
-          <a:solidFill>
-            <a:srgbClr val="FFFFFF"/>
-          </a:solidFill>
-          <a:ln w="19050">
-            <a:solidFill>
-              <a:srgbClr val="55C8E8"/>
-            </a:solidFill>
-            <a:prstDash val="solid"/>
-          </a:ln>
-          <a:effectLst>
-            <a:outerShdw sx="100000" sy="100000" kx="0" ky="0" algn="bl" rotWithShape="0" blurRad="101600" dist="38100" dir="2700000">
-              <a:srgbClr val="000000">
-                <a:alpha val="12000"/>
-              </a:srgbClr>
-            </a:outerShdw>
-          </a:effectLst>
-        </p:spPr>
-      </p:sp>
-      <p:sp>
-        <p:nvSpPr>
-          <p:cNvPr id="8" name="Text 6"/>
-          <p:cNvSpPr/>
-          <p:nvPr/>
-        </p:nvSpPr>
-        <p:spPr>
-          <a:xfrm>
-            <a:off x="594360" y="2002536"/>
-            <a:ext cx="7955280" cy="521208"/>
+          <p:cNvPr id="7" name="Text 5"/>
+          <p:cNvSpPr/>
+          <p:nvPr/>
+        </p:nvSpPr>
+        <p:spPr>
+          <a:xfrm>
+            <a:off x="365760" y="2788920"/>
+            <a:ext cx="8412480" cy="365760"/>
           </a:xfrm>
           <a:prstGeom prst="rect">
             <a:avLst/>
@@ -6647,169 +8715,17 @@
               <a:buNone/>
             </a:pPr>
             <a:r>
-              <a:rPr lang="en-US" sz="1700" dirty="0">
-                <a:solidFill>
-                  <a:srgbClr val="1E293B"/>
-                </a:solidFill>
-                <a:latin typeface="Calibri" pitchFamily="34" charset="0"/>
-                <a:ea typeface="Calibri" pitchFamily="34" charset="-122"/>
-                <a:cs typeface="Calibri" pitchFamily="34" charset="-120"/>
-              </a:rPr>
-              <a:t>2. antoinette said you and this council of the mouse is a waste of time</a:t>
-            </a:r>
-            <a:endParaRPr lang="en-US" sz="1700" dirty="0"/>
-          </a:p>
-        </p:txBody>
-      </p:sp>
-      <p:sp>
-        <p:nvSpPr>
-          <p:cNvPr id="9" name="Shape 7"/>
-          <p:cNvSpPr/>
-          <p:nvPr/>
-        </p:nvSpPr>
-        <p:spPr>
-          <a:xfrm>
-            <a:off x="365760" y="2743200"/>
-            <a:ext cx="8412480" cy="1417320"/>
-          </a:xfrm>
-          <a:prstGeom prst="roundRect">
-            <a:avLst>
-              <a:gd name="adj" fmla="val 6452"/>
-            </a:avLst>
-          </a:prstGeom>
-          <a:solidFill>
-            <a:srgbClr val="E8F8EF"/>
-          </a:solidFill>
-          <a:ln/>
-          <a:effectLst>
-            <a:outerShdw sx="100000" sy="100000" kx="0" ky="0" algn="bl" rotWithShape="0" blurRad="101600" dist="38100" dir="2700000">
-              <a:srgbClr val="000000">
-                <a:alpha val="12000"/>
-              </a:srgbClr>
-            </a:outerShdw>
-          </a:effectLst>
-        </p:spPr>
-      </p:sp>
-      <p:sp>
-        <p:nvSpPr>
-          <p:cNvPr id="10" name="Text 8"/>
-          <p:cNvSpPr/>
-          <p:nvPr/>
-        </p:nvSpPr>
-        <p:spPr>
-          <a:xfrm>
-            <a:off x="566928" y="2816352"/>
-            <a:ext cx="8229600" cy="237744"/>
-          </a:xfrm>
-          <a:prstGeom prst="rect">
-            <a:avLst/>
-          </a:prstGeom>
-          <a:noFill/>
-          <a:ln/>
-        </p:spPr>
-        <p:txBody>
-          <a:bodyPr wrap="square" lIns="0" tIns="0" rIns="0" bIns="0" rtlCol="0" anchor="ctr"/>
-          <a:lstStyle/>
-          <a:p>
-            <a:pPr indent="0" marL="0">
-              <a:buNone/>
-            </a:pPr>
-            <a:r>
-              <a:rPr lang="en-US" sz="1100" b="1" spc="100" kern="0" dirty="0">
-                <a:solidFill>
-                  <a:srgbClr val="34B76F"/>
-                </a:solidFill>
-                <a:latin typeface="Calibri" pitchFamily="34" charset="0"/>
-                <a:ea typeface="Calibri" pitchFamily="34" charset="-122"/>
-                <a:cs typeface="Calibri" pitchFamily="34" charset="-120"/>
-              </a:rPr>
-              <a:t>✅  CORRECTED</a:t>
-            </a:r>
-            <a:endParaRPr lang="en-US" sz="1100" dirty="0"/>
-          </a:p>
-        </p:txBody>
-      </p:sp>
-      <p:sp>
-        <p:nvSpPr>
-          <p:cNvPr id="11" name="Text 9"/>
-          <p:cNvSpPr/>
-          <p:nvPr/>
-        </p:nvSpPr>
-        <p:spPr>
-          <a:xfrm>
-            <a:off x="566928" y="3072384"/>
-            <a:ext cx="8010144" cy="685800"/>
-          </a:xfrm>
-          <a:prstGeom prst="rect">
-            <a:avLst/>
-          </a:prstGeom>
-          <a:noFill/>
-          <a:ln/>
-        </p:spPr>
-        <p:txBody>
-          <a:bodyPr wrap="square" lIns="0" tIns="0" rIns="0" bIns="0" rtlCol="0" anchor="ctr"/>
-          <a:lstStyle/>
-          <a:p>
-            <a:pPr indent="0" marL="0">
-              <a:buNone/>
-            </a:pPr>
-            <a:endParaRPr lang="en-US" sz="1400" dirty="0"/>
-          </a:p>
-          <a:p>
-            <a:pPr indent="0" marL="0">
-              <a:buNone/>
-            </a:pPr>
-            <a:r>
-              <a:rPr lang="en-US" sz="1400" i="1" dirty="0">
-                <a:solidFill>
-                  <a:srgbClr val="1E293B"/>
-                </a:solidFill>
-                <a:latin typeface="Calibri" pitchFamily="34" charset="0"/>
-                <a:ea typeface="Calibri" pitchFamily="34" charset="-122"/>
-                <a:cs typeface="Calibri" pitchFamily="34" charset="-120"/>
-              </a:rPr>
-              <a:t>1. Lester said he will call a meeting of the Mouse Council to decide what to do about Despereaux.</a:t>
-            </a:r>
-            <a:endParaRPr lang="en-US" sz="1400" dirty="0"/>
-          </a:p>
-        </p:txBody>
-      </p:sp>
-      <p:sp>
-        <p:nvSpPr>
-          <p:cNvPr id="12" name="Text 10"/>
-          <p:cNvSpPr/>
-          <p:nvPr/>
-        </p:nvSpPr>
-        <p:spPr>
-          <a:xfrm>
-            <a:off x="566928" y="3767328"/>
-            <a:ext cx="8010144" cy="320040"/>
-          </a:xfrm>
-          <a:prstGeom prst="rect">
-            <a:avLst/>
-          </a:prstGeom>
-          <a:noFill/>
-          <a:ln/>
-        </p:spPr>
-        <p:txBody>
-          <a:bodyPr wrap="square" lIns="0" tIns="0" rIns="0" bIns="0" rtlCol="0" anchor="ctr"/>
-          <a:lstStyle/>
-          <a:p>
-            <a:pPr indent="0" marL="0">
-              <a:buNone/>
-            </a:pPr>
-            <a:r>
-              <a:rPr lang="en-US" sz="1200" dirty="0">
-                <a:solidFill>
-                  <a:srgbClr val="64748B"/>
-                </a:solidFill>
-                <a:latin typeface="Calibri" pitchFamily="34" charset="0"/>
-                <a:ea typeface="Calibri" pitchFamily="34" charset="-122"/>
-                <a:cs typeface="Calibri" pitchFamily="34" charset="-120"/>
-              </a:rPr>
-              <a:t>Did you catch the proper nouns (Lester, Mouse Council, Despereaux, Antoinette), quotation marks, and the comma before the quote “I’ve”?</a:t>
-            </a:r>
-            <a:endParaRPr lang="en-US" sz="1200" dirty="0"/>
+              <a:rPr lang="en-US" sz="1600" b="1" dirty="0">
+                <a:solidFill>
+                  <a:srgbClr val="0E1C42"/>
+                </a:solidFill>
+                <a:latin typeface="Calibri" pitchFamily="34" charset="0"/>
+                <a:ea typeface="Calibri" pitchFamily="34" charset="-122"/>
+                <a:cs typeface="Calibri" pitchFamily="34" charset="-120"/>
+              </a:rPr>
+              <a:t>Rewrite the sentence correctly in your notebook.</a:t>
+            </a:r>
+            <a:endParaRPr lang="en-US" sz="1600" dirty="0"/>
           </a:p>
         </p:txBody>
       </p:sp>
@@ -6827,7 +8743,7 @@
     <p:bg>
       <p:bgPr>
         <a:solidFill>
-          <a:srgbClr val="FFFFFF"/>
+          <a:srgbClr val="F8FAFC"/>
         </a:solidFill>
       </p:bgPr>
     </p:bg>
@@ -6860,7 +8776,7 @@
             <a:avLst/>
           </a:prstGeom>
           <a:solidFill>
-            <a:srgbClr val="8B6FC0"/>
+            <a:srgbClr val="55C8E8"/>
           </a:solidFill>
           <a:ln/>
         </p:spPr>
@@ -6898,7 +8814,7 @@
                 <a:ea typeface="Calibri" pitchFamily="34" charset="-122"/>
                 <a:cs typeface="Calibri" pitchFamily="34" charset="-120"/>
               </a:rPr>
-              <a:t>🌱  Morphology</a:t>
+              <a:t>✏️  Daily Oral Language</a:t>
             </a:r>
             <a:endParaRPr lang="en-US" sz="2200" dirty="0"/>
           </a:p>
@@ -6912,7 +8828,7 @@
         </p:nvSpPr>
         <p:spPr>
           <a:xfrm>
-            <a:off x="365760" y="804672"/>
+            <a:off x="365760" y="749808"/>
             <a:ext cx="8229600" cy="237744"/>
           </a:xfrm>
           <a:prstGeom prst="rect">
@@ -6931,13 +8847,13 @@
             <a:r>
               <a:rPr lang="en-US" sz="1100" b="1" spc="100" kern="0" dirty="0">
                 <a:solidFill>
-                  <a:srgbClr val="8B6FC0"/>
-                </a:solidFill>
-                <a:latin typeface="Calibri" pitchFamily="34" charset="0"/>
-                <a:ea typeface="Calibri" pitchFamily="34" charset="-122"/>
-                <a:cs typeface="Calibri" pitchFamily="34" charset="-120"/>
-              </a:rPr>
-              <a:t>-FUL</a:t>
+                  <a:srgbClr val="55C8E8"/>
+                </a:solidFill>
+                <a:latin typeface="Calibri" pitchFamily="34" charset="0"/>
+                <a:ea typeface="Calibri" pitchFamily="34" charset="-122"/>
+                <a:cs typeface="Calibri" pitchFamily="34" charset="-120"/>
+              </a:rPr>
+              <a:t>NOW FIX THIS ONE</a:t>
             </a:r>
             <a:endParaRPr lang="en-US" sz="1100" dirty="0"/>
           </a:p>
@@ -6951,18 +8867,23 @@
         </p:nvSpPr>
         <p:spPr>
           <a:xfrm>
-            <a:off x="365760" y="1097280"/>
-            <a:ext cx="8412480" cy="621792"/>
+            <a:off x="365760" y="1024128"/>
+            <a:ext cx="8412480" cy="777240"/>
           </a:xfrm>
           <a:prstGeom prst="roundRect">
             <a:avLst>
-              <a:gd name="adj" fmla="val 14706"/>
+              <a:gd name="adj" fmla="val 11765"/>
             </a:avLst>
           </a:prstGeom>
           <a:solidFill>
-            <a:srgbClr val="F0E8FF"/>
+            <a:srgbClr val="FFFFFF"/>
           </a:solidFill>
-          <a:ln/>
+          <a:ln w="19050">
+            <a:solidFill>
+              <a:srgbClr val="55C8E8"/>
+            </a:solidFill>
+            <a:prstDash val="solid"/>
+          </a:ln>
           <a:effectLst>
             <a:outerShdw sx="100000" sy="100000" kx="0" ky="0" algn="bl" rotWithShape="0" blurRad="101600" dist="38100" dir="2700000">
               <a:srgbClr val="000000">
@@ -6980,8 +8901,8 @@
         </p:nvSpPr>
         <p:spPr>
           <a:xfrm>
-            <a:off x="594360" y="1216152"/>
-            <a:ext cx="7863840" cy="384048"/>
+            <a:off x="594360" y="1152144"/>
+            <a:ext cx="7955280" cy="521208"/>
           </a:xfrm>
           <a:prstGeom prst="rect">
             <a:avLst/>
@@ -6997,17 +8918,17 @@
               <a:buNone/>
             </a:pPr>
             <a:r>
-              <a:rPr lang="en-US" sz="1500" dirty="0">
-                <a:solidFill>
-                  <a:srgbClr val="1E293B"/>
-                </a:solidFill>
-                <a:latin typeface="Calibri" pitchFamily="34" charset="0"/>
-                <a:ea typeface="Calibri" pitchFamily="34" charset="-122"/>
-                <a:cs typeface="Calibri" pitchFamily="34" charset="-120"/>
-              </a:rPr>
-              <a:t>🌱  hopeful — base word: hope</a:t>
-            </a:r>
-            <a:endParaRPr lang="en-US" sz="1500" dirty="0"/>
+              <a:rPr lang="en-US" sz="1700" dirty="0">
+                <a:solidFill>
+                  <a:srgbClr val="1E293B"/>
+                </a:solidFill>
+                <a:latin typeface="Calibri" pitchFamily="34" charset="0"/>
+                <a:ea typeface="Calibri" pitchFamily="34" charset="-122"/>
+                <a:cs typeface="Calibri" pitchFamily="34" charset="-120"/>
+              </a:rPr>
+              <a:t>lester said he will call a meeting of the mouse council to decide what to do about despereaux</a:t>
+            </a:r>
+            <a:endParaRPr lang="en-US" sz="1700" dirty="0"/>
           </a:p>
         </p:txBody>
       </p:sp>
@@ -7019,16 +8940,16 @@
         </p:nvSpPr>
         <p:spPr>
           <a:xfrm>
-            <a:off x="365760" y="1792224"/>
-            <a:ext cx="8412480" cy="621792"/>
+            <a:off x="365760" y="2743200"/>
+            <a:ext cx="8412480" cy="1417320"/>
           </a:xfrm>
           <a:prstGeom prst="roundRect">
             <a:avLst>
-              <a:gd name="adj" fmla="val 14706"/>
+              <a:gd name="adj" fmla="val 6452"/>
             </a:avLst>
           </a:prstGeom>
           <a:solidFill>
-            <a:srgbClr val="F8F4FF"/>
+            <a:srgbClr val="E8F8EF"/>
           </a:solidFill>
           <a:ln/>
           <a:effectLst>
@@ -7048,8 +8969,8 @@
         </p:nvSpPr>
         <p:spPr>
           <a:xfrm>
-            <a:off x="594360" y="1911096"/>
-            <a:ext cx="7863840" cy="384048"/>
+            <a:off x="566928" y="2816352"/>
+            <a:ext cx="8229600" cy="237744"/>
           </a:xfrm>
           <a:prstGeom prst="rect">
             <a:avLst/>
@@ -7065,59 +8986,30 @@
               <a:buNone/>
             </a:pPr>
             <a:r>
-              <a:rPr lang="en-US" sz="1500" dirty="0">
-                <a:solidFill>
-                  <a:srgbClr val="1E293B"/>
-                </a:solidFill>
-                <a:latin typeface="Calibri" pitchFamily="34" charset="0"/>
-                <a:ea typeface="Calibri" pitchFamily="34" charset="-122"/>
-                <a:cs typeface="Calibri" pitchFamily="34" charset="-120"/>
-              </a:rPr>
-              <a:t>🌱  fearful — base word: fear</a:t>
-            </a:r>
-            <a:endParaRPr lang="en-US" sz="1500" dirty="0"/>
-          </a:p>
-        </p:txBody>
-      </p:sp>
-      <p:sp>
-        <p:nvSpPr>
-          <p:cNvPr id="9" name="Shape 7"/>
-          <p:cNvSpPr/>
-          <p:nvPr/>
-        </p:nvSpPr>
-        <p:spPr>
-          <a:xfrm>
-            <a:off x="365760" y="2487168"/>
-            <a:ext cx="8412480" cy="621792"/>
-          </a:xfrm>
-          <a:prstGeom prst="roundRect">
-            <a:avLst>
-              <a:gd name="adj" fmla="val 14706"/>
-            </a:avLst>
-          </a:prstGeom>
-          <a:solidFill>
-            <a:srgbClr val="F0E8FF"/>
-          </a:solidFill>
-          <a:ln/>
-          <a:effectLst>
-            <a:outerShdw sx="100000" sy="100000" kx="0" ky="0" algn="bl" rotWithShape="0" blurRad="101600" dist="38100" dir="2700000">
-              <a:srgbClr val="000000">
-                <a:alpha val="12000"/>
-              </a:srgbClr>
-            </a:outerShdw>
-          </a:effectLst>
-        </p:spPr>
-      </p:sp>
-      <p:sp>
-        <p:nvSpPr>
-          <p:cNvPr id="10" name="Text 8"/>
-          <p:cNvSpPr/>
-          <p:nvPr/>
-        </p:nvSpPr>
-        <p:spPr>
-          <a:xfrm>
-            <a:off x="594360" y="2606040"/>
-            <a:ext cx="7863840" cy="384048"/>
+              <a:rPr lang="en-US" sz="1100" b="1" spc="100" kern="0" dirty="0">
+                <a:solidFill>
+                  <a:srgbClr val="34B76F"/>
+                </a:solidFill>
+                <a:latin typeface="Calibri" pitchFamily="34" charset="0"/>
+                <a:ea typeface="Calibri" pitchFamily="34" charset="-122"/>
+                <a:cs typeface="Calibri" pitchFamily="34" charset="-120"/>
+              </a:rPr>
+              <a:t>✅  CORRECTED</a:t>
+            </a:r>
+            <a:endParaRPr lang="en-US" sz="1100" dirty="0"/>
+          </a:p>
+        </p:txBody>
+      </p:sp>
+      <p:sp>
+        <p:nvSpPr>
+          <p:cNvPr id="9" name="Text 7"/>
+          <p:cNvSpPr/>
+          <p:nvPr/>
+        </p:nvSpPr>
+        <p:spPr>
+          <a:xfrm>
+            <a:off x="566928" y="3072384"/>
+            <a:ext cx="8010144" cy="685800"/>
           </a:xfrm>
           <a:prstGeom prst="rect">
             <a:avLst/>
@@ -7133,85 +9025,23 @@
               <a:buNone/>
             </a:pPr>
             <a:r>
-              <a:rPr lang="en-US" sz="1500" dirty="0">
-                <a:solidFill>
-                  <a:srgbClr val="1E293B"/>
-                </a:solidFill>
-                <a:latin typeface="Calibri" pitchFamily="34" charset="0"/>
-                <a:ea typeface="Calibri" pitchFamily="34" charset="-122"/>
-                <a:cs typeface="Calibri" pitchFamily="34" charset="-120"/>
-              </a:rPr>
-              <a:t>🌱  careful — base word: care</a:t>
-            </a:r>
-            <a:endParaRPr lang="en-US" sz="1500" dirty="0"/>
-          </a:p>
-        </p:txBody>
-      </p:sp>
-      <p:sp>
-        <p:nvSpPr>
-          <p:cNvPr id="11" name="Shape 9"/>
-          <p:cNvSpPr/>
-          <p:nvPr/>
-        </p:nvSpPr>
-        <p:spPr>
-          <a:xfrm>
-            <a:off x="365760" y="3182112"/>
-            <a:ext cx="8412480" cy="621792"/>
-          </a:xfrm>
-          <a:prstGeom prst="roundRect">
-            <a:avLst>
-              <a:gd name="adj" fmla="val 14706"/>
-            </a:avLst>
-          </a:prstGeom>
-          <a:solidFill>
-            <a:srgbClr val="F8F4FF"/>
-          </a:solidFill>
-          <a:ln/>
-          <a:effectLst>
-            <a:outerShdw sx="100000" sy="100000" kx="0" ky="0" algn="bl" rotWithShape="0" blurRad="101600" dist="38100" dir="2700000">
-              <a:srgbClr val="000000">
-                <a:alpha val="12000"/>
-              </a:srgbClr>
-            </a:outerShdw>
-          </a:effectLst>
-        </p:spPr>
-      </p:sp>
-      <p:sp>
-        <p:nvSpPr>
-          <p:cNvPr id="12" name="Text 10"/>
-          <p:cNvSpPr/>
-          <p:nvPr/>
-        </p:nvSpPr>
-        <p:spPr>
-          <a:xfrm>
-            <a:off x="594360" y="3300984"/>
-            <a:ext cx="7863840" cy="384048"/>
-          </a:xfrm>
-          <a:prstGeom prst="rect">
-            <a:avLst/>
-          </a:prstGeom>
-          <a:noFill/>
-          <a:ln/>
-        </p:spPr>
-        <p:txBody>
-          <a:bodyPr wrap="square" lIns="0" tIns="0" rIns="0" bIns="0" rtlCol="0" anchor="ctr"/>
-          <a:lstStyle/>
-          <a:p>
-            <a:pPr indent="0" marL="0">
-              <a:buNone/>
-            </a:pPr>
-            <a:r>
-              <a:rPr lang="en-US" sz="1500" dirty="0">
-                <a:solidFill>
-                  <a:srgbClr val="1E293B"/>
-                </a:solidFill>
-                <a:latin typeface="Calibri" pitchFamily="34" charset="0"/>
-                <a:ea typeface="Calibri" pitchFamily="34" charset="-122"/>
-                <a:cs typeface="Calibri" pitchFamily="34" charset="-120"/>
-              </a:rPr>
-              <a:t>🌱  wonderful — base word: wonder</a:t>
-            </a:r>
-            <a:endParaRPr lang="en-US" sz="1500" dirty="0"/>
+              <a:rPr lang="en-US" sz="1400" i="1" dirty="0">
+                <a:solidFill>
+                  <a:srgbClr val="1E293B"/>
+                </a:solidFill>
+                <a:latin typeface="Calibri" pitchFamily="34" charset="0"/>
+                <a:ea typeface="Calibri" pitchFamily="34" charset="-122"/>
+                <a:cs typeface="Calibri" pitchFamily="34" charset="-120"/>
+              </a:rPr>
+              <a:t>Lester said he will call a meeting of the Mouse Council to decide what to do about Despereaux.</a:t>
+            </a:r>
+            <a:endParaRPr lang="en-US" sz="1400" dirty="0"/>
+          </a:p>
+          <a:p>
+            <a:pPr indent="0" marL="0">
+              <a:buNone/>
+            </a:pPr>
+            <a:endParaRPr lang="en-US" sz="1400" dirty="0"/>
           </a:p>
         </p:txBody>
       </p:sp>
